--- a/docs/presentation/conveyor_defect_detection_presentation.pptx
+++ b/docs/presentation/conveyor_defect_detection_presentation.pptx
@@ -2,20 +2,20 @@
 <file path=ppt/presentation.xml><?xml version="1.0" encoding="utf-8"?>
 <p:presentation xmlns:p="http://schemas.openxmlformats.org/presentationml/2006/main">
   <p:sldMasterIdLst>
-    <p:sldMasterId xmlns:r="http://schemas.openxmlformats.org/officeDocument/2006/relationships" id="2147483648" r:id="Rd1f5a25f33cc46dc"/>
+    <p:sldMasterId xmlns:r="http://schemas.openxmlformats.org/officeDocument/2006/relationships" id="2147483648" r:id="R58767f599f6e42c8"/>
   </p:sldMasterIdLst>
   <p:notesMasterIdLst>
-    <p:notesMasterId xmlns:r="http://schemas.openxmlformats.org/officeDocument/2006/relationships" r:id="Rcd28a1a9dea6470f"/>
+    <p:notesMasterId xmlns:r="http://schemas.openxmlformats.org/officeDocument/2006/relationships" r:id="R5090ce3b87ce4d39"/>
   </p:notesMasterIdLst>
   <p:sldIdLst>
-    <p:sldId xmlns:r="http://schemas.openxmlformats.org/officeDocument/2006/relationships" id="256" r:id="R88343a237f134e03"/>
-    <p:sldId xmlns:r="http://schemas.openxmlformats.org/officeDocument/2006/relationships" id="257" r:id="R497f9f869d254cb3"/>
-    <p:sldId xmlns:r="http://schemas.openxmlformats.org/officeDocument/2006/relationships" id="258" r:id="R7b3a0d67ddc54b6f"/>
-    <p:sldId xmlns:r="http://schemas.openxmlformats.org/officeDocument/2006/relationships" id="259" r:id="R9606e58308584091"/>
-    <p:sldId xmlns:r="http://schemas.openxmlformats.org/officeDocument/2006/relationships" id="260" r:id="Rec4e4c9ed2154e6a"/>
-    <p:sldId xmlns:r="http://schemas.openxmlformats.org/officeDocument/2006/relationships" id="261" r:id="R6cf76e7670084f58"/>
-    <p:sldId xmlns:r="http://schemas.openxmlformats.org/officeDocument/2006/relationships" id="262" r:id="R98c200b556ef4770"/>
-    <p:sldId xmlns:r="http://schemas.openxmlformats.org/officeDocument/2006/relationships" id="263" r:id="Rcd00a17253cb4b12"/>
+    <p:sldId xmlns:r="http://schemas.openxmlformats.org/officeDocument/2006/relationships" id="256" r:id="Rad4ed515c3154918"/>
+    <p:sldId xmlns:r="http://schemas.openxmlformats.org/officeDocument/2006/relationships" id="257" r:id="R2b10e894b9a64340"/>
+    <p:sldId xmlns:r="http://schemas.openxmlformats.org/officeDocument/2006/relationships" id="258" r:id="R2d356ac242a7457b"/>
+    <p:sldId xmlns:r="http://schemas.openxmlformats.org/officeDocument/2006/relationships" id="259" r:id="R7ac933e8578f46ae"/>
+    <p:sldId xmlns:r="http://schemas.openxmlformats.org/officeDocument/2006/relationships" id="260" r:id="R0e6eb63b883b4b6d"/>
+    <p:sldId xmlns:r="http://schemas.openxmlformats.org/officeDocument/2006/relationships" id="261" r:id="R9aaacfc0db6749f6"/>
+    <p:sldId xmlns:r="http://schemas.openxmlformats.org/officeDocument/2006/relationships" id="262" r:id="R43e11e1205c04d33"/>
+    <p:sldId xmlns:r="http://schemas.openxmlformats.org/officeDocument/2006/relationships" id="263" r:id="R5285bc67c60548c7"/>
   </p:sldIdLst>
   <p:sldSz cx="12192000" cy="6858000"/>
   <p:notesSz cx="6858000" cy="9144000"/>
@@ -444,7 +444,7 @@
           <a:lstStyle xmlns:a="http://schemas.openxmlformats.org/drawingml/2006/main"/>
           <a:p xmlns:a="http://schemas.openxmlformats.org/drawingml/2006/main">
             <a:r>
-              <a:t>Коротко представить тему, цель и итоговую структуру сдачи: GitHub, docs, ClearML showcase.</a:t>
+              <a:t>Представить тему, цель проекта и итоговые материалы: GitHub, ClearML, docs.</a:t>
             </a:r>
           </a:p>
           <a:p xmlns:a="http://schemas.openxmlformats.org/drawingml/2006/main">
@@ -464,7 +464,7 @@
           </a:p>
           <a:p xmlns:a="http://schemas.openxmlformats.org/drawingml/2006/main">
             <a:r>
-              <a:t>- Итоговая задача ClearML Defense Showcase (U-Net).</a:t>
+              <a:t>- Итоговая showcase-задача Defense Showcase (U-Net) в ClearML.</a:t>
             </a:r>
           </a:p>
         </p:txBody>
@@ -534,7 +534,7 @@
           <a:lstStyle xmlns:a="http://schemas.openxmlformats.org/drawingml/2006/main"/>
           <a:p xmlns:a="http://schemas.openxmlformats.org/drawingml/2006/main">
             <a:r>
-              <a:t>Подчеркнуть, что это учебная, но корректно объяснимая постановка для защиты.</a:t>
+              <a:t>Коротко объяснить, что это учебная, но корректная постановка.</a:t>
             </a:r>
           </a:p>
           <a:p xmlns:a="http://schemas.openxmlformats.org/drawingml/2006/main">
@@ -550,11 +550,6 @@
           <a:p xmlns:a="http://schemas.openxmlformats.org/drawingml/2006/main">
             <a:r>
               <a:t>- README.md проекта conveyor-defect-detection.</a:t>
-            </a:r>
-          </a:p>
-          <a:p xmlns:a="http://schemas.openxmlformats.org/drawingml/2006/main">
-            <a:r>
-              <a:t>- docs/report_source.md и docs/task_journal.md.</a:t>
             </a:r>
           </a:p>
         </p:txBody>
@@ -624,7 +619,7 @@
           <a:lstStyle xmlns:a="http://schemas.openxmlformats.org/drawingml/2006/main"/>
           <a:p xmlns:a="http://schemas.openxmlformats.org/drawingml/2006/main">
             <a:r>
-              <a:t>Объяснить, почему одной BCE недостаточно и зачем нужен Dice loss.</a:t>
+              <a:t>Объяснить, почему U-Net и почему BCE сочетается с Dice loss.</a:t>
             </a:r>
           </a:p>
           <a:p xmlns:a="http://schemas.openxmlformats.org/drawingml/2006/main">
@@ -640,11 +635,6 @@
           <a:p xmlns:a="http://schemas.openxmlformats.org/drawingml/2006/main">
             <a:r>
               <a:t>- README.md проекта conveyor-defect-detection.</a:t>
-            </a:r>
-          </a:p>
-          <a:p xmlns:a="http://schemas.openxmlformats.org/drawingml/2006/main">
-            <a:r>
-              <a:t>- docs/report_source.md и docs/task_journal.md.</a:t>
             </a:r>
           </a:p>
         </p:txBody>
@@ -714,7 +704,7 @@
           <a:lstStyle xmlns:a="http://schemas.openxmlformats.org/drawingml/2006/main"/>
           <a:p xmlns:a="http://schemas.openxmlformats.org/drawingml/2006/main">
             <a:r>
-              <a:t>Это один из главных ответов на замечания преподавателя.</a:t>
+              <a:t>Это основной ответ на замечание преподавателя про число эпох.</a:t>
             </a:r>
           </a:p>
           <a:p xmlns:a="http://schemas.openxmlformats.org/drawingml/2006/main">
@@ -804,7 +794,7 @@
           <a:lstStyle xmlns:a="http://schemas.openxmlformats.org/drawingml/2006/main"/>
           <a:p xmlns:a="http://schemas.openxmlformats.org/drawingml/2006/main">
             <a:r>
-              <a:t>Показать, что графики построены не только для bottle, но и для всех основных моделей.</a:t>
+              <a:t>Здесь удобно показать, что выбор конфигурации сделан по экспериментам, а не случайно.</a:t>
             </a:r>
           </a:p>
           <a:p xmlns:a="http://schemas.openxmlformats.org/drawingml/2006/main">
@@ -815,6 +805,11 @@
           <a:p xmlns:a="http://schemas.openxmlformats.org/drawingml/2006/main">
             <a:r>
               <a:t>[Sources]</a:t>
+            </a:r>
+          </a:p>
+          <a:p xmlns:a="http://schemas.openxmlformats.org/drawingml/2006/main">
+            <a:r>
+              <a:t>- results/teacher_revision/report_data/optimizer_argument.csv.</a:t>
             </a:r>
           </a:p>
           <a:p xmlns:a="http://schemas.openxmlformats.org/drawingml/2006/main">
@@ -889,7 +884,7 @@
           <a:lstStyle xmlns:a="http://schemas.openxmlformats.org/drawingml/2006/main"/>
           <a:p xmlns:a="http://schemas.openxmlformats.org/drawingml/2006/main">
             <a:r>
-              <a:t>Здесь важно проговорить, что отдельное обучение для bottle оказалось сильнее общего.</a:t>
+              <a:t>Ключевой вывод: для bottle отдельное обучение оказалось сильнее общего.</a:t>
             </a:r>
           </a:p>
           <a:p xmlns:a="http://schemas.openxmlformats.org/drawingml/2006/main">
@@ -974,7 +969,7 @@
           <a:lstStyle xmlns:a="http://schemas.openxmlformats.org/drawingml/2006/main"/>
           <a:p xmlns:a="http://schemas.openxmlformats.org/drawingml/2006/main">
             <a:r>
-              <a:t>Этот слайд нужен, чтобы перейти от метрик к наглядности.</a:t>
+              <a:t>Этот слайд нужен для перехода от чисел к реальным результатам.</a:t>
             </a:r>
           </a:p>
           <a:p xmlns:a="http://schemas.openxmlformats.org/drawingml/2006/main">
@@ -989,12 +984,7 @@
           </a:p>
           <a:p xmlns:a="http://schemas.openxmlformats.org/drawingml/2006/main">
             <a:r>
-              <a:t>- Итоговая задача ClearML Defense Showcase (U-Net).</a:t>
-            </a:r>
-          </a:p>
-          <a:p xmlns:a="http://schemas.openxmlformats.org/drawingml/2006/main">
-            <a:r>
-              <a:t>- docs/report_source.md и docs/task_journal.md.</a:t>
+              <a:t>- Итоговая showcase-задача Defense Showcase (U-Net) в ClearML.</a:t>
             </a:r>
           </a:p>
         </p:txBody>
@@ -1064,7 +1054,7 @@
           <a:lstStyle xmlns:a="http://schemas.openxmlformats.org/drawingml/2006/main"/>
           <a:p xmlns:a="http://schemas.openxmlformats.org/drawingml/2006/main">
             <a:r>
-              <a:t>Завершить слайд коротким выводом: проект готов к сдаче и очной защите.</a:t>
+              <a:t>Закончить коротким выводом: проект готов к защите и демонстрации.</a:t>
             </a:r>
           </a:p>
           <a:p xmlns:a="http://schemas.openxmlformats.org/drawingml/2006/main">
@@ -1084,12 +1074,12 @@
           </a:p>
           <a:p xmlns:a="http://schemas.openxmlformats.org/drawingml/2006/main">
             <a:r>
-              <a:t>- docs/report_source.md и docs/task_journal.md.</a:t>
-            </a:r>
-          </a:p>
-          <a:p xmlns:a="http://schemas.openxmlformats.org/drawingml/2006/main">
-            <a:r>
-              <a:t>- Итоговая задача ClearML Defense Showcase (U-Net).</a:t>
+              <a:t>- docs/report_source.md, docs/task_journal.md и docs/report.pdf.</a:t>
+            </a:r>
+          </a:p>
+          <a:p xmlns:a="http://schemas.openxmlformats.org/drawingml/2006/main">
+            <a:r>
+              <a:t>- Итоговая showcase-задача Defense Showcase (U-Net) в ClearML.</a:t>
             </a:r>
           </a:p>
         </p:txBody>
@@ -1136,7 +1126,7 @@
           <p:cNvPr id="1" name="Title 1">
             <a:extLst xmlns:a="http://schemas.openxmlformats.org/drawingml/2006/main">
               <a:ext uri="{FF2B5EF4-FFF2-40B4-BE49-F238E27FC236}">
-                <a16:creationId xmlns:a16="http://schemas.microsoft.com/office/drawing/2014/main" id="{71D4E2D3-B77D-40C8-BA63-331310A8383B}"/>
+                <a16:creationId xmlns:a16="http://schemas.microsoft.com/office/drawing/2014/main" id="{8738E85A-F1BC-4289-881C-9BE7841A423C}"/>
               </a:ext>
             </a:extLst>
           </p:cNvPr>
@@ -1167,7 +1157,7 @@
           <p:cNvPr id="2" name="Subtitle 2">
             <a:extLst xmlns:a="http://schemas.openxmlformats.org/drawingml/2006/main">
               <a:ext uri="{FF2B5EF4-FFF2-40B4-BE49-F238E27FC236}">
-                <a16:creationId xmlns:a16="http://schemas.microsoft.com/office/drawing/2014/main" id="{65B17D19-0077-43D2-BFEA-221607AA5269}"/>
+                <a16:creationId xmlns:a16="http://schemas.microsoft.com/office/drawing/2014/main" id="{F2CDA93B-9228-4697-B068-52AC795282B4}"/>
               </a:ext>
             </a:extLst>
           </p:cNvPr>
@@ -1230,7 +1220,7 @@
           <p:cNvPr id="3" name="Date Placeholder 3">
             <a:extLst xmlns:a="http://schemas.openxmlformats.org/drawingml/2006/main">
               <a:ext uri="{FF2B5EF4-FFF2-40B4-BE49-F238E27FC236}">
-                <a16:creationId xmlns:a16="http://schemas.microsoft.com/office/drawing/2014/main" id="{3ED82A64-9FD2-4ECE-B1A9-8C3B6D8BE10C}"/>
+                <a16:creationId xmlns:a16="http://schemas.microsoft.com/office/drawing/2014/main" id="{06723328-13FD-4F4F-9BC6-0DBEF3349A07}"/>
               </a:ext>
             </a:extLst>
           </p:cNvPr>
@@ -1251,7 +1241,7 @@
           <p:cNvPr id="4" name="Footer Placeholder 4">
             <a:extLst xmlns:a="http://schemas.openxmlformats.org/drawingml/2006/main">
               <a:ext uri="{FF2B5EF4-FFF2-40B4-BE49-F238E27FC236}">
-                <a16:creationId xmlns:a16="http://schemas.microsoft.com/office/drawing/2014/main" id="{623DCACA-D377-46D4-9181-72C4B29FD60D}"/>
+                <a16:creationId xmlns:a16="http://schemas.microsoft.com/office/drawing/2014/main" id="{C356E56D-7651-4660-A4D3-6792DA8E2044}"/>
               </a:ext>
             </a:extLst>
           </p:cNvPr>
@@ -1272,7 +1262,7 @@
           <p:cNvPr id="5" name="Slide Number Placeholder 5">
             <a:extLst xmlns:a="http://schemas.openxmlformats.org/drawingml/2006/main">
               <a:ext uri="{FF2B5EF4-FFF2-40B4-BE49-F238E27FC236}">
-                <a16:creationId xmlns:a16="http://schemas.microsoft.com/office/drawing/2014/main" id="{CF8FB0CB-3547-4076-A20A-07C3536CB66E}"/>
+                <a16:creationId xmlns:a16="http://schemas.microsoft.com/office/drawing/2014/main" id="{75C22673-2D44-4F8F-AA03-6970E94CAA50}"/>
               </a:ext>
             </a:extLst>
           </p:cNvPr>
@@ -1315,7 +1305,7 @@
           <p:cNvPr id="1" name="Slide Number Placeholder 5">
             <a:extLst xmlns:a="http://schemas.openxmlformats.org/drawingml/2006/main">
               <a:ext uri="{FF2B5EF4-FFF2-40B4-BE49-F238E27FC236}">
-                <a16:creationId xmlns:a16="http://schemas.microsoft.com/office/drawing/2014/main" id="{D0B74F95-A3EF-4377-9973-47BFDD910751}"/>
+                <a16:creationId xmlns:a16="http://schemas.microsoft.com/office/drawing/2014/main" id="{1BC21DD5-6E68-4505-9836-C1801D0E40C9}"/>
               </a:ext>
             </a:extLst>
           </p:cNvPr>
@@ -1354,7 +1344,7 @@
   </p:cSld>
   <p:clrMap bg1="lt1" tx1="dk1" bg2="lt2" tx2="dk2" accent1="accent1" accent2="accent2" accent3="accent3" accent4="accent4" accent5="accent5" accent6="accent6" hlink="hlink" folHlink="folHlink"/>
   <p:sldLayoutIdLst>
-    <p:sldLayoutId xmlns:r="http://schemas.openxmlformats.org/officeDocument/2006/relationships" id="2147483649" r:id="R5e41443656c441c3"/>
+    <p:sldLayoutId xmlns:r="http://schemas.openxmlformats.org/officeDocument/2006/relationships" id="2147483649" r:id="R8a18d3ee55b74e2a"/>
   </p:sldLayoutIdLst>
   <p:txStyles>
     <p:titleStyle>
@@ -1660,7 +1650,7 @@
           <p:cNvPr id="1" name="Slide Number Placeholder 5">
             <a:extLst xmlns:a="http://schemas.openxmlformats.org/drawingml/2006/main">
               <a:ext uri="{FF2B5EF4-FFF2-40B4-BE49-F238E27FC236}">
-                <a16:creationId xmlns:a16="http://schemas.microsoft.com/office/drawing/2014/main" id="{CF8FB0CB-3547-4076-A20A-07C3536CB66E}"/>
+                <a16:creationId xmlns:a16="http://schemas.microsoft.com/office/drawing/2014/main" id="{75C22673-2D44-4F8F-AA03-6970E94CAA50}"/>
               </a:ext>
             </a:extLst>
           </p:cNvPr>
@@ -1696,7 +1686,7 @@
           <p:nvPr/>
         </p:nvPicPr>
         <p:blipFill>
-          <a:blip xmlns:r="http://schemas.openxmlformats.org/officeDocument/2006/relationships" xmlns:a="http://schemas.openxmlformats.org/drawingml/2006/main" r:embed="R75707ae9553d48af"/>
+          <a:blip xmlns:r="http://schemas.openxmlformats.org/officeDocument/2006/relationships" xmlns:a="http://schemas.openxmlformats.org/drawingml/2006/main" r:embed="Rf510053f8e1141b7"/>
           <a:srcRect xmlns:a="http://schemas.openxmlformats.org/drawingml/2006/main" l="0" t="15239" r="0" b="15239"/>
           <a:stretch xmlns:a="http://schemas.openxmlformats.org/drawingml/2006/main">
             <a:fillRect l="0" t="0" r="0" b="0"/>
@@ -1717,7 +1707,7 @@
           <p:cNvPr id="3" name="">
             <a:extLst xmlns:a="http://schemas.openxmlformats.org/drawingml/2006/main">
               <a:ext uri="{FF2B5EF4-FFF2-40B4-BE49-F238E27FC236}">
-                <a16:creationId xmlns:a16="http://schemas.microsoft.com/office/drawing/2014/main" id="{43E3B081-35C3-4602-B977-CDAFDE55F603}"/>
+                <a16:creationId xmlns:a16="http://schemas.microsoft.com/office/drawing/2014/main" id="{FF13D5FF-2045-4EE4-AAD2-82BB221C53F9}"/>
               </a:ext>
             </a:extLst>
           </p:cNvPr>
@@ -1754,7 +1744,7 @@
           <p:cNvPr id="4" name="">
             <a:extLst xmlns:a="http://schemas.openxmlformats.org/drawingml/2006/main">
               <a:ext uri="{FF2B5EF4-FFF2-40B4-BE49-F238E27FC236}">
-                <a16:creationId xmlns:a16="http://schemas.microsoft.com/office/drawing/2014/main" id="{AE91BA00-5AF0-49CC-9138-2BD3EADCE1D5}"/>
+                <a16:creationId xmlns:a16="http://schemas.microsoft.com/office/drawing/2014/main" id="{C780F869-2D3C-4FC2-8315-693C399BE6BD}"/>
               </a:ext>
             </a:extLst>
           </p:cNvPr>
@@ -1789,7 +1779,7 @@
           <p:cNvPr id="5" name="">
             <a:extLst xmlns:a="http://schemas.openxmlformats.org/drawingml/2006/main">
               <a:ext uri="{FF2B5EF4-FFF2-40B4-BE49-F238E27FC236}">
-                <a16:creationId xmlns:a16="http://schemas.microsoft.com/office/drawing/2014/main" id="{80D56916-8684-4C0F-9F6B-D4DB76ED957C}"/>
+                <a16:creationId xmlns:a16="http://schemas.microsoft.com/office/drawing/2014/main" id="{E43F4372-275D-4A31-B122-E3A03301E2BA}"/>
               </a:ext>
             </a:extLst>
           </p:cNvPr>
@@ -1847,7 +1837,7 @@
           <p:cNvPr id="6" name="">
             <a:extLst xmlns:a="http://schemas.openxmlformats.org/drawingml/2006/main">
               <a:ext uri="{FF2B5EF4-FFF2-40B4-BE49-F238E27FC236}">
-                <a16:creationId xmlns:a16="http://schemas.microsoft.com/office/drawing/2014/main" id="{F630C3B9-6819-4836-932A-782D45DF4C26}"/>
+                <a16:creationId xmlns:a16="http://schemas.microsoft.com/office/drawing/2014/main" id="{9778F470-EBD0-41E1-990C-01C9DED7BCB2}"/>
               </a:ext>
             </a:extLst>
           </p:cNvPr>
@@ -1905,7 +1895,7 @@
           <p:cNvPr id="7" name="">
             <a:extLst xmlns:a="http://schemas.openxmlformats.org/drawingml/2006/main">
               <a:ext uri="{FF2B5EF4-FFF2-40B4-BE49-F238E27FC236}">
-                <a16:creationId xmlns:a16="http://schemas.microsoft.com/office/drawing/2014/main" id="{2BC89829-F2DF-4492-86CC-D35B053C15C8}"/>
+                <a16:creationId xmlns:a16="http://schemas.microsoft.com/office/drawing/2014/main" id="{D64DABDC-3F9B-46E5-B5B9-B98995AA05AA}"/>
               </a:ext>
             </a:extLst>
           </p:cNvPr>
@@ -1953,7 +1943,7 @@
                   <a:srgbClr val="30363A"/>
                 </a:solidFill>
               </a:rPr>
-              <a:t>Учебный проект по курсу «Прикладные методы искусственного интеллекта» с отчётом в ClearML и GitHub-репозиторием.</a:t>
+              <a:t>Учебный проект по курсу «Прикладные методы искусственного интеллекта».</a:t>
             </a:r>
           </a:p>
         </p:txBody>
@@ -1963,7 +1953,7 @@
           <p:cNvPr id="8" name="">
             <a:extLst xmlns:a="http://schemas.openxmlformats.org/drawingml/2006/main">
               <a:ext uri="{FF2B5EF4-FFF2-40B4-BE49-F238E27FC236}">
-                <a16:creationId xmlns:a16="http://schemas.microsoft.com/office/drawing/2014/main" id="{C095F3A3-C3E1-422F-87F3-DD791D6A9932}"/>
+                <a16:creationId xmlns:a16="http://schemas.microsoft.com/office/drawing/2014/main" id="{EBA1C4AC-1BDB-4A7D-A213-7C7924B85610}"/>
               </a:ext>
             </a:extLst>
           </p:cNvPr>
@@ -2000,7 +1990,7 @@
           <p:cNvPr id="9" name="">
             <a:extLst xmlns:a="http://schemas.openxmlformats.org/drawingml/2006/main">
               <a:ext uri="{FF2B5EF4-FFF2-40B4-BE49-F238E27FC236}">
-                <a16:creationId xmlns:a16="http://schemas.microsoft.com/office/drawing/2014/main" id="{9359A300-2CE2-4E32-A4F7-B48F53F3C58E}"/>
+                <a16:creationId xmlns:a16="http://schemas.microsoft.com/office/drawing/2014/main" id="{EBF07E67-5631-4FA4-A40E-691FDE0E39BE}"/>
               </a:ext>
             </a:extLst>
           </p:cNvPr>
@@ -2048,7 +2038,7 @@
                   <a:srgbClr val="101214"/>
                 </a:solidFill>
               </a:rPr>
-              <a:t>Задача проекта: не просто определить наличие дефекта, а выделить его точную область в виде маски.</a:t>
+              <a:t>Цель: выделять область дефекта в виде маски.</a:t>
             </a:r>
           </a:p>
         </p:txBody>
@@ -2058,7 +2048,7 @@
           <p:cNvPr id="10" name="">
             <a:extLst xmlns:a="http://schemas.openxmlformats.org/drawingml/2006/main">
               <a:ext uri="{FF2B5EF4-FFF2-40B4-BE49-F238E27FC236}">
-                <a16:creationId xmlns:a16="http://schemas.microsoft.com/office/drawing/2014/main" id="{C4DDBD74-E578-4B45-8E99-85D1FEA4EB98}"/>
+                <a16:creationId xmlns:a16="http://schemas.microsoft.com/office/drawing/2014/main" id="{F5902F56-34C3-48D9-AD98-9DFA40918C59}"/>
               </a:ext>
             </a:extLst>
           </p:cNvPr>
@@ -2114,7 +2104,7 @@
     </p:spTree>
     <p:extLst>
       <p:ext uri="{BB962C8B-B14F-4D97-AF65-F5344CB8AC3E}">
-        <p14:creationId xmlns:p14="http://schemas.microsoft.com/office/powerpoint/2010/main" val="172381934"/>
+        <p14:creationId xmlns:p14="http://schemas.microsoft.com/office/powerpoint/2010/main" val="1319256154"/>
       </p:ext>
     </p:extLst>
   </p:cSld>
@@ -2145,7 +2135,7 @@
           <p:cNvPr id="1" name="Slide Number Placeholder 5">
             <a:extLst xmlns:a="http://schemas.openxmlformats.org/drawingml/2006/main">
               <a:ext uri="{FF2B5EF4-FFF2-40B4-BE49-F238E27FC236}">
-                <a16:creationId xmlns:a16="http://schemas.microsoft.com/office/drawing/2014/main" id="{CF8FB0CB-3547-4076-A20A-07C3536CB66E}"/>
+                <a16:creationId xmlns:a16="http://schemas.microsoft.com/office/drawing/2014/main" id="{75C22673-2D44-4F8F-AA03-6970E94CAA50}"/>
               </a:ext>
             </a:extLst>
           </p:cNvPr>
@@ -2181,7 +2171,7 @@
           <p:nvPr/>
         </p:nvPicPr>
         <p:blipFill>
-          <a:blip xmlns:r="http://schemas.openxmlformats.org/officeDocument/2006/relationships" xmlns:a="http://schemas.openxmlformats.org/drawingml/2006/main" r:embed="Re25fccad959e47db"/>
+          <a:blip xmlns:r="http://schemas.openxmlformats.org/officeDocument/2006/relationships" xmlns:a="http://schemas.openxmlformats.org/drawingml/2006/main" r:embed="R882e12f2b6174a16"/>
           <a:srcRect xmlns:a="http://schemas.openxmlformats.org/drawingml/2006/main" l="0" t="26017" r="0" b="26017"/>
           <a:stretch xmlns:a="http://schemas.openxmlformats.org/drawingml/2006/main">
             <a:fillRect l="0" t="0" r="0" b="0"/>
@@ -2202,7 +2192,7 @@
           <p:cNvPr id="3" name="">
             <a:extLst xmlns:a="http://schemas.openxmlformats.org/drawingml/2006/main">
               <a:ext uri="{FF2B5EF4-FFF2-40B4-BE49-F238E27FC236}">
-                <a16:creationId xmlns:a16="http://schemas.microsoft.com/office/drawing/2014/main" id="{CE1A1727-5FA0-43E8-A52F-F287BB7A5CD0}"/>
+                <a16:creationId xmlns:a16="http://schemas.microsoft.com/office/drawing/2014/main" id="{244CCC85-718B-428F-83F2-BA1E852F8746}"/>
               </a:ext>
             </a:extLst>
           </p:cNvPr>
@@ -2239,7 +2229,7 @@
           <p:cNvPr id="4" name="">
             <a:extLst xmlns:a="http://schemas.openxmlformats.org/drawingml/2006/main">
               <a:ext uri="{FF2B5EF4-FFF2-40B4-BE49-F238E27FC236}">
-                <a16:creationId xmlns:a16="http://schemas.microsoft.com/office/drawing/2014/main" id="{B8C225AE-1068-4225-B5C3-8AD11337F7E2}"/>
+                <a16:creationId xmlns:a16="http://schemas.microsoft.com/office/drawing/2014/main" id="{76CBA635-091C-4220-9585-39E1631E976F}"/>
               </a:ext>
             </a:extLst>
           </p:cNvPr>
@@ -2297,7 +2287,7 @@
           <p:cNvPr id="5" name="">
             <a:extLst xmlns:a="http://schemas.openxmlformats.org/drawingml/2006/main">
               <a:ext uri="{FF2B5EF4-FFF2-40B4-BE49-F238E27FC236}">
-                <a16:creationId xmlns:a16="http://schemas.microsoft.com/office/drawing/2014/main" id="{160DADA4-7245-4CD5-BC00-3B96E179AA5D}"/>
+                <a16:creationId xmlns:a16="http://schemas.microsoft.com/office/drawing/2014/main" id="{3198DA34-9F9C-44F4-B74B-EA7F701E005C}"/>
               </a:ext>
             </a:extLst>
           </p:cNvPr>
@@ -2355,7 +2345,7 @@
           <p:cNvPr id="6" name="">
             <a:extLst xmlns:a="http://schemas.openxmlformats.org/drawingml/2006/main">
               <a:ext uri="{FF2B5EF4-FFF2-40B4-BE49-F238E27FC236}">
-                <a16:creationId xmlns:a16="http://schemas.microsoft.com/office/drawing/2014/main" id="{188B3696-E09D-4B0E-A9BD-D384A4D4DA42}"/>
+                <a16:creationId xmlns:a16="http://schemas.microsoft.com/office/drawing/2014/main" id="{72DB3747-BC2C-43D9-B215-F885D8159135}"/>
               </a:ext>
             </a:extLst>
           </p:cNvPr>
@@ -2390,7 +2380,7 @@
           <p:cNvPr id="7" name="">
             <a:extLst xmlns:a="http://schemas.openxmlformats.org/drawingml/2006/main">
               <a:ext uri="{FF2B5EF4-FFF2-40B4-BE49-F238E27FC236}">
-                <a16:creationId xmlns:a16="http://schemas.microsoft.com/office/drawing/2014/main" id="{D7CD78AD-B9DE-4EF9-9CD1-BE4DD64D4C4C}"/>
+                <a16:creationId xmlns:a16="http://schemas.microsoft.com/office/drawing/2014/main" id="{C93FF28C-984B-48BD-AB2E-3665FD507E47}"/>
               </a:ext>
             </a:extLst>
           </p:cNvPr>
@@ -2423,7 +2413,7 @@
           <p:cNvPr id="8" name="">
             <a:extLst xmlns:a="http://schemas.openxmlformats.org/drawingml/2006/main">
               <a:ext uri="{FF2B5EF4-FFF2-40B4-BE49-F238E27FC236}">
-                <a16:creationId xmlns:a16="http://schemas.microsoft.com/office/drawing/2014/main" id="{7C9C88BC-6BB3-48A4-A4EA-2D56A602BC63}"/>
+                <a16:creationId xmlns:a16="http://schemas.microsoft.com/office/drawing/2014/main" id="{2FFE6E41-84C5-4992-9AB7-34AF4F9985DD}"/>
               </a:ext>
             </a:extLst>
           </p:cNvPr>
@@ -2471,7 +2461,7 @@
                   <a:srgbClr val="101214"/>
                 </a:solidFill>
               </a:rPr>
-              <a:t>Постановка задачи и датасет</a:t>
+              <a:t>Задача и датасет</a:t>
             </a:r>
           </a:p>
         </p:txBody>
@@ -2481,7 +2471,7 @@
           <p:cNvPr id="9" name="">
             <a:extLst xmlns:a="http://schemas.openxmlformats.org/drawingml/2006/main">
               <a:ext uri="{FF2B5EF4-FFF2-40B4-BE49-F238E27FC236}">
-                <a16:creationId xmlns:a16="http://schemas.microsoft.com/office/drawing/2014/main" id="{2315A1D1-E595-4636-9432-DB647225D280}"/>
+                <a16:creationId xmlns:a16="http://schemas.microsoft.com/office/drawing/2014/main" id="{D7B5C1B9-A8B0-4FE0-B9CF-38C438294A43}"/>
               </a:ext>
             </a:extLst>
           </p:cNvPr>
@@ -2529,7 +2519,7 @@
                   <a:srgbClr val="30363A"/>
                 </a:solidFill>
               </a:rPr>
-              <a:t>Используется MVTec AD, а обучение U-Net построено на локальном train/validation split размеченного test-набора.</a:t>
+              <a:t>Используется MVTec AD и локальный train/validation split размеченного test-набора.</a:t>
             </a:r>
           </a:p>
         </p:txBody>
@@ -2539,7 +2529,7 @@
           <p:cNvPr id="10" name="">
             <a:extLst xmlns:a="http://schemas.openxmlformats.org/drawingml/2006/main">
               <a:ext uri="{FF2B5EF4-FFF2-40B4-BE49-F238E27FC236}">
-                <a16:creationId xmlns:a16="http://schemas.microsoft.com/office/drawing/2014/main" id="{6337BA30-9527-45D6-94D4-ABD9FF7C3203}"/>
+                <a16:creationId xmlns:a16="http://schemas.microsoft.com/office/drawing/2014/main" id="{10837173-4A71-4124-873C-FFB250A8D198}"/>
               </a:ext>
             </a:extLst>
           </p:cNvPr>
@@ -2576,7 +2566,7 @@
           <p:cNvPr id="11" name="">
             <a:extLst xmlns:a="http://schemas.openxmlformats.org/drawingml/2006/main">
               <a:ext uri="{FF2B5EF4-FFF2-40B4-BE49-F238E27FC236}">
-                <a16:creationId xmlns:a16="http://schemas.microsoft.com/office/drawing/2014/main" id="{9B1BFB82-F344-4FC2-BC7C-B193E795D37E}"/>
+                <a16:creationId xmlns:a16="http://schemas.microsoft.com/office/drawing/2014/main" id="{A45277DC-46D4-45C5-ABCB-283C8CA322F3}"/>
               </a:ext>
             </a:extLst>
           </p:cNvPr>
@@ -2611,7 +2601,7 @@
           <p:cNvPr id="12" name="">
             <a:extLst xmlns:a="http://schemas.openxmlformats.org/drawingml/2006/main">
               <a:ext uri="{FF2B5EF4-FFF2-40B4-BE49-F238E27FC236}">
-                <a16:creationId xmlns:a16="http://schemas.microsoft.com/office/drawing/2014/main" id="{1EFF10B4-3A68-4304-B619-8D54064DCB94}"/>
+                <a16:creationId xmlns:a16="http://schemas.microsoft.com/office/drawing/2014/main" id="{83E3B05E-5D0E-46BF-9785-8200B39D6D38}"/>
               </a:ext>
             </a:extLst>
           </p:cNvPr>
@@ -2646,7 +2636,7 @@
           <p:cNvPr id="13" name="">
             <a:extLst xmlns:a="http://schemas.openxmlformats.org/drawingml/2006/main">
               <a:ext uri="{FF2B5EF4-FFF2-40B4-BE49-F238E27FC236}">
-                <a16:creationId xmlns:a16="http://schemas.microsoft.com/office/drawing/2014/main" id="{72E6E4C2-B7CE-4F52-A408-25E2E7F90884}"/>
+                <a16:creationId xmlns:a16="http://schemas.microsoft.com/office/drawing/2014/main" id="{DA77458A-37EA-4F45-B1BB-01CF725219AC}"/>
               </a:ext>
             </a:extLst>
           </p:cNvPr>
@@ -2681,7 +2671,7 @@
           <p:cNvPr id="14" name="">
             <a:extLst xmlns:a="http://schemas.openxmlformats.org/drawingml/2006/main">
               <a:ext uri="{FF2B5EF4-FFF2-40B4-BE49-F238E27FC236}">
-                <a16:creationId xmlns:a16="http://schemas.microsoft.com/office/drawing/2014/main" id="{97EAFEC7-348B-4F26-A53F-75E76D1EA50E}"/>
+                <a16:creationId xmlns:a16="http://schemas.microsoft.com/office/drawing/2014/main" id="{478EA1A4-8CFC-4962-B14E-3934B71B496F}"/>
               </a:ext>
             </a:extLst>
           </p:cNvPr>
@@ -2716,7 +2706,7 @@
           <p:cNvPr id="15" name="">
             <a:extLst xmlns:a="http://schemas.openxmlformats.org/drawingml/2006/main">
               <a:ext uri="{FF2B5EF4-FFF2-40B4-BE49-F238E27FC236}">
-                <a16:creationId xmlns:a16="http://schemas.microsoft.com/office/drawing/2014/main" id="{80B5E35C-7519-4896-BB0E-0E8B303D7404}"/>
+                <a16:creationId xmlns:a16="http://schemas.microsoft.com/office/drawing/2014/main" id="{7A53426C-20CB-4798-A468-1DD441BC5213}"/>
               </a:ext>
             </a:extLst>
           </p:cNvPr>
@@ -2751,7 +2741,7 @@
           <p:cNvPr id="16" name="">
             <a:extLst xmlns:a="http://schemas.openxmlformats.org/drawingml/2006/main">
               <a:ext uri="{FF2B5EF4-FFF2-40B4-BE49-F238E27FC236}">
-                <a16:creationId xmlns:a16="http://schemas.microsoft.com/office/drawing/2014/main" id="{CE857CEA-0CD3-4DC0-85B7-7EC11D93FB1E}"/>
+                <a16:creationId xmlns:a16="http://schemas.microsoft.com/office/drawing/2014/main" id="{C39C8ECC-E7B6-4B35-8603-E321A64348C0}"/>
               </a:ext>
             </a:extLst>
           </p:cNvPr>
@@ -2809,7 +2799,7 @@
           <p:cNvPr id="17" name="">
             <a:extLst xmlns:a="http://schemas.openxmlformats.org/drawingml/2006/main">
               <a:ext uri="{FF2B5EF4-FFF2-40B4-BE49-F238E27FC236}">
-                <a16:creationId xmlns:a16="http://schemas.microsoft.com/office/drawing/2014/main" id="{ED3D4325-3FF9-4D17-905F-29E341B2DE9B}"/>
+                <a16:creationId xmlns:a16="http://schemas.microsoft.com/office/drawing/2014/main" id="{E5659C54-CC27-4FF5-9B34-A6090930CBD4}"/>
               </a:ext>
             </a:extLst>
           </p:cNvPr>
@@ -2845,14 +2835,14 @@
           <a:lstStyle xmlns:a="http://schemas.openxmlformats.org/drawingml/2006/main"/>
           <a:p xmlns:a="http://schemas.openxmlformats.org/drawingml/2006/main">
             <a:pPr algn="l">
-              <a:defRPr sz="1050" b="0">
+              <a:defRPr sz="1275" b="0">
                 <a:solidFill>
                   <a:srgbClr val="101214"/>
                 </a:solidFill>
               </a:defRPr>
             </a:pPr>
             <a:r>
-              <a:rPr sz="1050" b="0">
+              <a:rPr sz="1275" b="0">
                 <a:solidFill>
                   <a:srgbClr val="101214"/>
                 </a:solidFill>
@@ -2862,14 +2852,14 @@
           </a:p>
           <a:p xmlns:a="http://schemas.openxmlformats.org/drawingml/2006/main">
             <a:pPr algn="l">
-              <a:defRPr sz="1050" b="0">
+              <a:defRPr sz="1275" b="0">
                 <a:solidFill>
                   <a:srgbClr val="101214"/>
                 </a:solidFill>
               </a:defRPr>
             </a:pPr>
             <a:r>
-              <a:rPr sz="1050" b="0">
+              <a:rPr sz="1275" b="0">
                 <a:solidFill>
                   <a:srgbClr val="101214"/>
                 </a:solidFill>
@@ -2879,14 +2869,14 @@
           </a:p>
           <a:p xmlns:a="http://schemas.openxmlformats.org/drawingml/2006/main">
             <a:pPr algn="l">
-              <a:defRPr sz="1050" b="0">
+              <a:defRPr sz="1275" b="0">
                 <a:solidFill>
                   <a:srgbClr val="101214"/>
                 </a:solidFill>
               </a:defRPr>
             </a:pPr>
             <a:r>
-              <a:rPr sz="1050" b="0">
+              <a:rPr sz="1275" b="0">
                 <a:solidFill>
                   <a:srgbClr val="101214"/>
                 </a:solidFill>
@@ -2901,7 +2891,7 @@
           <p:cNvPr id="18" name="">
             <a:extLst xmlns:a="http://schemas.openxmlformats.org/drawingml/2006/main">
               <a:ext uri="{FF2B5EF4-FFF2-40B4-BE49-F238E27FC236}">
-                <a16:creationId xmlns:a16="http://schemas.microsoft.com/office/drawing/2014/main" id="{4974EAF8-3716-4BD8-AA59-90987ECD24F2}"/>
+                <a16:creationId xmlns:a16="http://schemas.microsoft.com/office/drawing/2014/main" id="{CF4D6019-87F9-4EF0-8C43-9A342EF871A4}"/>
               </a:ext>
             </a:extLst>
           </p:cNvPr>
@@ -2938,7 +2928,7 @@
           <p:cNvPr id="19" name="">
             <a:extLst xmlns:a="http://schemas.openxmlformats.org/drawingml/2006/main">
               <a:ext uri="{FF2B5EF4-FFF2-40B4-BE49-F238E27FC236}">
-                <a16:creationId xmlns:a16="http://schemas.microsoft.com/office/drawing/2014/main" id="{E4A2F185-F8B9-4AC4-8484-C10A96B244E6}"/>
+                <a16:creationId xmlns:a16="http://schemas.microsoft.com/office/drawing/2014/main" id="{37EFBDD5-25F3-4801-8698-E70949D62371}"/>
               </a:ext>
             </a:extLst>
           </p:cNvPr>
@@ -2973,7 +2963,7 @@
           <p:cNvPr id="20" name="">
             <a:extLst xmlns:a="http://schemas.openxmlformats.org/drawingml/2006/main">
               <a:ext uri="{FF2B5EF4-FFF2-40B4-BE49-F238E27FC236}">
-                <a16:creationId xmlns:a16="http://schemas.microsoft.com/office/drawing/2014/main" id="{E2608577-D6D9-4065-9AB1-36887DDF1AB8}"/>
+                <a16:creationId xmlns:a16="http://schemas.microsoft.com/office/drawing/2014/main" id="{C92A0F61-44B1-4CDD-AC0F-607CC3808ACC}"/>
               </a:ext>
             </a:extLst>
           </p:cNvPr>
@@ -3008,7 +2998,7 @@
           <p:cNvPr id="21" name="">
             <a:extLst xmlns:a="http://schemas.openxmlformats.org/drawingml/2006/main">
               <a:ext uri="{FF2B5EF4-FFF2-40B4-BE49-F238E27FC236}">
-                <a16:creationId xmlns:a16="http://schemas.microsoft.com/office/drawing/2014/main" id="{55F7EF51-840A-4DDB-8BFB-80C5A3B7E96E}"/>
+                <a16:creationId xmlns:a16="http://schemas.microsoft.com/office/drawing/2014/main" id="{859FFC50-AAEC-4B85-8F09-3BEE2DB351B2}"/>
               </a:ext>
             </a:extLst>
           </p:cNvPr>
@@ -3041,7 +3031,7 @@
           <p:cNvPr id="22" name="">
             <a:extLst xmlns:a="http://schemas.openxmlformats.org/drawingml/2006/main">
               <a:ext uri="{FF2B5EF4-FFF2-40B4-BE49-F238E27FC236}">
-                <a16:creationId xmlns:a16="http://schemas.microsoft.com/office/drawing/2014/main" id="{5E632D38-A729-4D01-8C37-DCFFF8EA0B93}"/>
+                <a16:creationId xmlns:a16="http://schemas.microsoft.com/office/drawing/2014/main" id="{2DE1BB52-9B63-46D8-92F5-5832ABE5E5C1}"/>
               </a:ext>
             </a:extLst>
           </p:cNvPr>
@@ -3074,7 +3064,7 @@
           <p:cNvPr id="23" name="">
             <a:extLst xmlns:a="http://schemas.openxmlformats.org/drawingml/2006/main">
               <a:ext uri="{FF2B5EF4-FFF2-40B4-BE49-F238E27FC236}">
-                <a16:creationId xmlns:a16="http://schemas.microsoft.com/office/drawing/2014/main" id="{95BA8E11-559B-4E77-944F-6FF2D085A9DD}"/>
+                <a16:creationId xmlns:a16="http://schemas.microsoft.com/office/drawing/2014/main" id="{C2AABCDE-C868-4426-86C0-95F0F786DBBF}"/>
               </a:ext>
             </a:extLst>
           </p:cNvPr>
@@ -3109,7 +3099,7 @@
           <p:cNvPr id="24" name="">
             <a:extLst xmlns:a="http://schemas.openxmlformats.org/drawingml/2006/main">
               <a:ext uri="{FF2B5EF4-FFF2-40B4-BE49-F238E27FC236}">
-                <a16:creationId xmlns:a16="http://schemas.microsoft.com/office/drawing/2014/main" id="{201B21AC-3990-409A-889E-09B26EE4C4EB}"/>
+                <a16:creationId xmlns:a16="http://schemas.microsoft.com/office/drawing/2014/main" id="{981378B1-FC21-45B3-B5FA-D477E2923D6A}"/>
               </a:ext>
             </a:extLst>
           </p:cNvPr>
@@ -3167,7 +3157,7 @@
           <p:cNvPr id="25" name="">
             <a:extLst xmlns:a="http://schemas.openxmlformats.org/drawingml/2006/main">
               <a:ext uri="{FF2B5EF4-FFF2-40B4-BE49-F238E27FC236}">
-                <a16:creationId xmlns:a16="http://schemas.microsoft.com/office/drawing/2014/main" id="{CD2E54D1-5D9A-443F-8E9D-CE13D0600244}"/>
+                <a16:creationId xmlns:a16="http://schemas.microsoft.com/office/drawing/2014/main" id="{4D71EC98-FAC5-4248-89FF-6947C7E4739F}"/>
               </a:ext>
             </a:extLst>
           </p:cNvPr>
@@ -3203,14 +3193,14 @@
           <a:lstStyle xmlns:a="http://schemas.openxmlformats.org/drawingml/2006/main"/>
           <a:p xmlns:a="http://schemas.openxmlformats.org/drawingml/2006/main">
             <a:pPr algn="l">
-              <a:defRPr sz="1050" b="0">
+              <a:defRPr sz="1275" b="0">
                 <a:solidFill>
                   <a:srgbClr val="101214"/>
                 </a:solidFill>
               </a:defRPr>
             </a:pPr>
             <a:r>
-              <a:rPr sz="1050" b="0">
+              <a:rPr sz="1275" b="0">
                 <a:solidFill>
                   <a:srgbClr val="101214"/>
                 </a:solidFill>
@@ -3220,14 +3210,14 @@
           </a:p>
           <a:p xmlns:a="http://schemas.openxmlformats.org/drawingml/2006/main">
             <a:pPr algn="l">
-              <a:defRPr sz="1050" b="0">
+              <a:defRPr sz="1275" b="0">
                 <a:solidFill>
                   <a:srgbClr val="101214"/>
                 </a:solidFill>
               </a:defRPr>
             </a:pPr>
             <a:r>
-              <a:rPr sz="1050" b="0">
+              <a:rPr sz="1275" b="0">
                 <a:solidFill>
                   <a:srgbClr val="101214"/>
                 </a:solidFill>
@@ -3237,14 +3227,14 @@
           </a:p>
           <a:p xmlns:a="http://schemas.openxmlformats.org/drawingml/2006/main">
             <a:pPr algn="l">
-              <a:defRPr sz="1050" b="0">
+              <a:defRPr sz="1275" b="0">
                 <a:solidFill>
                   <a:srgbClr val="101214"/>
                 </a:solidFill>
               </a:defRPr>
             </a:pPr>
             <a:r>
-              <a:rPr sz="1050" b="0">
+              <a:rPr sz="1275" b="0">
                 <a:solidFill>
                   <a:srgbClr val="101214"/>
                 </a:solidFill>
@@ -3259,7 +3249,7 @@
           <p:cNvPr id="26" name="">
             <a:extLst xmlns:a="http://schemas.openxmlformats.org/drawingml/2006/main">
               <a:ext uri="{FF2B5EF4-FFF2-40B4-BE49-F238E27FC236}">
-                <a16:creationId xmlns:a16="http://schemas.microsoft.com/office/drawing/2014/main" id="{0E583E79-7063-4D31-A0AF-AAC635DD200D}"/>
+                <a16:creationId xmlns:a16="http://schemas.microsoft.com/office/drawing/2014/main" id="{87B7C589-536F-4306-B0CF-26B2FC5D38F9}"/>
               </a:ext>
             </a:extLst>
           </p:cNvPr>
@@ -3296,7 +3286,7 @@
           <p:cNvPr id="27" name="">
             <a:extLst xmlns:a="http://schemas.openxmlformats.org/drawingml/2006/main">
               <a:ext uri="{FF2B5EF4-FFF2-40B4-BE49-F238E27FC236}">
-                <a16:creationId xmlns:a16="http://schemas.microsoft.com/office/drawing/2014/main" id="{412B4F6C-E4C8-4BC0-AA1D-46AC085C30A5}"/>
+                <a16:creationId xmlns:a16="http://schemas.microsoft.com/office/drawing/2014/main" id="{2CF12359-242E-40A4-8D98-71DC112BAD8E}"/>
               </a:ext>
             </a:extLst>
           </p:cNvPr>
@@ -3331,7 +3321,7 @@
           <p:cNvPr id="28" name="">
             <a:extLst xmlns:a="http://schemas.openxmlformats.org/drawingml/2006/main">
               <a:ext uri="{FF2B5EF4-FFF2-40B4-BE49-F238E27FC236}">
-                <a16:creationId xmlns:a16="http://schemas.microsoft.com/office/drawing/2014/main" id="{3AA695AE-5A33-4B17-ACEC-7E4C331AFEA9}"/>
+                <a16:creationId xmlns:a16="http://schemas.microsoft.com/office/drawing/2014/main" id="{FAE6B7F1-BF15-4BA6-94BF-94953C5C4588}"/>
               </a:ext>
             </a:extLst>
           </p:cNvPr>
@@ -3366,7 +3356,7 @@
           <p:cNvPr id="29" name="">
             <a:extLst xmlns:a="http://schemas.openxmlformats.org/drawingml/2006/main">
               <a:ext uri="{FF2B5EF4-FFF2-40B4-BE49-F238E27FC236}">
-                <a16:creationId xmlns:a16="http://schemas.microsoft.com/office/drawing/2014/main" id="{80126487-0409-44C6-8CC2-9DF499FE39FC}"/>
+                <a16:creationId xmlns:a16="http://schemas.microsoft.com/office/drawing/2014/main" id="{149190DA-921D-4B21-9CC5-1A4AB81FED4C}"/>
               </a:ext>
             </a:extLst>
           </p:cNvPr>
@@ -3401,7 +3391,7 @@
           <p:cNvPr id="30" name="">
             <a:extLst xmlns:a="http://schemas.openxmlformats.org/drawingml/2006/main">
               <a:ext uri="{FF2B5EF4-FFF2-40B4-BE49-F238E27FC236}">
-                <a16:creationId xmlns:a16="http://schemas.microsoft.com/office/drawing/2014/main" id="{37EC773D-62F9-401D-9CDB-CACEA6EEE6E4}"/>
+                <a16:creationId xmlns:a16="http://schemas.microsoft.com/office/drawing/2014/main" id="{8E5684C3-8127-47DD-962A-60F7CE2B1F4F}"/>
               </a:ext>
             </a:extLst>
           </p:cNvPr>
@@ -3436,7 +3426,7 @@
           <p:cNvPr id="31" name="">
             <a:extLst xmlns:a="http://schemas.openxmlformats.org/drawingml/2006/main">
               <a:ext uri="{FF2B5EF4-FFF2-40B4-BE49-F238E27FC236}">
-                <a16:creationId xmlns:a16="http://schemas.microsoft.com/office/drawing/2014/main" id="{EE3C5997-144E-4618-B8F2-FBDCCD7EC48E}"/>
+                <a16:creationId xmlns:a16="http://schemas.microsoft.com/office/drawing/2014/main" id="{B48B60BE-8D19-418A-B551-DA0420557308}"/>
               </a:ext>
             </a:extLst>
           </p:cNvPr>
@@ -3471,7 +3461,7 @@
           <p:cNvPr id="32" name="">
             <a:extLst xmlns:a="http://schemas.openxmlformats.org/drawingml/2006/main">
               <a:ext uri="{FF2B5EF4-FFF2-40B4-BE49-F238E27FC236}">
-                <a16:creationId xmlns:a16="http://schemas.microsoft.com/office/drawing/2014/main" id="{131C9385-E077-4DF4-92B5-1C49E0CE354D}"/>
+                <a16:creationId xmlns:a16="http://schemas.microsoft.com/office/drawing/2014/main" id="{203D7836-832D-43A7-BBB2-971D0272DCC9}"/>
               </a:ext>
             </a:extLst>
           </p:cNvPr>
@@ -3529,7 +3519,7 @@
           <p:cNvPr id="33" name="">
             <a:extLst xmlns:a="http://schemas.openxmlformats.org/drawingml/2006/main">
               <a:ext uri="{FF2B5EF4-FFF2-40B4-BE49-F238E27FC236}">
-                <a16:creationId xmlns:a16="http://schemas.microsoft.com/office/drawing/2014/main" id="{482F192A-F0AB-42A5-88F6-A47CA5F3B878}"/>
+                <a16:creationId xmlns:a16="http://schemas.microsoft.com/office/drawing/2014/main" id="{970B872B-F9A3-4330-9F5D-7687854E347D}"/>
               </a:ext>
             </a:extLst>
           </p:cNvPr>
@@ -3565,53 +3555,53 @@
           <a:lstStyle xmlns:a="http://schemas.openxmlformats.org/drawingml/2006/main"/>
           <a:p xmlns:a="http://schemas.openxmlformats.org/drawingml/2006/main">
             <a:pPr algn="l">
-              <a:defRPr sz="1050" b="0">
+              <a:defRPr sz="1275" b="0">
                 <a:solidFill>
                   <a:srgbClr val="101214"/>
                 </a:solidFill>
               </a:defRPr>
             </a:pPr>
             <a:r>
-              <a:rPr sz="1050" b="0">
+              <a:rPr sz="1275" b="0">
                 <a:solidFill>
                   <a:srgbClr val="101214"/>
                 </a:solidFill>
               </a:rPr>
-              <a:t>Маски есть только в test,</a:t>
+              <a:t>Маски есть в test, поэтому</a:t>
             </a:r>
           </a:p>
           <a:p xmlns:a="http://schemas.openxmlformats.org/drawingml/2006/main">
             <a:pPr algn="l">
-              <a:defRPr sz="1050" b="0">
+              <a:defRPr sz="1275" b="0">
                 <a:solidFill>
                   <a:srgbClr val="101214"/>
                 </a:solidFill>
               </a:defRPr>
             </a:pPr>
             <a:r>
-              <a:rPr sz="1050" b="0">
+              <a:rPr sz="1275" b="0">
                 <a:solidFill>
                   <a:srgbClr val="101214"/>
                 </a:solidFill>
               </a:rPr>
-              <a:t>поэтому используется</a:t>
+              <a:t>используется локальный</a:t>
             </a:r>
           </a:p>
           <a:p xmlns:a="http://schemas.openxmlformats.org/drawingml/2006/main">
             <a:pPr algn="l">
-              <a:defRPr sz="1050" b="0">
+              <a:defRPr sz="1275" b="0">
                 <a:solidFill>
                   <a:srgbClr val="101214"/>
                 </a:solidFill>
               </a:defRPr>
             </a:pPr>
             <a:r>
-              <a:rPr sz="1050" b="0">
+              <a:rPr sz="1275" b="0">
                 <a:solidFill>
                   <a:srgbClr val="101214"/>
                 </a:solidFill>
               </a:rPr>
-              <a:t>локальный split.</a:t>
+              <a:t>split.</a:t>
             </a:r>
           </a:p>
         </p:txBody>
@@ -3621,7 +3611,7 @@
           <p:cNvPr id="34" name="">
             <a:extLst xmlns:a="http://schemas.openxmlformats.org/drawingml/2006/main">
               <a:ext uri="{FF2B5EF4-FFF2-40B4-BE49-F238E27FC236}">
-                <a16:creationId xmlns:a16="http://schemas.microsoft.com/office/drawing/2014/main" id="{3977FF0F-BFF1-40E3-801D-0E9694AC8A88}"/>
+                <a16:creationId xmlns:a16="http://schemas.microsoft.com/office/drawing/2014/main" id="{3EA4D7EA-8C47-4F6B-ABA2-2793E4CA2D99}"/>
               </a:ext>
             </a:extLst>
           </p:cNvPr>
@@ -3677,7 +3667,7 @@
     </p:spTree>
     <p:extLst>
       <p:ext uri="{BB962C8B-B14F-4D97-AF65-F5344CB8AC3E}">
-        <p14:creationId xmlns:p14="http://schemas.microsoft.com/office/powerpoint/2010/main" val="1342232032"/>
+        <p14:creationId xmlns:p14="http://schemas.microsoft.com/office/powerpoint/2010/main" val="5284177"/>
       </p:ext>
     </p:extLst>
   </p:cSld>
@@ -3708,7 +3698,7 @@
           <p:cNvPr id="1" name="Slide Number Placeholder 5">
             <a:extLst xmlns:a="http://schemas.openxmlformats.org/drawingml/2006/main">
               <a:ext uri="{FF2B5EF4-FFF2-40B4-BE49-F238E27FC236}">
-                <a16:creationId xmlns:a16="http://schemas.microsoft.com/office/drawing/2014/main" id="{CF8FB0CB-3547-4076-A20A-07C3536CB66E}"/>
+                <a16:creationId xmlns:a16="http://schemas.microsoft.com/office/drawing/2014/main" id="{75C22673-2D44-4F8F-AA03-6970E94CAA50}"/>
               </a:ext>
             </a:extLst>
           </p:cNvPr>
@@ -3744,7 +3734,7 @@
           <p:nvPr/>
         </p:nvPicPr>
         <p:blipFill>
-          <a:blip xmlns:r="http://schemas.openxmlformats.org/officeDocument/2006/relationships" xmlns:a="http://schemas.openxmlformats.org/drawingml/2006/main" r:embed="R96f9c20e8069408b"/>
+          <a:blip xmlns:r="http://schemas.openxmlformats.org/officeDocument/2006/relationships" xmlns:a="http://schemas.openxmlformats.org/drawingml/2006/main" r:embed="R7e03ea0c1a224280"/>
           <a:srcRect xmlns:a="http://schemas.openxmlformats.org/drawingml/2006/main" l="0" t="2750" r="0" b="2750"/>
           <a:stretch xmlns:a="http://schemas.openxmlformats.org/drawingml/2006/main">
             <a:fillRect l="0" t="0" r="0" b="0"/>
@@ -3765,7 +3755,7 @@
           <p:cNvPr id="3" name="">
             <a:extLst xmlns:a="http://schemas.openxmlformats.org/drawingml/2006/main">
               <a:ext uri="{FF2B5EF4-FFF2-40B4-BE49-F238E27FC236}">
-                <a16:creationId xmlns:a16="http://schemas.microsoft.com/office/drawing/2014/main" id="{492A26A3-37EE-4DD0-9894-0859E4A27D8D}"/>
+                <a16:creationId xmlns:a16="http://schemas.microsoft.com/office/drawing/2014/main" id="{7A76C160-39A6-48E0-80BE-A63A834852E2}"/>
               </a:ext>
             </a:extLst>
           </p:cNvPr>
@@ -3802,7 +3792,7 @@
           <p:cNvPr id="4" name="">
             <a:extLst xmlns:a="http://schemas.openxmlformats.org/drawingml/2006/main">
               <a:ext uri="{FF2B5EF4-FFF2-40B4-BE49-F238E27FC236}">
-                <a16:creationId xmlns:a16="http://schemas.microsoft.com/office/drawing/2014/main" id="{B0AE5922-F731-4CF6-88C6-F9A95BACB04D}"/>
+                <a16:creationId xmlns:a16="http://schemas.microsoft.com/office/drawing/2014/main" id="{57411D3F-7E0D-445E-AC64-01E99479227F}"/>
               </a:ext>
             </a:extLst>
           </p:cNvPr>
@@ -3860,7 +3850,7 @@
           <p:cNvPr id="5" name="">
             <a:extLst xmlns:a="http://schemas.openxmlformats.org/drawingml/2006/main">
               <a:ext uri="{FF2B5EF4-FFF2-40B4-BE49-F238E27FC236}">
-                <a16:creationId xmlns:a16="http://schemas.microsoft.com/office/drawing/2014/main" id="{3B155FFD-E25B-4BE3-A703-353FCA37A1FF}"/>
+                <a16:creationId xmlns:a16="http://schemas.microsoft.com/office/drawing/2014/main" id="{96435EF8-8C59-425C-AE26-C5021624EDBC}"/>
               </a:ext>
             </a:extLst>
           </p:cNvPr>
@@ -3918,7 +3908,7 @@
           <p:cNvPr id="6" name="">
             <a:extLst xmlns:a="http://schemas.openxmlformats.org/drawingml/2006/main">
               <a:ext uri="{FF2B5EF4-FFF2-40B4-BE49-F238E27FC236}">
-                <a16:creationId xmlns:a16="http://schemas.microsoft.com/office/drawing/2014/main" id="{436C614B-A436-45B2-92FB-81D33340E80E}"/>
+                <a16:creationId xmlns:a16="http://schemas.microsoft.com/office/drawing/2014/main" id="{F65879DA-22DC-40DB-A43C-4EA6D2464575}"/>
               </a:ext>
             </a:extLst>
           </p:cNvPr>
@@ -3953,7 +3943,7 @@
           <p:cNvPr id="7" name="">
             <a:extLst xmlns:a="http://schemas.openxmlformats.org/drawingml/2006/main">
               <a:ext uri="{FF2B5EF4-FFF2-40B4-BE49-F238E27FC236}">
-                <a16:creationId xmlns:a16="http://schemas.microsoft.com/office/drawing/2014/main" id="{6081F49A-E130-4D44-9912-1FB2A52F9B1D}"/>
+                <a16:creationId xmlns:a16="http://schemas.microsoft.com/office/drawing/2014/main" id="{A6D7B253-7A42-457E-95F7-D4D080B1E121}"/>
               </a:ext>
             </a:extLst>
           </p:cNvPr>
@@ -3986,7 +3976,7 @@
           <p:cNvPr id="8" name="">
             <a:extLst xmlns:a="http://schemas.openxmlformats.org/drawingml/2006/main">
               <a:ext uri="{FF2B5EF4-FFF2-40B4-BE49-F238E27FC236}">
-                <a16:creationId xmlns:a16="http://schemas.microsoft.com/office/drawing/2014/main" id="{040B267A-D3C7-45AB-95B7-3FD62AE40F99}"/>
+                <a16:creationId xmlns:a16="http://schemas.microsoft.com/office/drawing/2014/main" id="{886C4AF4-F0D6-449A-938B-19B495B01963}"/>
               </a:ext>
             </a:extLst>
           </p:cNvPr>
@@ -4034,7 +4024,7 @@
                   <a:srgbClr val="101214"/>
                 </a:solidFill>
               </a:rPr>
-              <a:t>Архитектура и обучение</a:t>
+              <a:t>Модель и обучение</a:t>
             </a:r>
           </a:p>
         </p:txBody>
@@ -4044,7 +4034,7 @@
           <p:cNvPr id="9" name="">
             <a:extLst xmlns:a="http://schemas.openxmlformats.org/drawingml/2006/main">
               <a:ext uri="{FF2B5EF4-FFF2-40B4-BE49-F238E27FC236}">
-                <a16:creationId xmlns:a16="http://schemas.microsoft.com/office/drawing/2014/main" id="{FFE666CC-6E22-41AA-AA55-A6039088E459}"/>
+                <a16:creationId xmlns:a16="http://schemas.microsoft.com/office/drawing/2014/main" id="{0B2C0794-21C9-4F75-B774-74EFED606D5D}"/>
               </a:ext>
             </a:extLst>
           </p:cNvPr>
@@ -4102,7 +4092,7 @@
           <p:cNvPr id="10" name="">
             <a:extLst xmlns:a="http://schemas.openxmlformats.org/drawingml/2006/main">
               <a:ext uri="{FF2B5EF4-FFF2-40B4-BE49-F238E27FC236}">
-                <a16:creationId xmlns:a16="http://schemas.microsoft.com/office/drawing/2014/main" id="{96D6D338-0AC2-42F1-B07B-0E9654658F70}"/>
+                <a16:creationId xmlns:a16="http://schemas.microsoft.com/office/drawing/2014/main" id="{0CBE6EEE-B456-4D2E-8BB2-58C962DB0FDB}"/>
               </a:ext>
             </a:extLst>
           </p:cNvPr>
@@ -4139,7 +4129,7 @@
           <p:cNvPr id="11" name="">
             <a:extLst xmlns:a="http://schemas.openxmlformats.org/drawingml/2006/main">
               <a:ext uri="{FF2B5EF4-FFF2-40B4-BE49-F238E27FC236}">
-                <a16:creationId xmlns:a16="http://schemas.microsoft.com/office/drawing/2014/main" id="{EF0E3D4B-FD03-4BC8-8DD7-82D17862B924}"/>
+                <a16:creationId xmlns:a16="http://schemas.microsoft.com/office/drawing/2014/main" id="{9141E622-6E71-4697-87FF-916526A307B4}"/>
               </a:ext>
             </a:extLst>
           </p:cNvPr>
@@ -4174,7 +4164,7 @@
           <p:cNvPr id="12" name="">
             <a:extLst xmlns:a="http://schemas.openxmlformats.org/drawingml/2006/main">
               <a:ext uri="{FF2B5EF4-FFF2-40B4-BE49-F238E27FC236}">
-                <a16:creationId xmlns:a16="http://schemas.microsoft.com/office/drawing/2014/main" id="{947F3D5D-5CD3-4868-A1B3-CBEAA4887E0E}"/>
+                <a16:creationId xmlns:a16="http://schemas.microsoft.com/office/drawing/2014/main" id="{F9A4A994-36D7-49FC-B538-02CF80D90507}"/>
               </a:ext>
             </a:extLst>
           </p:cNvPr>
@@ -4232,7 +4222,7 @@
           <p:cNvPr id="13" name="">
             <a:extLst xmlns:a="http://schemas.openxmlformats.org/drawingml/2006/main">
               <a:ext uri="{FF2B5EF4-FFF2-40B4-BE49-F238E27FC236}">
-                <a16:creationId xmlns:a16="http://schemas.microsoft.com/office/drawing/2014/main" id="{CDFE4CDC-F989-4FD3-A578-A6765466A41D}"/>
+                <a16:creationId xmlns:a16="http://schemas.microsoft.com/office/drawing/2014/main" id="{50261D4E-A72C-49AB-BA84-E19E83590B7D}"/>
               </a:ext>
             </a:extLst>
           </p:cNvPr>
@@ -4280,7 +4270,7 @@
                   <a:srgbClr val="30363A"/>
                 </a:solidFill>
               </a:rPr>
-              <a:t>архитектура модели</a:t>
+              <a:t>архитектура</a:t>
             </a:r>
           </a:p>
         </p:txBody>
@@ -4290,7 +4280,7 @@
           <p:cNvPr id="14" name="">
             <a:extLst xmlns:a="http://schemas.openxmlformats.org/drawingml/2006/main">
               <a:ext uri="{FF2B5EF4-FFF2-40B4-BE49-F238E27FC236}">
-                <a16:creationId xmlns:a16="http://schemas.microsoft.com/office/drawing/2014/main" id="{E68E6D33-8B46-4781-B252-F85B81D84854}"/>
+                <a16:creationId xmlns:a16="http://schemas.microsoft.com/office/drawing/2014/main" id="{852B8A4E-12CB-49B5-B47F-0E6D8A2E69FC}"/>
               </a:ext>
             </a:extLst>
           </p:cNvPr>
@@ -4338,7 +4328,7 @@
                   <a:srgbClr val="687076"/>
                 </a:solidFill>
               </a:rPr>
-              <a:t>основная модель</a:t>
+              <a:t>модель сегментации</a:t>
             </a:r>
           </a:p>
         </p:txBody>
@@ -4348,7 +4338,7 @@
           <p:cNvPr id="15" name="">
             <a:extLst xmlns:a="http://schemas.openxmlformats.org/drawingml/2006/main">
               <a:ext uri="{FF2B5EF4-FFF2-40B4-BE49-F238E27FC236}">
-                <a16:creationId xmlns:a16="http://schemas.microsoft.com/office/drawing/2014/main" id="{46E69DA9-EA2C-46A2-BD46-0138394909DE}"/>
+                <a16:creationId xmlns:a16="http://schemas.microsoft.com/office/drawing/2014/main" id="{C930DF49-2430-4D7F-8326-D63CC0C888A1}"/>
               </a:ext>
             </a:extLst>
           </p:cNvPr>
@@ -4385,7 +4375,7 @@
           <p:cNvPr id="16" name="">
             <a:extLst xmlns:a="http://schemas.openxmlformats.org/drawingml/2006/main">
               <a:ext uri="{FF2B5EF4-FFF2-40B4-BE49-F238E27FC236}">
-                <a16:creationId xmlns:a16="http://schemas.microsoft.com/office/drawing/2014/main" id="{69F31C8E-AB26-4113-BFEE-D41289E4CE05}"/>
+                <a16:creationId xmlns:a16="http://schemas.microsoft.com/office/drawing/2014/main" id="{5F9691C1-8507-4C98-A736-454A80EBFDA1}"/>
               </a:ext>
             </a:extLst>
           </p:cNvPr>
@@ -4420,7 +4410,7 @@
           <p:cNvPr id="17" name="">
             <a:extLst xmlns:a="http://schemas.openxmlformats.org/drawingml/2006/main">
               <a:ext uri="{FF2B5EF4-FFF2-40B4-BE49-F238E27FC236}">
-                <a16:creationId xmlns:a16="http://schemas.microsoft.com/office/drawing/2014/main" id="{17D25217-0D29-42AE-ABCE-89D139FF18F1}"/>
+                <a16:creationId xmlns:a16="http://schemas.microsoft.com/office/drawing/2014/main" id="{1D0C78E8-C49D-47B4-A53B-F64D857778C7}"/>
               </a:ext>
             </a:extLst>
           </p:cNvPr>
@@ -4478,7 +4468,7 @@
           <p:cNvPr id="18" name="">
             <a:extLst xmlns:a="http://schemas.openxmlformats.org/drawingml/2006/main">
               <a:ext uri="{FF2B5EF4-FFF2-40B4-BE49-F238E27FC236}">
-                <a16:creationId xmlns:a16="http://schemas.microsoft.com/office/drawing/2014/main" id="{3A12ABCE-A1F4-4BAC-9261-FC11001589ED}"/>
+                <a16:creationId xmlns:a16="http://schemas.microsoft.com/office/drawing/2014/main" id="{BAFC3F72-A599-4587-A41B-A39FA81E65AD}"/>
               </a:ext>
             </a:extLst>
           </p:cNvPr>
@@ -4536,7 +4526,7 @@
           <p:cNvPr id="19" name="">
             <a:extLst xmlns:a="http://schemas.openxmlformats.org/drawingml/2006/main">
               <a:ext uri="{FF2B5EF4-FFF2-40B4-BE49-F238E27FC236}">
-                <a16:creationId xmlns:a16="http://schemas.microsoft.com/office/drawing/2014/main" id="{2E86F6CE-3CF0-4FC2-9C9F-22275C3442F9}"/>
+                <a16:creationId xmlns:a16="http://schemas.microsoft.com/office/drawing/2014/main" id="{AED1291A-9F76-4BCA-A115-082FEFC31F47}"/>
               </a:ext>
             </a:extLst>
           </p:cNvPr>
@@ -4584,7 +4574,7 @@
                   <a:srgbClr val="687076"/>
                 </a:solidFill>
               </a:rPr>
-              <a:t>устойчива к дисбалансу</a:t>
+              <a:t>для дисбаланса классов</a:t>
             </a:r>
           </a:p>
         </p:txBody>
@@ -4594,7 +4584,7 @@
           <p:cNvPr id="20" name="">
             <a:extLst xmlns:a="http://schemas.openxmlformats.org/drawingml/2006/main">
               <a:ext uri="{FF2B5EF4-FFF2-40B4-BE49-F238E27FC236}">
-                <a16:creationId xmlns:a16="http://schemas.microsoft.com/office/drawing/2014/main" id="{9A7AED0F-E3F8-42A9-8D0A-7BB92A987E87}"/>
+                <a16:creationId xmlns:a16="http://schemas.microsoft.com/office/drawing/2014/main" id="{7023A646-178E-40A8-93A5-69529D610E33}"/>
               </a:ext>
             </a:extLst>
           </p:cNvPr>
@@ -4631,7 +4621,7 @@
           <p:cNvPr id="21" name="">
             <a:extLst xmlns:a="http://schemas.openxmlformats.org/drawingml/2006/main">
               <a:ext uri="{FF2B5EF4-FFF2-40B4-BE49-F238E27FC236}">
-                <a16:creationId xmlns:a16="http://schemas.microsoft.com/office/drawing/2014/main" id="{57E29F66-4ADE-465E-A5A3-D4C5E0008B2E}"/>
+                <a16:creationId xmlns:a16="http://schemas.microsoft.com/office/drawing/2014/main" id="{656D9D3E-14CB-4EB3-97A7-108F7D2E1DE7}"/>
               </a:ext>
             </a:extLst>
           </p:cNvPr>
@@ -4666,7 +4656,7 @@
           <p:cNvPr id="22" name="">
             <a:extLst xmlns:a="http://schemas.openxmlformats.org/drawingml/2006/main">
               <a:ext uri="{FF2B5EF4-FFF2-40B4-BE49-F238E27FC236}">
-                <a16:creationId xmlns:a16="http://schemas.microsoft.com/office/drawing/2014/main" id="{D56849B5-0FE7-4F42-A8C9-D21943E15319}"/>
+                <a16:creationId xmlns:a16="http://schemas.microsoft.com/office/drawing/2014/main" id="{E4318E04-B12F-4DFE-BF5D-EBE6E327C0E8}"/>
               </a:ext>
             </a:extLst>
           </p:cNvPr>
@@ -4724,7 +4714,7 @@
           <p:cNvPr id="23" name="">
             <a:extLst xmlns:a="http://schemas.openxmlformats.org/drawingml/2006/main">
               <a:ext uri="{FF2B5EF4-FFF2-40B4-BE49-F238E27FC236}">
-                <a16:creationId xmlns:a16="http://schemas.microsoft.com/office/drawing/2014/main" id="{6C28F4C9-D729-4869-9011-F60B7FF80D25}"/>
+                <a16:creationId xmlns:a16="http://schemas.microsoft.com/office/drawing/2014/main" id="{90FEF15C-F9AB-4977-81DE-A50CDCC4EB7F}"/>
               </a:ext>
             </a:extLst>
           </p:cNvPr>
@@ -4772,7 +4762,7 @@
                   <a:srgbClr val="30363A"/>
                 </a:solidFill>
               </a:rPr>
-              <a:t>контроль переобучения</a:t>
+              <a:t>контроль обучения</a:t>
             </a:r>
           </a:p>
         </p:txBody>
@@ -4782,7 +4772,7 @@
           <p:cNvPr id="24" name="">
             <a:extLst xmlns:a="http://schemas.openxmlformats.org/drawingml/2006/main">
               <a:ext uri="{FF2B5EF4-FFF2-40B4-BE49-F238E27FC236}">
-                <a16:creationId xmlns:a16="http://schemas.microsoft.com/office/drawing/2014/main" id="{8AEE8204-C29D-46FF-94BA-0F8BE0280434}"/>
+                <a16:creationId xmlns:a16="http://schemas.microsoft.com/office/drawing/2014/main" id="{7FFD1A80-411C-4323-87FB-80FCA8ACC49D}"/>
               </a:ext>
             </a:extLst>
           </p:cNvPr>
@@ -4830,7 +4820,7 @@
                   <a:srgbClr val="687076"/>
                 </a:solidFill>
               </a:rPr>
-              <a:t>через validation error</a:t>
+              <a:t>по validation error</a:t>
             </a:r>
           </a:p>
         </p:txBody>
@@ -4840,7 +4830,7 @@
           <p:cNvPr id="25" name="">
             <a:extLst xmlns:a="http://schemas.openxmlformats.org/drawingml/2006/main">
               <a:ext uri="{FF2B5EF4-FFF2-40B4-BE49-F238E27FC236}">
-                <a16:creationId xmlns:a16="http://schemas.microsoft.com/office/drawing/2014/main" id="{6A3ECF0D-EF6F-4E8F-A532-4F4CF21FA3B2}"/>
+                <a16:creationId xmlns:a16="http://schemas.microsoft.com/office/drawing/2014/main" id="{A4A139BE-ED7E-4185-9D65-14E2D47442B2}"/>
               </a:ext>
             </a:extLst>
           </p:cNvPr>
@@ -4896,7 +4886,7 @@
     </p:spTree>
     <p:extLst>
       <p:ext uri="{BB962C8B-B14F-4D97-AF65-F5344CB8AC3E}">
-        <p14:creationId xmlns:p14="http://schemas.microsoft.com/office/powerpoint/2010/main" val="70899644"/>
+        <p14:creationId xmlns:p14="http://schemas.microsoft.com/office/powerpoint/2010/main" val="1901659262"/>
       </p:ext>
     </p:extLst>
   </p:cSld>
@@ -4927,7 +4917,7 @@
           <p:cNvPr id="1" name="Slide Number Placeholder 5">
             <a:extLst xmlns:a="http://schemas.openxmlformats.org/drawingml/2006/main">
               <a:ext uri="{FF2B5EF4-FFF2-40B4-BE49-F238E27FC236}">
-                <a16:creationId xmlns:a16="http://schemas.microsoft.com/office/drawing/2014/main" id="{CF8FB0CB-3547-4076-A20A-07C3536CB66E}"/>
+                <a16:creationId xmlns:a16="http://schemas.microsoft.com/office/drawing/2014/main" id="{75C22673-2D44-4F8F-AA03-6970E94CAA50}"/>
               </a:ext>
             </a:extLst>
           </p:cNvPr>
@@ -4963,7 +4953,7 @@
           <p:nvPr/>
         </p:nvPicPr>
         <p:blipFill>
-          <a:blip xmlns:r="http://schemas.openxmlformats.org/officeDocument/2006/relationships" xmlns:a="http://schemas.openxmlformats.org/drawingml/2006/main" r:embed="Rd17eb79e797d454c"/>
+          <a:blip xmlns:r="http://schemas.openxmlformats.org/officeDocument/2006/relationships" xmlns:a="http://schemas.openxmlformats.org/drawingml/2006/main" r:embed="R712315c9294447af"/>
           <a:srcRect xmlns:a="http://schemas.openxmlformats.org/drawingml/2006/main" l="0" t="2470" r="0" b="2470"/>
           <a:stretch xmlns:a="http://schemas.openxmlformats.org/drawingml/2006/main">
             <a:fillRect l="0" t="0" r="0" b="0"/>
@@ -4984,7 +4974,7 @@
           <p:cNvPr id="3" name="">
             <a:extLst xmlns:a="http://schemas.openxmlformats.org/drawingml/2006/main">
               <a:ext uri="{FF2B5EF4-FFF2-40B4-BE49-F238E27FC236}">
-                <a16:creationId xmlns:a16="http://schemas.microsoft.com/office/drawing/2014/main" id="{7E2201B5-A08D-4AE2-BA2C-ABEA4FD46ECB}"/>
+                <a16:creationId xmlns:a16="http://schemas.microsoft.com/office/drawing/2014/main" id="{AE06CC20-4DA9-4486-8304-B44053950D87}"/>
               </a:ext>
             </a:extLst>
           </p:cNvPr>
@@ -5021,7 +5011,7 @@
           <p:cNvPr id="4" name="">
             <a:extLst xmlns:a="http://schemas.openxmlformats.org/drawingml/2006/main">
               <a:ext uri="{FF2B5EF4-FFF2-40B4-BE49-F238E27FC236}">
-                <a16:creationId xmlns:a16="http://schemas.microsoft.com/office/drawing/2014/main" id="{DB27F3F1-DBBD-4010-87F9-AE1024197A66}"/>
+                <a16:creationId xmlns:a16="http://schemas.microsoft.com/office/drawing/2014/main" id="{B09B4FA1-7D69-47AC-A6E7-5D458EABE100}"/>
               </a:ext>
             </a:extLst>
           </p:cNvPr>
@@ -5079,7 +5069,7 @@
           <p:cNvPr id="5" name="">
             <a:extLst xmlns:a="http://schemas.openxmlformats.org/drawingml/2006/main">
               <a:ext uri="{FF2B5EF4-FFF2-40B4-BE49-F238E27FC236}">
-                <a16:creationId xmlns:a16="http://schemas.microsoft.com/office/drawing/2014/main" id="{7BAEBBCE-F000-41FE-92F0-F1CAA4AA26E5}"/>
+                <a16:creationId xmlns:a16="http://schemas.microsoft.com/office/drawing/2014/main" id="{A8B6526F-DEAE-452F-B2D7-89756C0546C9}"/>
               </a:ext>
             </a:extLst>
           </p:cNvPr>
@@ -5137,7 +5127,7 @@
           <p:cNvPr id="6" name="">
             <a:extLst xmlns:a="http://schemas.openxmlformats.org/drawingml/2006/main">
               <a:ext uri="{FF2B5EF4-FFF2-40B4-BE49-F238E27FC236}">
-                <a16:creationId xmlns:a16="http://schemas.microsoft.com/office/drawing/2014/main" id="{E545EC79-B199-4B95-9448-AEDFC9332638}"/>
+                <a16:creationId xmlns:a16="http://schemas.microsoft.com/office/drawing/2014/main" id="{D58FCE8B-9942-43D7-9E54-736773F35036}"/>
               </a:ext>
             </a:extLst>
           </p:cNvPr>
@@ -5172,7 +5162,7 @@
           <p:cNvPr id="7" name="">
             <a:extLst xmlns:a="http://schemas.openxmlformats.org/drawingml/2006/main">
               <a:ext uri="{FF2B5EF4-FFF2-40B4-BE49-F238E27FC236}">
-                <a16:creationId xmlns:a16="http://schemas.microsoft.com/office/drawing/2014/main" id="{94E1AAF6-5A43-4A4A-9E3F-46B23D1E789A}"/>
+                <a16:creationId xmlns:a16="http://schemas.microsoft.com/office/drawing/2014/main" id="{A7B21361-48F0-419B-97E8-0A4E921E9B1F}"/>
               </a:ext>
             </a:extLst>
           </p:cNvPr>
@@ -5205,7 +5195,7 @@
           <p:cNvPr id="8" name="">
             <a:extLst xmlns:a="http://schemas.openxmlformats.org/drawingml/2006/main">
               <a:ext uri="{FF2B5EF4-FFF2-40B4-BE49-F238E27FC236}">
-                <a16:creationId xmlns:a16="http://schemas.microsoft.com/office/drawing/2014/main" id="{34993440-3DDB-498E-9B80-40CADBAF85FA}"/>
+                <a16:creationId xmlns:a16="http://schemas.microsoft.com/office/drawing/2014/main" id="{12EC46E7-ECE0-4C79-BF00-C79F92166B57}"/>
               </a:ext>
             </a:extLst>
           </p:cNvPr>
@@ -5253,7 +5243,7 @@
                   <a:srgbClr val="101214"/>
                 </a:solidFill>
               </a:rPr>
-              <a:t>Validation error и выбор числа эпох</a:t>
+              <a:t>Validation error и выбор эпохи</a:t>
             </a:r>
           </a:p>
         </p:txBody>
@@ -5263,7 +5253,7 @@
           <p:cNvPr id="9" name="">
             <a:extLst xmlns:a="http://schemas.openxmlformats.org/drawingml/2006/main">
               <a:ext uri="{FF2B5EF4-FFF2-40B4-BE49-F238E27FC236}">
-                <a16:creationId xmlns:a16="http://schemas.microsoft.com/office/drawing/2014/main" id="{7C57AEF0-FADC-4E07-9FC9-D21EB2824CA0}"/>
+                <a16:creationId xmlns:a16="http://schemas.microsoft.com/office/drawing/2014/main" id="{396CBDA1-2CA3-4DD2-A133-FE2D5120D162}"/>
               </a:ext>
             </a:extLst>
           </p:cNvPr>
@@ -5311,7 +5301,7 @@
                   <a:srgbClr val="30363A"/>
                 </a:solidFill>
               </a:rPr>
-              <a:t>Лучшая модель выбирается не по последней эпохе, а по минимальной ошибке на validation.</a:t>
+              <a:t>Лучшая модель выбирается по минимуму validation error, а не по последней эпохе.</a:t>
             </a:r>
           </a:p>
         </p:txBody>
@@ -5321,7 +5311,7 @@
           <p:cNvPr id="10" name="">
             <a:extLst xmlns:a="http://schemas.openxmlformats.org/drawingml/2006/main">
               <a:ext uri="{FF2B5EF4-FFF2-40B4-BE49-F238E27FC236}">
-                <a16:creationId xmlns:a16="http://schemas.microsoft.com/office/drawing/2014/main" id="{D45D752C-73F1-411A-9AA6-AEE1B1AD5471}"/>
+                <a16:creationId xmlns:a16="http://schemas.microsoft.com/office/drawing/2014/main" id="{FBAFA309-0F84-4EDC-96A1-CA1C41E03CDF}"/>
               </a:ext>
             </a:extLst>
           </p:cNvPr>
@@ -5358,7 +5348,7 @@
           <p:cNvPr id="11" name="">
             <a:extLst xmlns:a="http://schemas.openxmlformats.org/drawingml/2006/main">
               <a:ext uri="{FF2B5EF4-FFF2-40B4-BE49-F238E27FC236}">
-                <a16:creationId xmlns:a16="http://schemas.microsoft.com/office/drawing/2014/main" id="{0B648495-BADA-4466-A822-744A2CB6B876}"/>
+                <a16:creationId xmlns:a16="http://schemas.microsoft.com/office/drawing/2014/main" id="{B9790644-6B81-4F6A-800F-EAD4D6EE6F4E}"/>
               </a:ext>
             </a:extLst>
           </p:cNvPr>
@@ -5393,7 +5383,7 @@
           <p:cNvPr id="12" name="">
             <a:extLst xmlns:a="http://schemas.openxmlformats.org/drawingml/2006/main">
               <a:ext uri="{FF2B5EF4-FFF2-40B4-BE49-F238E27FC236}">
-                <a16:creationId xmlns:a16="http://schemas.microsoft.com/office/drawing/2014/main" id="{7529FBAB-55C0-455A-94A4-29D6483CCD42}"/>
+                <a16:creationId xmlns:a16="http://schemas.microsoft.com/office/drawing/2014/main" id="{9C9180A5-4D44-4284-8062-84A6E6250B8B}"/>
               </a:ext>
             </a:extLst>
           </p:cNvPr>
@@ -5428,7 +5418,7 @@
           <p:cNvPr id="13" name="">
             <a:extLst xmlns:a="http://schemas.openxmlformats.org/drawingml/2006/main">
               <a:ext uri="{FF2B5EF4-FFF2-40B4-BE49-F238E27FC236}">
-                <a16:creationId xmlns:a16="http://schemas.microsoft.com/office/drawing/2014/main" id="{9C5D1C52-A6FF-49A9-AE8A-F1FFF8C0B135}"/>
+                <a16:creationId xmlns:a16="http://schemas.microsoft.com/office/drawing/2014/main" id="{9FADFE9A-0BA6-4C67-8DE4-4D955CB92DAB}"/>
               </a:ext>
             </a:extLst>
           </p:cNvPr>
@@ -5463,7 +5453,7 @@
           <p:cNvPr id="14" name="">
             <a:extLst xmlns:a="http://schemas.openxmlformats.org/drawingml/2006/main">
               <a:ext uri="{FF2B5EF4-FFF2-40B4-BE49-F238E27FC236}">
-                <a16:creationId xmlns:a16="http://schemas.microsoft.com/office/drawing/2014/main" id="{AF5B1C37-40FA-4399-8A37-3E719877D969}"/>
+                <a16:creationId xmlns:a16="http://schemas.microsoft.com/office/drawing/2014/main" id="{DCAC898D-6CFD-4BFC-AE09-BECE0C8C4009}"/>
               </a:ext>
             </a:extLst>
           </p:cNvPr>
@@ -5498,7 +5488,7 @@
           <p:cNvPr id="15" name="">
             <a:extLst xmlns:a="http://schemas.openxmlformats.org/drawingml/2006/main">
               <a:ext uri="{FF2B5EF4-FFF2-40B4-BE49-F238E27FC236}">
-                <a16:creationId xmlns:a16="http://schemas.microsoft.com/office/drawing/2014/main" id="{ECF88B60-19EE-42DA-A7D5-C01E4F141939}"/>
+                <a16:creationId xmlns:a16="http://schemas.microsoft.com/office/drawing/2014/main" id="{9C15E122-F76D-4869-B941-E5B436B69A65}"/>
               </a:ext>
             </a:extLst>
           </p:cNvPr>
@@ -5533,7 +5523,7 @@
           <p:cNvPr id="16" name="">
             <a:extLst xmlns:a="http://schemas.openxmlformats.org/drawingml/2006/main">
               <a:ext uri="{FF2B5EF4-FFF2-40B4-BE49-F238E27FC236}">
-                <a16:creationId xmlns:a16="http://schemas.microsoft.com/office/drawing/2014/main" id="{D7AD210E-4961-4C35-8A0C-3B93883C90AC}"/>
+                <a16:creationId xmlns:a16="http://schemas.microsoft.com/office/drawing/2014/main" id="{81016D35-413A-42E8-8006-208970E34CF2}"/>
               </a:ext>
             </a:extLst>
           </p:cNvPr>
@@ -5581,7 +5571,7 @@
                   <a:srgbClr val="116B49"/>
                 </a:solidFill>
               </a:rPr>
-              <a:t>Критерий</a:t>
+              <a:t>Bottle</a:t>
             </a:r>
           </a:p>
         </p:txBody>
@@ -5591,7 +5581,7 @@
           <p:cNvPr id="17" name="">
             <a:extLst xmlns:a="http://schemas.openxmlformats.org/drawingml/2006/main">
               <a:ext uri="{FF2B5EF4-FFF2-40B4-BE49-F238E27FC236}">
-                <a16:creationId xmlns:a16="http://schemas.microsoft.com/office/drawing/2014/main" id="{DCF68111-5EBC-4FBE-899A-8299AD210D73}"/>
+                <a16:creationId xmlns:a16="http://schemas.microsoft.com/office/drawing/2014/main" id="{C037C1B3-11B0-4F1D-BBE0-5B5DBE51DDE9}"/>
               </a:ext>
             </a:extLst>
           </p:cNvPr>
@@ -5627,53 +5617,36 @@
           <a:lstStyle xmlns:a="http://schemas.openxmlformats.org/drawingml/2006/main"/>
           <a:p xmlns:a="http://schemas.openxmlformats.org/drawingml/2006/main">
             <a:pPr algn="l">
-              <a:defRPr sz="1050" b="0">
+              <a:defRPr sz="1275" b="0">
                 <a:solidFill>
                   <a:srgbClr val="101214"/>
                 </a:solidFill>
               </a:defRPr>
             </a:pPr>
             <a:r>
-              <a:rPr sz="1050" b="0">
+              <a:rPr sz="1275" b="0">
                 <a:solidFill>
                   <a:srgbClr val="101214"/>
                 </a:solidFill>
               </a:rPr>
-              <a:t>После каждой эпохи считается</a:t>
+              <a:t>Лучшая эпоха = 11, best</a:t>
             </a:r>
           </a:p>
           <a:p xmlns:a="http://schemas.openxmlformats.org/drawingml/2006/main">
             <a:pPr algn="l">
-              <a:defRPr sz="1050" b="0">
+              <a:defRPr sz="1275" b="0">
                 <a:solidFill>
                   <a:srgbClr val="101214"/>
                 </a:solidFill>
               </a:defRPr>
             </a:pPr>
             <a:r>
-              <a:rPr sz="1050" b="0">
+              <a:rPr sz="1275" b="0">
                 <a:solidFill>
                   <a:srgbClr val="101214"/>
                 </a:solidFill>
               </a:rPr>
-              <a:t>validation error, и по ней</a:t>
-            </a:r>
-          </a:p>
-          <a:p xmlns:a="http://schemas.openxmlformats.org/drawingml/2006/main">
-            <a:pPr algn="l">
-              <a:defRPr sz="1050" b="0">
-                <a:solidFill>
-                  <a:srgbClr val="101214"/>
-                </a:solidFill>
-              </a:defRPr>
-            </a:pPr>
-            <a:r>
-              <a:rPr sz="1050" b="0">
-                <a:solidFill>
-                  <a:srgbClr val="101214"/>
-                </a:solidFill>
-              </a:rPr>
-              <a:t>выбирается лучшая модель.</a:t>
+              <a:t>validation loss = 0.380891.</a:t>
             </a:r>
           </a:p>
         </p:txBody>
@@ -5683,7 +5656,7 @@
           <p:cNvPr id="18" name="">
             <a:extLst xmlns:a="http://schemas.openxmlformats.org/drawingml/2006/main">
               <a:ext uri="{FF2B5EF4-FFF2-40B4-BE49-F238E27FC236}">
-                <a16:creationId xmlns:a16="http://schemas.microsoft.com/office/drawing/2014/main" id="{A4BF37D8-6DBA-4BD8-960F-C8B73ABAD170}"/>
+                <a16:creationId xmlns:a16="http://schemas.microsoft.com/office/drawing/2014/main" id="{4714B694-1565-4054-AC3D-0D821A1949D5}"/>
               </a:ext>
             </a:extLst>
           </p:cNvPr>
@@ -5720,7 +5693,7 @@
           <p:cNvPr id="19" name="">
             <a:extLst xmlns:a="http://schemas.openxmlformats.org/drawingml/2006/main">
               <a:ext uri="{FF2B5EF4-FFF2-40B4-BE49-F238E27FC236}">
-                <a16:creationId xmlns:a16="http://schemas.microsoft.com/office/drawing/2014/main" id="{7E7298DE-AC03-4124-BCBB-DA78BD044D1A}"/>
+                <a16:creationId xmlns:a16="http://schemas.microsoft.com/office/drawing/2014/main" id="{FE59136A-3CA8-4993-87B2-43F68694A162}"/>
               </a:ext>
             </a:extLst>
           </p:cNvPr>
@@ -5755,7 +5728,7 @@
           <p:cNvPr id="20" name="">
             <a:extLst xmlns:a="http://schemas.openxmlformats.org/drawingml/2006/main">
               <a:ext uri="{FF2B5EF4-FFF2-40B4-BE49-F238E27FC236}">
-                <a16:creationId xmlns:a16="http://schemas.microsoft.com/office/drawing/2014/main" id="{9EAA1BA5-7E35-4401-A8BE-8AC368873AD3}"/>
+                <a16:creationId xmlns:a16="http://schemas.microsoft.com/office/drawing/2014/main" id="{6239D71C-13E6-4695-99F7-3660502A4C6E}"/>
               </a:ext>
             </a:extLst>
           </p:cNvPr>
@@ -5790,7 +5763,7 @@
           <p:cNvPr id="21" name="">
             <a:extLst xmlns:a="http://schemas.openxmlformats.org/drawingml/2006/main">
               <a:ext uri="{FF2B5EF4-FFF2-40B4-BE49-F238E27FC236}">
-                <a16:creationId xmlns:a16="http://schemas.microsoft.com/office/drawing/2014/main" id="{A132DCD2-5F45-455A-A762-514CF5BC9070}"/>
+                <a16:creationId xmlns:a16="http://schemas.microsoft.com/office/drawing/2014/main" id="{5EF93BE5-AA53-4107-BDF9-18F7811447A2}"/>
               </a:ext>
             </a:extLst>
           </p:cNvPr>
@@ -5823,7 +5796,7 @@
           <p:cNvPr id="22" name="">
             <a:extLst xmlns:a="http://schemas.openxmlformats.org/drawingml/2006/main">
               <a:ext uri="{FF2B5EF4-FFF2-40B4-BE49-F238E27FC236}">
-                <a16:creationId xmlns:a16="http://schemas.microsoft.com/office/drawing/2014/main" id="{0C4E31F2-1C66-42BA-B9CF-5CD20AD13907}"/>
+                <a16:creationId xmlns:a16="http://schemas.microsoft.com/office/drawing/2014/main" id="{F2F6AD32-382D-4D68-A2A2-C2AB1DB50F6C}"/>
               </a:ext>
             </a:extLst>
           </p:cNvPr>
@@ -5856,7 +5829,7 @@
           <p:cNvPr id="23" name="">
             <a:extLst xmlns:a="http://schemas.openxmlformats.org/drawingml/2006/main">
               <a:ext uri="{FF2B5EF4-FFF2-40B4-BE49-F238E27FC236}">
-                <a16:creationId xmlns:a16="http://schemas.microsoft.com/office/drawing/2014/main" id="{73080251-602A-461F-AF32-D93FF68F41FC}"/>
+                <a16:creationId xmlns:a16="http://schemas.microsoft.com/office/drawing/2014/main" id="{FB07E733-5794-4458-B1CD-109B707EBFBE}"/>
               </a:ext>
             </a:extLst>
           </p:cNvPr>
@@ -5891,7 +5864,7 @@
           <p:cNvPr id="24" name="">
             <a:extLst xmlns:a="http://schemas.openxmlformats.org/drawingml/2006/main">
               <a:ext uri="{FF2B5EF4-FFF2-40B4-BE49-F238E27FC236}">
-                <a16:creationId xmlns:a16="http://schemas.microsoft.com/office/drawing/2014/main" id="{E188855D-F5FC-4D76-9450-F03E7ACD6EEA}"/>
+                <a16:creationId xmlns:a16="http://schemas.microsoft.com/office/drawing/2014/main" id="{8542368E-2353-46C5-8D9C-90C3706D3C76}"/>
               </a:ext>
             </a:extLst>
           </p:cNvPr>
@@ -5939,7 +5912,7 @@
                   <a:srgbClr val="116B49"/>
                 </a:solidFill>
               </a:rPr>
-              <a:t>Bottle</a:t>
+              <a:t>Критерий</a:t>
             </a:r>
           </a:p>
         </p:txBody>
@@ -5949,7 +5922,7 @@
           <p:cNvPr id="25" name="">
             <a:extLst xmlns:a="http://schemas.openxmlformats.org/drawingml/2006/main">
               <a:ext uri="{FF2B5EF4-FFF2-40B4-BE49-F238E27FC236}">
-                <a16:creationId xmlns:a16="http://schemas.microsoft.com/office/drawing/2014/main" id="{7F93536B-3EB4-4CEC-8BAB-11053AEC98DD}"/>
+                <a16:creationId xmlns:a16="http://schemas.microsoft.com/office/drawing/2014/main" id="{0B656ABB-6A06-4700-99E3-EA098E26F1C1}"/>
               </a:ext>
             </a:extLst>
           </p:cNvPr>
@@ -5985,53 +5958,53 @@
           <a:lstStyle xmlns:a="http://schemas.openxmlformats.org/drawingml/2006/main"/>
           <a:p xmlns:a="http://schemas.openxmlformats.org/drawingml/2006/main">
             <a:pPr algn="l">
-              <a:defRPr sz="1050" b="0">
+              <a:defRPr sz="1275" b="0">
                 <a:solidFill>
                   <a:srgbClr val="101214"/>
                 </a:solidFill>
               </a:defRPr>
             </a:pPr>
             <a:r>
-              <a:rPr sz="1050" b="0">
+              <a:rPr sz="1275" b="0">
                 <a:solidFill>
                   <a:srgbClr val="101214"/>
                 </a:solidFill>
               </a:rPr>
-              <a:t>Для bottle лучшая эпоха =</a:t>
+              <a:t>Validation error показывает</a:t>
             </a:r>
           </a:p>
           <a:p xmlns:a="http://schemas.openxmlformats.org/drawingml/2006/main">
             <a:pPr algn="l">
-              <a:defRPr sz="1050" b="0">
+              <a:defRPr sz="1275" b="0">
                 <a:solidFill>
                   <a:srgbClr val="101214"/>
                 </a:solidFill>
               </a:defRPr>
             </a:pPr>
             <a:r>
-              <a:rPr sz="1050" b="0">
+              <a:rPr sz="1275" b="0">
                 <a:solidFill>
                   <a:srgbClr val="101214"/>
                 </a:solidFill>
               </a:rPr>
-              <a:t>11, а best validation loss =</a:t>
+              <a:t>качество модели на новых</a:t>
             </a:r>
           </a:p>
           <a:p xmlns:a="http://schemas.openxmlformats.org/drawingml/2006/main">
             <a:pPr algn="l">
-              <a:defRPr sz="1050" b="0">
+              <a:defRPr sz="1275" b="0">
                 <a:solidFill>
                   <a:srgbClr val="101214"/>
                 </a:solidFill>
               </a:defRPr>
             </a:pPr>
             <a:r>
-              <a:rPr sz="1050" b="0">
+              <a:rPr sz="1275" b="0">
                 <a:solidFill>
                   <a:srgbClr val="101214"/>
                 </a:solidFill>
               </a:rPr>
-              <a:t>0.380891.</a:t>
+              <a:t>данных.</a:t>
             </a:r>
           </a:p>
         </p:txBody>
@@ -6041,7 +6014,7 @@
           <p:cNvPr id="26" name="">
             <a:extLst xmlns:a="http://schemas.openxmlformats.org/drawingml/2006/main">
               <a:ext uri="{FF2B5EF4-FFF2-40B4-BE49-F238E27FC236}">
-                <a16:creationId xmlns:a16="http://schemas.microsoft.com/office/drawing/2014/main" id="{654D81AE-9D72-49CB-9DCD-7332B2F8732A}"/>
+                <a16:creationId xmlns:a16="http://schemas.microsoft.com/office/drawing/2014/main" id="{C0D0FB3A-B51F-4B40-BD29-3AC4B0F8AC9E}"/>
               </a:ext>
             </a:extLst>
           </p:cNvPr>
@@ -6078,7 +6051,7 @@
           <p:cNvPr id="27" name="">
             <a:extLst xmlns:a="http://schemas.openxmlformats.org/drawingml/2006/main">
               <a:ext uri="{FF2B5EF4-FFF2-40B4-BE49-F238E27FC236}">
-                <a16:creationId xmlns:a16="http://schemas.microsoft.com/office/drawing/2014/main" id="{5BC3AC4A-DE5F-4FD5-B6A6-BA1AA79637DA}"/>
+                <a16:creationId xmlns:a16="http://schemas.microsoft.com/office/drawing/2014/main" id="{F41E94B9-B903-4A7D-9466-F001498CBF85}"/>
               </a:ext>
             </a:extLst>
           </p:cNvPr>
@@ -6113,7 +6086,7 @@
           <p:cNvPr id="28" name="">
             <a:extLst xmlns:a="http://schemas.openxmlformats.org/drawingml/2006/main">
               <a:ext uri="{FF2B5EF4-FFF2-40B4-BE49-F238E27FC236}">
-                <a16:creationId xmlns:a16="http://schemas.microsoft.com/office/drawing/2014/main" id="{2513A183-73C0-4522-B219-EF09B44C4261}"/>
+                <a16:creationId xmlns:a16="http://schemas.microsoft.com/office/drawing/2014/main" id="{D212A4FE-E6C7-4E37-AD2A-3EFF74A5C1AC}"/>
               </a:ext>
             </a:extLst>
           </p:cNvPr>
@@ -6148,7 +6121,7 @@
           <p:cNvPr id="29" name="">
             <a:extLst xmlns:a="http://schemas.openxmlformats.org/drawingml/2006/main">
               <a:ext uri="{FF2B5EF4-FFF2-40B4-BE49-F238E27FC236}">
-                <a16:creationId xmlns:a16="http://schemas.microsoft.com/office/drawing/2014/main" id="{D7751A9C-0DED-40D2-99D8-B513523D89CF}"/>
+                <a16:creationId xmlns:a16="http://schemas.microsoft.com/office/drawing/2014/main" id="{5E1A9507-099B-49A9-9D69-25768F6E3458}"/>
               </a:ext>
             </a:extLst>
           </p:cNvPr>
@@ -6183,7 +6156,7 @@
           <p:cNvPr id="30" name="">
             <a:extLst xmlns:a="http://schemas.openxmlformats.org/drawingml/2006/main">
               <a:ext uri="{FF2B5EF4-FFF2-40B4-BE49-F238E27FC236}">
-                <a16:creationId xmlns:a16="http://schemas.microsoft.com/office/drawing/2014/main" id="{9A58C26A-3BD9-4914-8C04-CD1577E613E6}"/>
+                <a16:creationId xmlns:a16="http://schemas.microsoft.com/office/drawing/2014/main" id="{9C2769D8-0C61-49BD-87EF-E7A8CAC53075}"/>
               </a:ext>
             </a:extLst>
           </p:cNvPr>
@@ -6218,7 +6191,7 @@
           <p:cNvPr id="31" name="">
             <a:extLst xmlns:a="http://schemas.openxmlformats.org/drawingml/2006/main">
               <a:ext uri="{FF2B5EF4-FFF2-40B4-BE49-F238E27FC236}">
-                <a16:creationId xmlns:a16="http://schemas.microsoft.com/office/drawing/2014/main" id="{F34B9CCA-7532-423A-A721-8CEB96C9F6CF}"/>
+                <a16:creationId xmlns:a16="http://schemas.microsoft.com/office/drawing/2014/main" id="{AEF107B0-4894-4391-A59E-ADB24CD5BDBD}"/>
               </a:ext>
             </a:extLst>
           </p:cNvPr>
@@ -6253,7 +6226,7 @@
           <p:cNvPr id="32" name="">
             <a:extLst xmlns:a="http://schemas.openxmlformats.org/drawingml/2006/main">
               <a:ext uri="{FF2B5EF4-FFF2-40B4-BE49-F238E27FC236}">
-                <a16:creationId xmlns:a16="http://schemas.microsoft.com/office/drawing/2014/main" id="{ADAE43C1-5C01-466F-A500-1AD667D39FDC}"/>
+                <a16:creationId xmlns:a16="http://schemas.microsoft.com/office/drawing/2014/main" id="{402A5593-7DB8-4259-9F79-6FFA755D2213}"/>
               </a:ext>
             </a:extLst>
           </p:cNvPr>
@@ -6301,7 +6274,7 @@
                   <a:srgbClr val="116B49"/>
                 </a:solidFill>
               </a:rPr>
-              <a:t>Решение</a:t>
+              <a:t>Остановка</a:t>
             </a:r>
           </a:p>
         </p:txBody>
@@ -6311,7 +6284,7 @@
           <p:cNvPr id="33" name="">
             <a:extLst xmlns:a="http://schemas.openxmlformats.org/drawingml/2006/main">
               <a:ext uri="{FF2B5EF4-FFF2-40B4-BE49-F238E27FC236}">
-                <a16:creationId xmlns:a16="http://schemas.microsoft.com/office/drawing/2014/main" id="{24B7E028-2172-49C5-BD2E-F613BD2157FC}"/>
+                <a16:creationId xmlns:a16="http://schemas.microsoft.com/office/drawing/2014/main" id="{6A6EC0BA-F960-4F9C-A7C8-ECD8CF37811A}"/>
               </a:ext>
             </a:extLst>
           </p:cNvPr>
@@ -6347,70 +6320,53 @@
           <a:lstStyle xmlns:a="http://schemas.openxmlformats.org/drawingml/2006/main"/>
           <a:p xmlns:a="http://schemas.openxmlformats.org/drawingml/2006/main">
             <a:pPr algn="l">
-              <a:defRPr sz="1050" b="0">
+              <a:defRPr sz="1275" b="0">
                 <a:solidFill>
                   <a:srgbClr val="101214"/>
                 </a:solidFill>
               </a:defRPr>
             </a:pPr>
             <a:r>
-              <a:rPr sz="1050" b="0">
+              <a:rPr sz="1275" b="0">
                 <a:solidFill>
                   <a:srgbClr val="101214"/>
                 </a:solidFill>
               </a:rPr>
-              <a:t>Если ошибка не улучшается,</a:t>
+              <a:t>Если улучшения нет, learning</a:t>
             </a:r>
           </a:p>
           <a:p xmlns:a="http://schemas.openxmlformats.org/drawingml/2006/main">
             <a:pPr algn="l">
-              <a:defRPr sz="1050" b="0">
+              <a:defRPr sz="1275" b="0">
                 <a:solidFill>
                   <a:srgbClr val="101214"/>
                 </a:solidFill>
               </a:defRPr>
             </a:pPr>
             <a:r>
-              <a:rPr sz="1050" b="0">
+              <a:rPr sz="1275" b="0">
                 <a:solidFill>
                   <a:srgbClr val="101214"/>
                 </a:solidFill>
               </a:rPr>
-              <a:t>learning rate снижается и</a:t>
+              <a:t>rate снижается и срабатывает</a:t>
             </a:r>
           </a:p>
           <a:p xmlns:a="http://schemas.openxmlformats.org/drawingml/2006/main">
             <a:pPr algn="l">
-              <a:defRPr sz="1050" b="0">
+              <a:defRPr sz="1275" b="0">
                 <a:solidFill>
                   <a:srgbClr val="101214"/>
                 </a:solidFill>
               </a:defRPr>
             </a:pPr>
             <a:r>
-              <a:rPr sz="1050" b="0">
+              <a:rPr sz="1275" b="0">
                 <a:solidFill>
                   <a:srgbClr val="101214"/>
                 </a:solidFill>
               </a:rPr>
-              <a:t>затем срабатывает early</a:t>
-            </a:r>
-          </a:p>
-          <a:p xmlns:a="http://schemas.openxmlformats.org/drawingml/2006/main">
-            <a:pPr algn="l">
-              <a:defRPr sz="1050" b="0">
-                <a:solidFill>
-                  <a:srgbClr val="101214"/>
-                </a:solidFill>
-              </a:defRPr>
-            </a:pPr>
-            <a:r>
-              <a:rPr sz="1050" b="0">
-                <a:solidFill>
-                  <a:srgbClr val="101214"/>
-                </a:solidFill>
-              </a:rPr>
-              <a:t>stopping.</a:t>
+              <a:t>early stopping.</a:t>
             </a:r>
           </a:p>
         </p:txBody>
@@ -6420,7 +6376,7 @@
           <p:cNvPr id="34" name="">
             <a:extLst xmlns:a="http://schemas.openxmlformats.org/drawingml/2006/main">
               <a:ext uri="{FF2B5EF4-FFF2-40B4-BE49-F238E27FC236}">
-                <a16:creationId xmlns:a16="http://schemas.microsoft.com/office/drawing/2014/main" id="{4810674C-1D03-4F96-87F7-2C1ECD33A829}"/>
+                <a16:creationId xmlns:a16="http://schemas.microsoft.com/office/drawing/2014/main" id="{B66C76B0-32ED-4C54-91F8-A1657803BD3E}"/>
               </a:ext>
             </a:extLst>
           </p:cNvPr>
@@ -6476,7 +6432,7 @@
     </p:spTree>
     <p:extLst>
       <p:ext uri="{BB962C8B-B14F-4D97-AF65-F5344CB8AC3E}">
-        <p14:creationId xmlns:p14="http://schemas.microsoft.com/office/powerpoint/2010/main" val="1281185328"/>
+        <p14:creationId xmlns:p14="http://schemas.microsoft.com/office/powerpoint/2010/main" val="711847350"/>
       </p:ext>
     </p:extLst>
   </p:cSld>
@@ -6507,7 +6463,7 @@
           <p:cNvPr id="1" name="Slide Number Placeholder 5">
             <a:extLst xmlns:a="http://schemas.openxmlformats.org/drawingml/2006/main">
               <a:ext uri="{FF2B5EF4-FFF2-40B4-BE49-F238E27FC236}">
-                <a16:creationId xmlns:a16="http://schemas.microsoft.com/office/drawing/2014/main" id="{CF8FB0CB-3547-4076-A20A-07C3536CB66E}"/>
+                <a16:creationId xmlns:a16="http://schemas.microsoft.com/office/drawing/2014/main" id="{75C22673-2D44-4F8F-AA03-6970E94CAA50}"/>
               </a:ext>
             </a:extLst>
           </p:cNvPr>
@@ -6543,7 +6499,7 @@
           <p:nvPr/>
         </p:nvPicPr>
         <p:blipFill>
-          <a:blip xmlns:r="http://schemas.openxmlformats.org/officeDocument/2006/relationships" xmlns:a="http://schemas.openxmlformats.org/drawingml/2006/main" r:embed="R5eeec26ca9814b52"/>
+          <a:blip xmlns:r="http://schemas.openxmlformats.org/officeDocument/2006/relationships" xmlns:a="http://schemas.openxmlformats.org/drawingml/2006/main" r:embed="R6b3a259da3d04336"/>
           <a:srcRect xmlns:a="http://schemas.openxmlformats.org/drawingml/2006/main" l="0" t="2470" r="0" b="2470"/>
           <a:stretch xmlns:a="http://schemas.openxmlformats.org/drawingml/2006/main">
             <a:fillRect l="0" t="0" r="0" b="0"/>
@@ -6564,7 +6520,7 @@
           <p:cNvPr id="3" name="">
             <a:extLst xmlns:a="http://schemas.openxmlformats.org/drawingml/2006/main">
               <a:ext uri="{FF2B5EF4-FFF2-40B4-BE49-F238E27FC236}">
-                <a16:creationId xmlns:a16="http://schemas.microsoft.com/office/drawing/2014/main" id="{F43255AF-F3D1-4A23-876E-2F6BAF1A9B2F}"/>
+                <a16:creationId xmlns:a16="http://schemas.microsoft.com/office/drawing/2014/main" id="{3F99118F-479B-463F-9056-17ABDA11B12B}"/>
               </a:ext>
             </a:extLst>
           </p:cNvPr>
@@ -6601,7 +6557,7 @@
           <p:cNvPr id="4" name="">
             <a:extLst xmlns:a="http://schemas.openxmlformats.org/drawingml/2006/main">
               <a:ext uri="{FF2B5EF4-FFF2-40B4-BE49-F238E27FC236}">
-                <a16:creationId xmlns:a16="http://schemas.microsoft.com/office/drawing/2014/main" id="{821DE37E-49B7-4D47-9DD1-C3B2C05BF10F}"/>
+                <a16:creationId xmlns:a16="http://schemas.microsoft.com/office/drawing/2014/main" id="{D97D0F8F-0E35-4AB6-90A7-A938DA697712}"/>
               </a:ext>
             </a:extLst>
           </p:cNvPr>
@@ -6659,7 +6615,7 @@
           <p:cNvPr id="5" name="">
             <a:extLst xmlns:a="http://schemas.openxmlformats.org/drawingml/2006/main">
               <a:ext uri="{FF2B5EF4-FFF2-40B4-BE49-F238E27FC236}">
-                <a16:creationId xmlns:a16="http://schemas.microsoft.com/office/drawing/2014/main" id="{EE6E622C-7BFC-49EE-9DB1-BCB26254D0B1}"/>
+                <a16:creationId xmlns:a16="http://schemas.microsoft.com/office/drawing/2014/main" id="{50BD7D80-D198-49EA-94DF-838B8E9D4E1A}"/>
               </a:ext>
             </a:extLst>
           </p:cNvPr>
@@ -6717,7 +6673,7 @@
           <p:cNvPr id="6" name="">
             <a:extLst xmlns:a="http://schemas.openxmlformats.org/drawingml/2006/main">
               <a:ext uri="{FF2B5EF4-FFF2-40B4-BE49-F238E27FC236}">
-                <a16:creationId xmlns:a16="http://schemas.microsoft.com/office/drawing/2014/main" id="{A4BC54DE-4957-4B72-8012-EFA12549CB2E}"/>
+                <a16:creationId xmlns:a16="http://schemas.microsoft.com/office/drawing/2014/main" id="{D4CF0C61-3D2A-4CDD-BA90-85EBB0A36EAF}"/>
               </a:ext>
             </a:extLst>
           </p:cNvPr>
@@ -6752,7 +6708,7 @@
           <p:cNvPr id="7" name="">
             <a:extLst xmlns:a="http://schemas.openxmlformats.org/drawingml/2006/main">
               <a:ext uri="{FF2B5EF4-FFF2-40B4-BE49-F238E27FC236}">
-                <a16:creationId xmlns:a16="http://schemas.microsoft.com/office/drawing/2014/main" id="{145831A0-74E1-48E4-B7EF-308B1ED33AB5}"/>
+                <a16:creationId xmlns:a16="http://schemas.microsoft.com/office/drawing/2014/main" id="{CB0760FA-63BC-4B04-85C9-16E51C1CE278}"/>
               </a:ext>
             </a:extLst>
           </p:cNvPr>
@@ -6785,7 +6741,7 @@
           <p:cNvPr id="8" name="">
             <a:extLst xmlns:a="http://schemas.openxmlformats.org/drawingml/2006/main">
               <a:ext uri="{FF2B5EF4-FFF2-40B4-BE49-F238E27FC236}">
-                <a16:creationId xmlns:a16="http://schemas.microsoft.com/office/drawing/2014/main" id="{E58A476B-3592-42BC-81ED-2CD9645A2458}"/>
+                <a16:creationId xmlns:a16="http://schemas.microsoft.com/office/drawing/2014/main" id="{C847928C-3430-4EA1-A8FD-F37C16DB1B6D}"/>
               </a:ext>
             </a:extLst>
           </p:cNvPr>
@@ -6833,7 +6789,7 @@
                   <a:srgbClr val="101214"/>
                 </a:solidFill>
               </a:rPr>
-              <a:t>Сравнение по категориям</a:t>
+              <a:t>Сравнение оптимизаторов и моделей</a:t>
             </a:r>
           </a:p>
         </p:txBody>
@@ -6843,7 +6799,7 @@
           <p:cNvPr id="9" name="">
             <a:extLst xmlns:a="http://schemas.openxmlformats.org/drawingml/2006/main">
               <a:ext uri="{FF2B5EF4-FFF2-40B4-BE49-F238E27FC236}">
-                <a16:creationId xmlns:a16="http://schemas.microsoft.com/office/drawing/2014/main" id="{665FC478-510E-4F8E-909C-AA68FC5D241B}"/>
+                <a16:creationId xmlns:a16="http://schemas.microsoft.com/office/drawing/2014/main" id="{63355F91-0A77-4075-89AB-4C6276EC5756}"/>
               </a:ext>
             </a:extLst>
           </p:cNvPr>
@@ -6891,7 +6847,7 @@
                   <a:srgbClr val="30363A"/>
                 </a:solidFill>
               </a:rPr>
-              <a:t>Построены отдельные графики validation error для bottle, capsule, metal_nut, pill и all-in-one.</a:t>
+              <a:t>Проверялись разные настройки обучения и графики validation error по всем основным моделям.</a:t>
             </a:r>
           </a:p>
         </p:txBody>
@@ -6901,7 +6857,7 @@
           <p:cNvPr id="10" name="">
             <a:extLst xmlns:a="http://schemas.openxmlformats.org/drawingml/2006/main">
               <a:ext uri="{FF2B5EF4-FFF2-40B4-BE49-F238E27FC236}">
-                <a16:creationId xmlns:a16="http://schemas.microsoft.com/office/drawing/2014/main" id="{1321E78A-C479-462C-B180-4C19223EED29}"/>
+                <a16:creationId xmlns:a16="http://schemas.microsoft.com/office/drawing/2014/main" id="{06F9F352-42D1-482E-8D62-E714762E9538}"/>
               </a:ext>
             </a:extLst>
           </p:cNvPr>
@@ -6938,7 +6894,7 @@
           <p:cNvPr id="11" name="">
             <a:extLst xmlns:a="http://schemas.openxmlformats.org/drawingml/2006/main">
               <a:ext uri="{FF2B5EF4-FFF2-40B4-BE49-F238E27FC236}">
-                <a16:creationId xmlns:a16="http://schemas.microsoft.com/office/drawing/2014/main" id="{7EC2C064-A080-4968-BC60-20D85DD877B4}"/>
+                <a16:creationId xmlns:a16="http://schemas.microsoft.com/office/drawing/2014/main" id="{A500AEA6-0D31-49D8-9BE2-02B776C2A542}"/>
               </a:ext>
             </a:extLst>
           </p:cNvPr>
@@ -6973,7 +6929,7 @@
           <p:cNvPr id="12" name="">
             <a:extLst xmlns:a="http://schemas.openxmlformats.org/drawingml/2006/main">
               <a:ext uri="{FF2B5EF4-FFF2-40B4-BE49-F238E27FC236}">
-                <a16:creationId xmlns:a16="http://schemas.microsoft.com/office/drawing/2014/main" id="{E00C678F-B452-4703-8AE8-DE12B4810C1D}"/>
+                <a16:creationId xmlns:a16="http://schemas.microsoft.com/office/drawing/2014/main" id="{0B6299B2-3A89-47C6-8FFD-CD35B308271B}"/>
               </a:ext>
             </a:extLst>
           </p:cNvPr>
@@ -7008,7 +6964,7 @@
           <p:cNvPr id="13" name="">
             <a:extLst xmlns:a="http://schemas.openxmlformats.org/drawingml/2006/main">
               <a:ext uri="{FF2B5EF4-FFF2-40B4-BE49-F238E27FC236}">
-                <a16:creationId xmlns:a16="http://schemas.microsoft.com/office/drawing/2014/main" id="{198DAEB6-2BEB-4B30-B22E-A12144A514E7}"/>
+                <a16:creationId xmlns:a16="http://schemas.microsoft.com/office/drawing/2014/main" id="{144990FA-8106-4813-84DB-82431EE36DBD}"/>
               </a:ext>
             </a:extLst>
           </p:cNvPr>
@@ -7043,7 +6999,7 @@
           <p:cNvPr id="14" name="">
             <a:extLst xmlns:a="http://schemas.openxmlformats.org/drawingml/2006/main">
               <a:ext uri="{FF2B5EF4-FFF2-40B4-BE49-F238E27FC236}">
-                <a16:creationId xmlns:a16="http://schemas.microsoft.com/office/drawing/2014/main" id="{FB03E468-66A8-41D4-B43F-AC4C426BFD19}"/>
+                <a16:creationId xmlns:a16="http://schemas.microsoft.com/office/drawing/2014/main" id="{00FFB979-11A7-4562-A68F-0556DA51960D}"/>
               </a:ext>
             </a:extLst>
           </p:cNvPr>
@@ -7078,7 +7034,7 @@
           <p:cNvPr id="15" name="">
             <a:extLst xmlns:a="http://schemas.openxmlformats.org/drawingml/2006/main">
               <a:ext uri="{FF2B5EF4-FFF2-40B4-BE49-F238E27FC236}">
-                <a16:creationId xmlns:a16="http://schemas.microsoft.com/office/drawing/2014/main" id="{795835DC-3E4B-45AE-B066-75641FC1B53E}"/>
+                <a16:creationId xmlns:a16="http://schemas.microsoft.com/office/drawing/2014/main" id="{AB8DC366-4F46-4450-B44C-4E97B532B4E5}"/>
               </a:ext>
             </a:extLst>
           </p:cNvPr>
@@ -7113,7 +7069,7 @@
           <p:cNvPr id="16" name="">
             <a:extLst xmlns:a="http://schemas.openxmlformats.org/drawingml/2006/main">
               <a:ext uri="{FF2B5EF4-FFF2-40B4-BE49-F238E27FC236}">
-                <a16:creationId xmlns:a16="http://schemas.microsoft.com/office/drawing/2014/main" id="{B9965389-40CF-455B-A93E-EEC0C4068241}"/>
+                <a16:creationId xmlns:a16="http://schemas.microsoft.com/office/drawing/2014/main" id="{5A822C40-4356-4E6F-901B-6F8F33DA2C2D}"/>
               </a:ext>
             </a:extLst>
           </p:cNvPr>
@@ -7161,7 +7117,7 @@
                   <a:srgbClr val="116B49"/>
                 </a:solidFill>
               </a:rPr>
-              <a:t>Bottle</a:t>
+              <a:t>Оптимизатор</a:t>
             </a:r>
           </a:p>
         </p:txBody>
@@ -7171,7 +7127,7 @@
           <p:cNvPr id="17" name="">
             <a:extLst xmlns:a="http://schemas.openxmlformats.org/drawingml/2006/main">
               <a:ext uri="{FF2B5EF4-FFF2-40B4-BE49-F238E27FC236}">
-                <a16:creationId xmlns:a16="http://schemas.microsoft.com/office/drawing/2014/main" id="{61A8A09D-8DB0-4D1D-A5EA-F22A25ECBB00}"/>
+                <a16:creationId xmlns:a16="http://schemas.microsoft.com/office/drawing/2014/main" id="{857D573C-8DEB-4916-AA77-2B5C7B5A3F06}"/>
               </a:ext>
             </a:extLst>
           </p:cNvPr>
@@ -7207,36 +7163,53 @@
           <a:lstStyle xmlns:a="http://schemas.openxmlformats.org/drawingml/2006/main"/>
           <a:p xmlns:a="http://schemas.openxmlformats.org/drawingml/2006/main">
             <a:pPr algn="l">
-              <a:defRPr sz="1050" b="0">
+              <a:defRPr sz="1275" b="0">
                 <a:solidFill>
                   <a:srgbClr val="101214"/>
                 </a:solidFill>
               </a:defRPr>
             </a:pPr>
             <a:r>
-              <a:rPr sz="1050" b="0">
+              <a:rPr sz="1275" b="0">
                 <a:solidFill>
                   <a:srgbClr val="101214"/>
                 </a:solidFill>
               </a:rPr>
-              <a:t>Лучшая эпоха = 10, best</a:t>
+              <a:t>Среди протестированных</a:t>
             </a:r>
           </a:p>
           <a:p xmlns:a="http://schemas.openxmlformats.org/drawingml/2006/main">
             <a:pPr algn="l">
-              <a:defRPr sz="1050" b="0">
+              <a:defRPr sz="1275" b="0">
                 <a:solidFill>
                   <a:srgbClr val="101214"/>
                 </a:solidFill>
               </a:defRPr>
             </a:pPr>
             <a:r>
-              <a:rPr sz="1050" b="0">
+              <a:rPr sz="1275" b="0">
                 <a:solidFill>
                   <a:srgbClr val="101214"/>
                 </a:solidFill>
               </a:rPr>
-              <a:t>validation error = 0.56177.</a:t>
+              <a:t>вариантов лучший результат</a:t>
+            </a:r>
+          </a:p>
+          <a:p xmlns:a="http://schemas.openxmlformats.org/drawingml/2006/main">
+            <a:pPr algn="l">
+              <a:defRPr sz="1275" b="0">
+                <a:solidFill>
+                  <a:srgbClr val="101214"/>
+                </a:solidFill>
+              </a:defRPr>
+            </a:pPr>
+            <a:r>
+              <a:rPr sz="1275" b="0">
+                <a:solidFill>
+                  <a:srgbClr val="101214"/>
+                </a:solidFill>
+              </a:rPr>
+              <a:t>показал SGD с lr = 1e-2.</a:t>
             </a:r>
           </a:p>
         </p:txBody>
@@ -7246,7 +7219,7 @@
           <p:cNvPr id="18" name="">
             <a:extLst xmlns:a="http://schemas.openxmlformats.org/drawingml/2006/main">
               <a:ext uri="{FF2B5EF4-FFF2-40B4-BE49-F238E27FC236}">
-                <a16:creationId xmlns:a16="http://schemas.microsoft.com/office/drawing/2014/main" id="{8366A1FC-FF23-4385-95CC-380F74F55C73}"/>
+                <a16:creationId xmlns:a16="http://schemas.microsoft.com/office/drawing/2014/main" id="{6DFEFFA0-69E9-414D-B5A5-CACA3F35CF89}"/>
               </a:ext>
             </a:extLst>
           </p:cNvPr>
@@ -7283,7 +7256,7 @@
           <p:cNvPr id="19" name="">
             <a:extLst xmlns:a="http://schemas.openxmlformats.org/drawingml/2006/main">
               <a:ext uri="{FF2B5EF4-FFF2-40B4-BE49-F238E27FC236}">
-                <a16:creationId xmlns:a16="http://schemas.microsoft.com/office/drawing/2014/main" id="{867E09CB-928E-4B79-8983-2E0E61F4F920}"/>
+                <a16:creationId xmlns:a16="http://schemas.microsoft.com/office/drawing/2014/main" id="{C7EDA552-ABEA-4061-9E88-8A659602F6C4}"/>
               </a:ext>
             </a:extLst>
           </p:cNvPr>
@@ -7318,7 +7291,7 @@
           <p:cNvPr id="20" name="">
             <a:extLst xmlns:a="http://schemas.openxmlformats.org/drawingml/2006/main">
               <a:ext uri="{FF2B5EF4-FFF2-40B4-BE49-F238E27FC236}">
-                <a16:creationId xmlns:a16="http://schemas.microsoft.com/office/drawing/2014/main" id="{C97C784F-D961-4A1B-9C5B-EA9452431098}"/>
+                <a16:creationId xmlns:a16="http://schemas.microsoft.com/office/drawing/2014/main" id="{B88C808F-7693-4DFE-BEE3-CA5395E948C7}"/>
               </a:ext>
             </a:extLst>
           </p:cNvPr>
@@ -7353,7 +7326,7 @@
           <p:cNvPr id="21" name="">
             <a:extLst xmlns:a="http://schemas.openxmlformats.org/drawingml/2006/main">
               <a:ext uri="{FF2B5EF4-FFF2-40B4-BE49-F238E27FC236}">
-                <a16:creationId xmlns:a16="http://schemas.microsoft.com/office/drawing/2014/main" id="{493540A6-274A-47C7-80DE-CA36492651AF}"/>
+                <a16:creationId xmlns:a16="http://schemas.microsoft.com/office/drawing/2014/main" id="{CE4A48ED-CF46-4EC5-8E1E-DD9295AB5891}"/>
               </a:ext>
             </a:extLst>
           </p:cNvPr>
@@ -7386,7 +7359,7 @@
           <p:cNvPr id="22" name="">
             <a:extLst xmlns:a="http://schemas.openxmlformats.org/drawingml/2006/main">
               <a:ext uri="{FF2B5EF4-FFF2-40B4-BE49-F238E27FC236}">
-                <a16:creationId xmlns:a16="http://schemas.microsoft.com/office/drawing/2014/main" id="{FF414096-91AE-41B4-A0FC-7F65375D8B21}"/>
+                <a16:creationId xmlns:a16="http://schemas.microsoft.com/office/drawing/2014/main" id="{A836AEBD-91CD-4931-B990-66B42977A789}"/>
               </a:ext>
             </a:extLst>
           </p:cNvPr>
@@ -7419,7 +7392,7 @@
           <p:cNvPr id="23" name="">
             <a:extLst xmlns:a="http://schemas.openxmlformats.org/drawingml/2006/main">
               <a:ext uri="{FF2B5EF4-FFF2-40B4-BE49-F238E27FC236}">
-                <a16:creationId xmlns:a16="http://schemas.microsoft.com/office/drawing/2014/main" id="{E6712795-BECF-4434-BCFC-06AA64E13308}"/>
+                <a16:creationId xmlns:a16="http://schemas.microsoft.com/office/drawing/2014/main" id="{A594FA55-3E91-43E4-85D1-874D1C251977}"/>
               </a:ext>
             </a:extLst>
           </p:cNvPr>
@@ -7454,7 +7427,7 @@
           <p:cNvPr id="24" name="">
             <a:extLst xmlns:a="http://schemas.openxmlformats.org/drawingml/2006/main">
               <a:ext uri="{FF2B5EF4-FFF2-40B4-BE49-F238E27FC236}">
-                <a16:creationId xmlns:a16="http://schemas.microsoft.com/office/drawing/2014/main" id="{ACDF3118-1C3D-4D12-9433-8845B31F9254}"/>
+                <a16:creationId xmlns:a16="http://schemas.microsoft.com/office/drawing/2014/main" id="{B33EE014-3C1C-4BD0-955F-C30552934BFB}"/>
               </a:ext>
             </a:extLst>
           </p:cNvPr>
@@ -7502,7 +7475,7 @@
                   <a:srgbClr val="116B49"/>
                 </a:solidFill>
               </a:rPr>
-              <a:t>Metal Nut</a:t>
+              <a:t>Категории</a:t>
             </a:r>
           </a:p>
         </p:txBody>
@@ -7512,7 +7485,7 @@
           <p:cNvPr id="25" name="">
             <a:extLst xmlns:a="http://schemas.openxmlformats.org/drawingml/2006/main">
               <a:ext uri="{FF2B5EF4-FFF2-40B4-BE49-F238E27FC236}">
-                <a16:creationId xmlns:a16="http://schemas.microsoft.com/office/drawing/2014/main" id="{04C0C0C8-71C9-4E8A-9456-88A4266534BF}"/>
+                <a16:creationId xmlns:a16="http://schemas.microsoft.com/office/drawing/2014/main" id="{43A5E2FE-B37D-42C9-9677-CAFF834B20A7}"/>
               </a:ext>
             </a:extLst>
           </p:cNvPr>
@@ -7548,53 +7521,53 @@
           <a:lstStyle xmlns:a="http://schemas.openxmlformats.org/drawingml/2006/main"/>
           <a:p xmlns:a="http://schemas.openxmlformats.org/drawingml/2006/main">
             <a:pPr algn="l">
-              <a:defRPr sz="1050" b="0">
+              <a:defRPr sz="1275" b="0">
                 <a:solidFill>
                   <a:srgbClr val="101214"/>
                 </a:solidFill>
               </a:defRPr>
             </a:pPr>
             <a:r>
-              <a:rPr sz="1050" b="0">
+              <a:rPr sz="1275" b="0">
                 <a:solidFill>
                   <a:srgbClr val="101214"/>
                 </a:solidFill>
               </a:rPr>
-              <a:t>Metal_nut дал самый низкий</a:t>
+              <a:t>Построены отдельные графики</a:t>
             </a:r>
           </a:p>
           <a:p xmlns:a="http://schemas.openxmlformats.org/drawingml/2006/main">
             <a:pPr algn="l">
-              <a:defRPr sz="1050" b="0">
+              <a:defRPr sz="1275" b="0">
                 <a:solidFill>
                   <a:srgbClr val="101214"/>
                 </a:solidFill>
               </a:defRPr>
             </a:pPr>
             <a:r>
-              <a:rPr sz="1050" b="0">
+              <a:rPr sz="1275" b="0">
                 <a:solidFill>
                   <a:srgbClr val="101214"/>
                 </a:solidFill>
               </a:rPr>
-              <a:t>best validation error =</a:t>
+              <a:t>validation error для bottle,</a:t>
             </a:r>
           </a:p>
           <a:p xmlns:a="http://schemas.openxmlformats.org/drawingml/2006/main">
             <a:pPr algn="l">
-              <a:defRPr sz="1050" b="0">
+              <a:defRPr sz="1275" b="0">
                 <a:solidFill>
                   <a:srgbClr val="101214"/>
                 </a:solidFill>
               </a:defRPr>
             </a:pPr>
             <a:r>
-              <a:rPr sz="1050" b="0">
+              <a:rPr sz="1275" b="0">
                 <a:solidFill>
                   <a:srgbClr val="101214"/>
                 </a:solidFill>
               </a:rPr>
-              <a:t>0.35059.</a:t>
+              <a:t>capsule, metal_nut, pill.</a:t>
             </a:r>
           </a:p>
         </p:txBody>
@@ -7604,7 +7577,7 @@
           <p:cNvPr id="26" name="">
             <a:extLst xmlns:a="http://schemas.openxmlformats.org/drawingml/2006/main">
               <a:ext uri="{FF2B5EF4-FFF2-40B4-BE49-F238E27FC236}">
-                <a16:creationId xmlns:a16="http://schemas.microsoft.com/office/drawing/2014/main" id="{CD40AE2F-8D23-41C5-9131-8C8B56C3E939}"/>
+                <a16:creationId xmlns:a16="http://schemas.microsoft.com/office/drawing/2014/main" id="{E9C43743-DEEC-47CF-B308-62AAA94E31F4}"/>
               </a:ext>
             </a:extLst>
           </p:cNvPr>
@@ -7641,7 +7614,7 @@
           <p:cNvPr id="27" name="">
             <a:extLst xmlns:a="http://schemas.openxmlformats.org/drawingml/2006/main">
               <a:ext uri="{FF2B5EF4-FFF2-40B4-BE49-F238E27FC236}">
-                <a16:creationId xmlns:a16="http://schemas.microsoft.com/office/drawing/2014/main" id="{09635A7C-F666-4D38-B01A-34332878C204}"/>
+                <a16:creationId xmlns:a16="http://schemas.microsoft.com/office/drawing/2014/main" id="{95302261-8D84-4835-8711-5D737C19E31F}"/>
               </a:ext>
             </a:extLst>
           </p:cNvPr>
@@ -7676,7 +7649,7 @@
           <p:cNvPr id="28" name="">
             <a:extLst xmlns:a="http://schemas.openxmlformats.org/drawingml/2006/main">
               <a:ext uri="{FF2B5EF4-FFF2-40B4-BE49-F238E27FC236}">
-                <a16:creationId xmlns:a16="http://schemas.microsoft.com/office/drawing/2014/main" id="{83BA59F2-9959-4C62-B74E-85BD5A9197C8}"/>
+                <a16:creationId xmlns:a16="http://schemas.microsoft.com/office/drawing/2014/main" id="{A7F85FF0-8350-4E04-A1CD-16CCAFD9893F}"/>
               </a:ext>
             </a:extLst>
           </p:cNvPr>
@@ -7711,7 +7684,7 @@
           <p:cNvPr id="29" name="">
             <a:extLst xmlns:a="http://schemas.openxmlformats.org/drawingml/2006/main">
               <a:ext uri="{FF2B5EF4-FFF2-40B4-BE49-F238E27FC236}">
-                <a16:creationId xmlns:a16="http://schemas.microsoft.com/office/drawing/2014/main" id="{9C1E699E-13D1-46C4-8CC4-2BA3223F06BB}"/>
+                <a16:creationId xmlns:a16="http://schemas.microsoft.com/office/drawing/2014/main" id="{B8E634B2-991E-4A89-95A6-AD4127F07C31}"/>
               </a:ext>
             </a:extLst>
           </p:cNvPr>
@@ -7746,7 +7719,7 @@
           <p:cNvPr id="30" name="">
             <a:extLst xmlns:a="http://schemas.openxmlformats.org/drawingml/2006/main">
               <a:ext uri="{FF2B5EF4-FFF2-40B4-BE49-F238E27FC236}">
-                <a16:creationId xmlns:a16="http://schemas.microsoft.com/office/drawing/2014/main" id="{56C90E59-4D23-4878-9528-6A92F3B60C85}"/>
+                <a16:creationId xmlns:a16="http://schemas.microsoft.com/office/drawing/2014/main" id="{6937B9D5-9AF8-480F-A113-B3380D81969A}"/>
               </a:ext>
             </a:extLst>
           </p:cNvPr>
@@ -7781,7 +7754,7 @@
           <p:cNvPr id="31" name="">
             <a:extLst xmlns:a="http://schemas.openxmlformats.org/drawingml/2006/main">
               <a:ext uri="{FF2B5EF4-FFF2-40B4-BE49-F238E27FC236}">
-                <a16:creationId xmlns:a16="http://schemas.microsoft.com/office/drawing/2014/main" id="{B9E25735-261E-4A93-ABBD-D9835E8A338A}"/>
+                <a16:creationId xmlns:a16="http://schemas.microsoft.com/office/drawing/2014/main" id="{7F7F6273-75CD-4244-961A-9E9C827B42CF}"/>
               </a:ext>
             </a:extLst>
           </p:cNvPr>
@@ -7816,7 +7789,7 @@
           <p:cNvPr id="32" name="">
             <a:extLst xmlns:a="http://schemas.openxmlformats.org/drawingml/2006/main">
               <a:ext uri="{FF2B5EF4-FFF2-40B4-BE49-F238E27FC236}">
-                <a16:creationId xmlns:a16="http://schemas.microsoft.com/office/drawing/2014/main" id="{50602319-DE42-4CB4-98EE-BB148B8C6FB2}"/>
+                <a16:creationId xmlns:a16="http://schemas.microsoft.com/office/drawing/2014/main" id="{92006EE6-A78B-4334-A362-CD329858C58F}"/>
               </a:ext>
             </a:extLst>
           </p:cNvPr>
@@ -7874,7 +7847,7 @@
           <p:cNvPr id="33" name="">
             <a:extLst xmlns:a="http://schemas.openxmlformats.org/drawingml/2006/main">
               <a:ext uri="{FF2B5EF4-FFF2-40B4-BE49-F238E27FC236}">
-                <a16:creationId xmlns:a16="http://schemas.microsoft.com/office/drawing/2014/main" id="{AAAF76CF-02C9-4C23-9C40-7B91DC4FF5CE}"/>
+                <a16:creationId xmlns:a16="http://schemas.microsoft.com/office/drawing/2014/main" id="{32FDD10A-2538-4A11-AA35-CCEE203F6E01}"/>
               </a:ext>
             </a:extLst>
           </p:cNvPr>
@@ -7910,14 +7883,14 @@
           <a:lstStyle xmlns:a="http://schemas.openxmlformats.org/drawingml/2006/main"/>
           <a:p xmlns:a="http://schemas.openxmlformats.org/drawingml/2006/main">
             <a:pPr algn="l">
-              <a:defRPr sz="1050" b="0">
+              <a:defRPr sz="1275" b="0">
                 <a:solidFill>
                   <a:srgbClr val="101214"/>
                 </a:solidFill>
               </a:defRPr>
             </a:pPr>
             <a:r>
-              <a:rPr sz="1050" b="0">
+              <a:rPr sz="1275" b="0">
                 <a:solidFill>
                   <a:srgbClr val="101214"/>
                 </a:solidFill>
@@ -7927,53 +7900,19 @@
           </a:p>
           <a:p xmlns:a="http://schemas.openxmlformats.org/drawingml/2006/main">
             <a:pPr algn="l">
-              <a:defRPr sz="1050" b="0">
+              <a:defRPr sz="1275" b="0">
                 <a:solidFill>
                   <a:srgbClr val="101214"/>
                 </a:solidFill>
               </a:defRPr>
             </a:pPr>
             <a:r>
-              <a:rPr sz="1050" b="0">
+              <a:rPr sz="1275" b="0">
                 <a:solidFill>
                   <a:srgbClr val="101214"/>
                 </a:solidFill>
               </a:rPr>
-              <a:t>раньше: лучшая эпоха = 4,</a:t>
-            </a:r>
-          </a:p>
-          <a:p xmlns:a="http://schemas.openxmlformats.org/drawingml/2006/main">
-            <a:pPr algn="l">
-              <a:defRPr sz="1050" b="0">
-                <a:solidFill>
-                  <a:srgbClr val="101214"/>
-                </a:solidFill>
-              </a:defRPr>
-            </a:pPr>
-            <a:r>
-              <a:rPr sz="1050" b="0">
-                <a:solidFill>
-                  <a:srgbClr val="101214"/>
-                </a:solidFill>
-              </a:rPr>
-              <a:t>best validation error =</a:t>
-            </a:r>
-          </a:p>
-          <a:p xmlns:a="http://schemas.openxmlformats.org/drawingml/2006/main">
-            <a:pPr algn="l">
-              <a:defRPr sz="1050" b="0">
-                <a:solidFill>
-                  <a:srgbClr val="101214"/>
-                </a:solidFill>
-              </a:defRPr>
-            </a:pPr>
-            <a:r>
-              <a:rPr sz="1050" b="0">
-                <a:solidFill>
-                  <a:srgbClr val="101214"/>
-                </a:solidFill>
-              </a:rPr>
-              <a:t>0.874632.</a:t>
+              <a:t>раньше: лучшая эпоха = 4.</a:t>
             </a:r>
           </a:p>
         </p:txBody>
@@ -7983,7 +7922,7 @@
           <p:cNvPr id="34" name="">
             <a:extLst xmlns:a="http://schemas.openxmlformats.org/drawingml/2006/main">
               <a:ext uri="{FF2B5EF4-FFF2-40B4-BE49-F238E27FC236}">
-                <a16:creationId xmlns:a16="http://schemas.microsoft.com/office/drawing/2014/main" id="{F468E6F8-928C-43DE-BC4D-9407B52188CE}"/>
+                <a16:creationId xmlns:a16="http://schemas.microsoft.com/office/drawing/2014/main" id="{37A8FB99-D386-432E-9801-C8F79FB6DEEA}"/>
               </a:ext>
             </a:extLst>
           </p:cNvPr>
@@ -8039,7 +7978,7 @@
     </p:spTree>
     <p:extLst>
       <p:ext uri="{BB962C8B-B14F-4D97-AF65-F5344CB8AC3E}">
-        <p14:creationId xmlns:p14="http://schemas.microsoft.com/office/powerpoint/2010/main" val="699958211"/>
+        <p14:creationId xmlns:p14="http://schemas.microsoft.com/office/powerpoint/2010/main" val="114998715"/>
       </p:ext>
     </p:extLst>
   </p:cSld>
@@ -8070,7 +8009,7 @@
           <p:cNvPr id="1" name="Slide Number Placeholder 5">
             <a:extLst xmlns:a="http://schemas.openxmlformats.org/drawingml/2006/main">
               <a:ext uri="{FF2B5EF4-FFF2-40B4-BE49-F238E27FC236}">
-                <a16:creationId xmlns:a16="http://schemas.microsoft.com/office/drawing/2014/main" id="{CF8FB0CB-3547-4076-A20A-07C3536CB66E}"/>
+                <a16:creationId xmlns:a16="http://schemas.microsoft.com/office/drawing/2014/main" id="{75C22673-2D44-4F8F-AA03-6970E94CAA50}"/>
               </a:ext>
             </a:extLst>
           </p:cNvPr>
@@ -8106,7 +8045,7 @@
           <p:nvPr/>
         </p:nvPicPr>
         <p:blipFill>
-          <a:blip xmlns:r="http://schemas.openxmlformats.org/officeDocument/2006/relationships" xmlns:a="http://schemas.openxmlformats.org/drawingml/2006/main" r:embed="R7e8c0d7f269947c0"/>
+          <a:blip xmlns:r="http://schemas.openxmlformats.org/officeDocument/2006/relationships" xmlns:a="http://schemas.openxmlformats.org/drawingml/2006/main" r:embed="R796f85e244de4d4c"/>
           <a:srcRect xmlns:a="http://schemas.openxmlformats.org/drawingml/2006/main" l="0" t="2470" r="0" b="2470"/>
           <a:stretch xmlns:a="http://schemas.openxmlformats.org/drawingml/2006/main">
             <a:fillRect l="0" t="0" r="0" b="0"/>
@@ -8127,7 +8066,7 @@
           <p:cNvPr id="3" name="">
             <a:extLst xmlns:a="http://schemas.openxmlformats.org/drawingml/2006/main">
               <a:ext uri="{FF2B5EF4-FFF2-40B4-BE49-F238E27FC236}">
-                <a16:creationId xmlns:a16="http://schemas.microsoft.com/office/drawing/2014/main" id="{0BB3134D-C941-4EA2-BFA0-2ACEA8D0FC3E}"/>
+                <a16:creationId xmlns:a16="http://schemas.microsoft.com/office/drawing/2014/main" id="{44647F2B-4031-47BA-AEF1-C5B3D972E295}"/>
               </a:ext>
             </a:extLst>
           </p:cNvPr>
@@ -8164,7 +8103,7 @@
           <p:cNvPr id="4" name="">
             <a:extLst xmlns:a="http://schemas.openxmlformats.org/drawingml/2006/main">
               <a:ext uri="{FF2B5EF4-FFF2-40B4-BE49-F238E27FC236}">
-                <a16:creationId xmlns:a16="http://schemas.microsoft.com/office/drawing/2014/main" id="{1B9EB0E8-4F5D-4C71-97F9-FE2945997A79}"/>
+                <a16:creationId xmlns:a16="http://schemas.microsoft.com/office/drawing/2014/main" id="{782023E0-D0EE-4880-A024-E2A89E94A4F4}"/>
               </a:ext>
             </a:extLst>
           </p:cNvPr>
@@ -8222,7 +8161,7 @@
           <p:cNvPr id="5" name="">
             <a:extLst xmlns:a="http://schemas.openxmlformats.org/drawingml/2006/main">
               <a:ext uri="{FF2B5EF4-FFF2-40B4-BE49-F238E27FC236}">
-                <a16:creationId xmlns:a16="http://schemas.microsoft.com/office/drawing/2014/main" id="{82C71ECC-2CBB-4221-B50C-AEC5F8EA82AF}"/>
+                <a16:creationId xmlns:a16="http://schemas.microsoft.com/office/drawing/2014/main" id="{C703BEFC-E5E9-4863-9A6D-F135528D182D}"/>
               </a:ext>
             </a:extLst>
           </p:cNvPr>
@@ -8280,7 +8219,7 @@
           <p:cNvPr id="6" name="">
             <a:extLst xmlns:a="http://schemas.openxmlformats.org/drawingml/2006/main">
               <a:ext uri="{FF2B5EF4-FFF2-40B4-BE49-F238E27FC236}">
-                <a16:creationId xmlns:a16="http://schemas.microsoft.com/office/drawing/2014/main" id="{676348C1-9E40-492F-B7E8-F487DF583158}"/>
+                <a16:creationId xmlns:a16="http://schemas.microsoft.com/office/drawing/2014/main" id="{53A183D5-40A9-4A6E-9CDF-58A05C42C513}"/>
               </a:ext>
             </a:extLst>
           </p:cNvPr>
@@ -8315,7 +8254,7 @@
           <p:cNvPr id="7" name="">
             <a:extLst xmlns:a="http://schemas.openxmlformats.org/drawingml/2006/main">
               <a:ext uri="{FF2B5EF4-FFF2-40B4-BE49-F238E27FC236}">
-                <a16:creationId xmlns:a16="http://schemas.microsoft.com/office/drawing/2014/main" id="{BAEA8224-0F30-434B-A1E7-EA72E8A67412}"/>
+                <a16:creationId xmlns:a16="http://schemas.microsoft.com/office/drawing/2014/main" id="{7FB8E15A-2AE5-4DC0-B00C-C0273DCF7CB0}"/>
               </a:ext>
             </a:extLst>
           </p:cNvPr>
@@ -8348,7 +8287,7 @@
           <p:cNvPr id="8" name="">
             <a:extLst xmlns:a="http://schemas.openxmlformats.org/drawingml/2006/main">
               <a:ext uri="{FF2B5EF4-FFF2-40B4-BE49-F238E27FC236}">
-                <a16:creationId xmlns:a16="http://schemas.microsoft.com/office/drawing/2014/main" id="{5BF4DD3C-C09B-41F6-9E66-CCC4DD96AADB}"/>
+                <a16:creationId xmlns:a16="http://schemas.microsoft.com/office/drawing/2014/main" id="{EDE815F3-EB87-4940-AB4D-48AE4E2562CC}"/>
               </a:ext>
             </a:extLst>
           </p:cNvPr>
@@ -8396,7 +8335,7 @@
                   <a:srgbClr val="101214"/>
                 </a:solidFill>
               </a:rPr>
-              <a:t>Итоговые метрики</a:t>
+              <a:t>Итоговые результаты</a:t>
             </a:r>
           </a:p>
         </p:txBody>
@@ -8406,7 +8345,7 @@
           <p:cNvPr id="9" name="">
             <a:extLst xmlns:a="http://schemas.openxmlformats.org/drawingml/2006/main">
               <a:ext uri="{FF2B5EF4-FFF2-40B4-BE49-F238E27FC236}">
-                <a16:creationId xmlns:a16="http://schemas.microsoft.com/office/drawing/2014/main" id="{963CE5D1-131E-4828-B2EE-6C1114CFE315}"/>
+                <a16:creationId xmlns:a16="http://schemas.microsoft.com/office/drawing/2014/main" id="{5D34F5D6-69FC-4DCD-B4C9-2708CA5F636B}"/>
               </a:ext>
             </a:extLst>
           </p:cNvPr>
@@ -8454,7 +8393,7 @@
                   <a:srgbClr val="30363A"/>
                 </a:solidFill>
               </a:rPr>
-              <a:t>Финальные численные результаты сравнивают отдельное обучение и общее обучение.</a:t>
+              <a:t>Финальные метрики сравнивают отдельное обучение по категориям и общий режим.</a:t>
             </a:r>
           </a:p>
         </p:txBody>
@@ -8464,7 +8403,7 @@
           <p:cNvPr id="10" name="">
             <a:extLst xmlns:a="http://schemas.openxmlformats.org/drawingml/2006/main">
               <a:ext uri="{FF2B5EF4-FFF2-40B4-BE49-F238E27FC236}">
-                <a16:creationId xmlns:a16="http://schemas.microsoft.com/office/drawing/2014/main" id="{F7AAF250-0FD7-497C-BDE0-93B1BBA20830}"/>
+                <a16:creationId xmlns:a16="http://schemas.microsoft.com/office/drawing/2014/main" id="{585D8CE0-1641-475E-9E5D-E1D7E063907F}"/>
               </a:ext>
             </a:extLst>
           </p:cNvPr>
@@ -8501,7 +8440,7 @@
           <p:cNvPr id="11" name="">
             <a:extLst xmlns:a="http://schemas.openxmlformats.org/drawingml/2006/main">
               <a:ext uri="{FF2B5EF4-FFF2-40B4-BE49-F238E27FC236}">
-                <a16:creationId xmlns:a16="http://schemas.microsoft.com/office/drawing/2014/main" id="{540CA729-12B0-4670-B146-1BE1552D32FB}"/>
+                <a16:creationId xmlns:a16="http://schemas.microsoft.com/office/drawing/2014/main" id="{70B7762E-BDF4-4938-8872-88AF7DE15102}"/>
               </a:ext>
             </a:extLst>
           </p:cNvPr>
@@ -8536,7 +8475,7 @@
           <p:cNvPr id="12" name="">
             <a:extLst xmlns:a="http://schemas.openxmlformats.org/drawingml/2006/main">
               <a:ext uri="{FF2B5EF4-FFF2-40B4-BE49-F238E27FC236}">
-                <a16:creationId xmlns:a16="http://schemas.microsoft.com/office/drawing/2014/main" id="{A2906F38-9BE9-4BBA-A9B1-47768EA1DCB1}"/>
+                <a16:creationId xmlns:a16="http://schemas.microsoft.com/office/drawing/2014/main" id="{60AC4A4A-6075-4FAA-B1B9-0BA9D2508909}"/>
               </a:ext>
             </a:extLst>
           </p:cNvPr>
@@ -8594,7 +8533,7 @@
           <p:cNvPr id="13" name="">
             <a:extLst xmlns:a="http://schemas.openxmlformats.org/drawingml/2006/main">
               <a:ext uri="{FF2B5EF4-FFF2-40B4-BE49-F238E27FC236}">
-                <a16:creationId xmlns:a16="http://schemas.microsoft.com/office/drawing/2014/main" id="{822DE184-A5AB-45EC-9203-929526E267E2}"/>
+                <a16:creationId xmlns:a16="http://schemas.microsoft.com/office/drawing/2014/main" id="{3E59EF23-C8AA-4160-A214-3D1FD0100290}"/>
               </a:ext>
             </a:extLst>
           </p:cNvPr>
@@ -8642,7 +8581,7 @@
                   <a:srgbClr val="30363A"/>
                 </a:solidFill>
               </a:rPr>
-              <a:t>Dice для bottle отдельно</a:t>
+              <a:t>Dice: bottle отдельно</a:t>
             </a:r>
           </a:p>
         </p:txBody>
@@ -8652,7 +8591,7 @@
           <p:cNvPr id="14" name="">
             <a:extLst xmlns:a="http://schemas.openxmlformats.org/drawingml/2006/main">
               <a:ext uri="{FF2B5EF4-FFF2-40B4-BE49-F238E27FC236}">
-                <a16:creationId xmlns:a16="http://schemas.microsoft.com/office/drawing/2014/main" id="{97E0CD7B-3FAC-4179-84C6-5247FA873637}"/>
+                <a16:creationId xmlns:a16="http://schemas.microsoft.com/office/drawing/2014/main" id="{2742F654-8C3F-498D-A5F6-8782B54A9B93}"/>
               </a:ext>
             </a:extLst>
           </p:cNvPr>
@@ -8700,7 +8639,7 @@
                   <a:srgbClr val="687076"/>
                 </a:solidFill>
               </a:rPr>
-              <a:t>лучший результат по bottle</a:t>
+              <a:t>лучший bottle-результат</a:t>
             </a:r>
           </a:p>
         </p:txBody>
@@ -8710,7 +8649,7 @@
           <p:cNvPr id="15" name="">
             <a:extLst xmlns:a="http://schemas.openxmlformats.org/drawingml/2006/main">
               <a:ext uri="{FF2B5EF4-FFF2-40B4-BE49-F238E27FC236}">
-                <a16:creationId xmlns:a16="http://schemas.microsoft.com/office/drawing/2014/main" id="{A435AEAD-6200-4BB7-A5F5-DA50E490BCF3}"/>
+                <a16:creationId xmlns:a16="http://schemas.microsoft.com/office/drawing/2014/main" id="{D1F9B900-C2E9-485F-B780-7F833A249B8C}"/>
               </a:ext>
             </a:extLst>
           </p:cNvPr>
@@ -8747,7 +8686,7 @@
           <p:cNvPr id="16" name="">
             <a:extLst xmlns:a="http://schemas.openxmlformats.org/drawingml/2006/main">
               <a:ext uri="{FF2B5EF4-FFF2-40B4-BE49-F238E27FC236}">
-                <a16:creationId xmlns:a16="http://schemas.microsoft.com/office/drawing/2014/main" id="{936F7E8A-9EAD-492D-931B-509EC6522E63}"/>
+                <a16:creationId xmlns:a16="http://schemas.microsoft.com/office/drawing/2014/main" id="{A2994C5D-3B29-4824-92B6-82F182901BDE}"/>
               </a:ext>
             </a:extLst>
           </p:cNvPr>
@@ -8782,7 +8721,7 @@
           <p:cNvPr id="17" name="">
             <a:extLst xmlns:a="http://schemas.openxmlformats.org/drawingml/2006/main">
               <a:ext uri="{FF2B5EF4-FFF2-40B4-BE49-F238E27FC236}">
-                <a16:creationId xmlns:a16="http://schemas.microsoft.com/office/drawing/2014/main" id="{D01BA722-2325-420F-9233-6C66265480AD}"/>
+                <a16:creationId xmlns:a16="http://schemas.microsoft.com/office/drawing/2014/main" id="{4349E973-9D6B-492A-A374-2BC7BD9D5654}"/>
               </a:ext>
             </a:extLst>
           </p:cNvPr>
@@ -8840,7 +8779,7 @@
           <p:cNvPr id="18" name="">
             <a:extLst xmlns:a="http://schemas.openxmlformats.org/drawingml/2006/main">
               <a:ext uri="{FF2B5EF4-FFF2-40B4-BE49-F238E27FC236}">
-                <a16:creationId xmlns:a16="http://schemas.microsoft.com/office/drawing/2014/main" id="{2E336355-D7C8-4E30-83FC-D630E55D8786}"/>
+                <a16:creationId xmlns:a16="http://schemas.microsoft.com/office/drawing/2014/main" id="{584396DF-896A-431E-B5C0-7DBDD342909F}"/>
               </a:ext>
             </a:extLst>
           </p:cNvPr>
@@ -8888,7 +8827,7 @@
                   <a:srgbClr val="30363A"/>
                 </a:solidFill>
               </a:rPr>
-              <a:t>IoU для bottle отдельно</a:t>
+              <a:t>IoU: bottle отдельно</a:t>
             </a:r>
           </a:p>
         </p:txBody>
@@ -8898,7 +8837,7 @@
           <p:cNvPr id="19" name="">
             <a:extLst xmlns:a="http://schemas.openxmlformats.org/drawingml/2006/main">
               <a:ext uri="{FF2B5EF4-FFF2-40B4-BE49-F238E27FC236}">
-                <a16:creationId xmlns:a16="http://schemas.microsoft.com/office/drawing/2014/main" id="{57E4579E-23BB-4167-B314-859556B6B2F8}"/>
+                <a16:creationId xmlns:a16="http://schemas.microsoft.com/office/drawing/2014/main" id="{79B45C86-1F7F-490C-B31E-F9114110B94B}"/>
               </a:ext>
             </a:extLst>
           </p:cNvPr>
@@ -8946,7 +8885,7 @@
                   <a:srgbClr val="687076"/>
                 </a:solidFill>
               </a:rPr>
-              <a:t>сильнее общего режима</a:t>
+              <a:t>лучше all-in-one</a:t>
             </a:r>
           </a:p>
         </p:txBody>
@@ -8956,7 +8895,7 @@
           <p:cNvPr id="20" name="">
             <a:extLst xmlns:a="http://schemas.openxmlformats.org/drawingml/2006/main">
               <a:ext uri="{FF2B5EF4-FFF2-40B4-BE49-F238E27FC236}">
-                <a16:creationId xmlns:a16="http://schemas.microsoft.com/office/drawing/2014/main" id="{24FBDEA4-1C47-46DF-867C-5076CAA9405D}"/>
+                <a16:creationId xmlns:a16="http://schemas.microsoft.com/office/drawing/2014/main" id="{EB4B8D1C-C1DD-4BEC-85C6-F6B222414E8A}"/>
               </a:ext>
             </a:extLst>
           </p:cNvPr>
@@ -8993,7 +8932,7 @@
           <p:cNvPr id="21" name="">
             <a:extLst xmlns:a="http://schemas.openxmlformats.org/drawingml/2006/main">
               <a:ext uri="{FF2B5EF4-FFF2-40B4-BE49-F238E27FC236}">
-                <a16:creationId xmlns:a16="http://schemas.microsoft.com/office/drawing/2014/main" id="{EA8184E5-CFFF-4B2B-86A6-95ECF6728834}"/>
+                <a16:creationId xmlns:a16="http://schemas.microsoft.com/office/drawing/2014/main" id="{BDBF93B2-51BB-4E98-8EAB-82CB1D8A185B}"/>
               </a:ext>
             </a:extLst>
           </p:cNvPr>
@@ -9028,7 +8967,7 @@
           <p:cNvPr id="22" name="">
             <a:extLst xmlns:a="http://schemas.openxmlformats.org/drawingml/2006/main">
               <a:ext uri="{FF2B5EF4-FFF2-40B4-BE49-F238E27FC236}">
-                <a16:creationId xmlns:a16="http://schemas.microsoft.com/office/drawing/2014/main" id="{4B46430A-9C90-4376-9F0E-14D357E577CE}"/>
+                <a16:creationId xmlns:a16="http://schemas.microsoft.com/office/drawing/2014/main" id="{2B810C7B-8C00-41A0-89DD-7DFE5A93EF16}"/>
               </a:ext>
             </a:extLst>
           </p:cNvPr>
@@ -9086,7 +9025,7 @@
           <p:cNvPr id="23" name="">
             <a:extLst xmlns:a="http://schemas.openxmlformats.org/drawingml/2006/main">
               <a:ext uri="{FF2B5EF4-FFF2-40B4-BE49-F238E27FC236}">
-                <a16:creationId xmlns:a16="http://schemas.microsoft.com/office/drawing/2014/main" id="{57F55094-7B4E-44A7-9504-E48901801996}"/>
+                <a16:creationId xmlns:a16="http://schemas.microsoft.com/office/drawing/2014/main" id="{F18E9A7B-F3C5-4D2E-A001-90B7FD88A8A5}"/>
               </a:ext>
             </a:extLst>
           </p:cNvPr>
@@ -9134,7 +9073,7 @@
                   <a:srgbClr val="30363A"/>
                 </a:solidFill>
               </a:rPr>
-              <a:t>Dice для bottle в all-in-one</a:t>
+              <a:t>Dice: bottle all-in-one</a:t>
             </a:r>
           </a:p>
         </p:txBody>
@@ -9144,7 +9083,7 @@
           <p:cNvPr id="24" name="">
             <a:extLst xmlns:a="http://schemas.openxmlformats.org/drawingml/2006/main">
               <a:ext uri="{FF2B5EF4-FFF2-40B4-BE49-F238E27FC236}">
-                <a16:creationId xmlns:a16="http://schemas.microsoft.com/office/drawing/2014/main" id="{52482971-C256-47FE-BBC1-1175F54EBD7C}"/>
+                <a16:creationId xmlns:a16="http://schemas.microsoft.com/office/drawing/2014/main" id="{597A032A-CAD0-4A52-9993-0E6ACFDE7811}"/>
               </a:ext>
             </a:extLst>
           </p:cNvPr>
@@ -9192,7 +9131,7 @@
                   <a:srgbClr val="687076"/>
                 </a:solidFill>
               </a:rPr>
-              <a:t>ниже отдельного обучения</a:t>
+              <a:t>ниже отдельного режима</a:t>
             </a:r>
           </a:p>
         </p:txBody>
@@ -9202,7 +9141,7 @@
           <p:cNvPr id="25" name="">
             <a:extLst xmlns:a="http://schemas.openxmlformats.org/drawingml/2006/main">
               <a:ext uri="{FF2B5EF4-FFF2-40B4-BE49-F238E27FC236}">
-                <a16:creationId xmlns:a16="http://schemas.microsoft.com/office/drawing/2014/main" id="{D927A256-1699-48B7-8B0A-F323D7070A76}"/>
+                <a16:creationId xmlns:a16="http://schemas.microsoft.com/office/drawing/2014/main" id="{8FE56A83-3F32-45B1-AD91-54A479974345}"/>
               </a:ext>
             </a:extLst>
           </p:cNvPr>
@@ -9258,7 +9197,7 @@
     </p:spTree>
     <p:extLst>
       <p:ext uri="{BB962C8B-B14F-4D97-AF65-F5344CB8AC3E}">
-        <p14:creationId xmlns:p14="http://schemas.microsoft.com/office/powerpoint/2010/main" val="777325975"/>
+        <p14:creationId xmlns:p14="http://schemas.microsoft.com/office/powerpoint/2010/main" val="1308282305"/>
       </p:ext>
     </p:extLst>
   </p:cSld>
@@ -9289,7 +9228,7 @@
           <p:cNvPr id="1" name="Slide Number Placeholder 5">
             <a:extLst xmlns:a="http://schemas.openxmlformats.org/drawingml/2006/main">
               <a:ext uri="{FF2B5EF4-FFF2-40B4-BE49-F238E27FC236}">
-                <a16:creationId xmlns:a16="http://schemas.microsoft.com/office/drawing/2014/main" id="{CF8FB0CB-3547-4076-A20A-07C3536CB66E}"/>
+                <a16:creationId xmlns:a16="http://schemas.microsoft.com/office/drawing/2014/main" id="{75C22673-2D44-4F8F-AA03-6970E94CAA50}"/>
               </a:ext>
             </a:extLst>
           </p:cNvPr>
@@ -9325,7 +9264,7 @@
           <p:nvPr/>
         </p:nvPicPr>
         <p:blipFill>
-          <a:blip xmlns:r="http://schemas.openxmlformats.org/officeDocument/2006/relationships" xmlns:a="http://schemas.openxmlformats.org/drawingml/2006/main" r:embed="R9d1db98ac2e84f41"/>
+          <a:blip xmlns:r="http://schemas.openxmlformats.org/officeDocument/2006/relationships" xmlns:a="http://schemas.openxmlformats.org/drawingml/2006/main" r:embed="R3d7bed5659e940d1"/>
           <a:srcRect xmlns:a="http://schemas.openxmlformats.org/drawingml/2006/main" l="0" t="2470" r="0" b="2470"/>
           <a:stretch xmlns:a="http://schemas.openxmlformats.org/drawingml/2006/main">
             <a:fillRect l="0" t="0" r="0" b="0"/>
@@ -9346,7 +9285,7 @@
           <p:cNvPr id="3" name="">
             <a:extLst xmlns:a="http://schemas.openxmlformats.org/drawingml/2006/main">
               <a:ext uri="{FF2B5EF4-FFF2-40B4-BE49-F238E27FC236}">
-                <a16:creationId xmlns:a16="http://schemas.microsoft.com/office/drawing/2014/main" id="{8FCE7415-CF72-4841-B0E2-69298F3A5F0B}"/>
+                <a16:creationId xmlns:a16="http://schemas.microsoft.com/office/drawing/2014/main" id="{CD96B056-7304-4E63-A127-7A45863F28EC}"/>
               </a:ext>
             </a:extLst>
           </p:cNvPr>
@@ -9383,7 +9322,7 @@
           <p:cNvPr id="4" name="">
             <a:extLst xmlns:a="http://schemas.openxmlformats.org/drawingml/2006/main">
               <a:ext uri="{FF2B5EF4-FFF2-40B4-BE49-F238E27FC236}">
-                <a16:creationId xmlns:a16="http://schemas.microsoft.com/office/drawing/2014/main" id="{ABF27E52-78EF-4D3A-B1F0-7C6EBCA4AF4D}"/>
+                <a16:creationId xmlns:a16="http://schemas.microsoft.com/office/drawing/2014/main" id="{5DB92E3E-1DBA-4C38-9619-15A7C0D269F8}"/>
               </a:ext>
             </a:extLst>
           </p:cNvPr>
@@ -9441,7 +9380,7 @@
           <p:cNvPr id="5" name="">
             <a:extLst xmlns:a="http://schemas.openxmlformats.org/drawingml/2006/main">
               <a:ext uri="{FF2B5EF4-FFF2-40B4-BE49-F238E27FC236}">
-                <a16:creationId xmlns:a16="http://schemas.microsoft.com/office/drawing/2014/main" id="{A1A513F6-B9E3-4DE4-BD95-6F0B3B7A054E}"/>
+                <a16:creationId xmlns:a16="http://schemas.microsoft.com/office/drawing/2014/main" id="{076A96AC-6539-445C-8C1B-F25A4A66C5DF}"/>
               </a:ext>
             </a:extLst>
           </p:cNvPr>
@@ -9499,7 +9438,7 @@
           <p:cNvPr id="6" name="">
             <a:extLst xmlns:a="http://schemas.openxmlformats.org/drawingml/2006/main">
               <a:ext uri="{FF2B5EF4-FFF2-40B4-BE49-F238E27FC236}">
-                <a16:creationId xmlns:a16="http://schemas.microsoft.com/office/drawing/2014/main" id="{F70C1D2A-3ECA-4906-B4FC-E8DEE6D31FB3}"/>
+                <a16:creationId xmlns:a16="http://schemas.microsoft.com/office/drawing/2014/main" id="{644D133A-90D5-427A-8F2C-0E1D2C670DA7}"/>
               </a:ext>
             </a:extLst>
           </p:cNvPr>
@@ -9534,7 +9473,7 @@
           <p:cNvPr id="7" name="">
             <a:extLst xmlns:a="http://schemas.openxmlformats.org/drawingml/2006/main">
               <a:ext uri="{FF2B5EF4-FFF2-40B4-BE49-F238E27FC236}">
-                <a16:creationId xmlns:a16="http://schemas.microsoft.com/office/drawing/2014/main" id="{75D223E1-046B-4395-9ADD-FA46A9C1F71A}"/>
+                <a16:creationId xmlns:a16="http://schemas.microsoft.com/office/drawing/2014/main" id="{ED4D48FB-B7DB-4F18-A2D2-A8B66BB8ADE0}"/>
               </a:ext>
             </a:extLst>
           </p:cNvPr>
@@ -9567,7 +9506,7 @@
           <p:cNvPr id="8" name="">
             <a:extLst xmlns:a="http://schemas.openxmlformats.org/drawingml/2006/main">
               <a:ext uri="{FF2B5EF4-FFF2-40B4-BE49-F238E27FC236}">
-                <a16:creationId xmlns:a16="http://schemas.microsoft.com/office/drawing/2014/main" id="{BD162ADB-9015-404E-B896-57E7296D1F52}"/>
+                <a16:creationId xmlns:a16="http://schemas.microsoft.com/office/drawing/2014/main" id="{BA3C63C5-24C8-4D0D-967C-41BD9A38C5D5}"/>
               </a:ext>
             </a:extLst>
           </p:cNvPr>
@@ -9615,7 +9554,7 @@
                   <a:srgbClr val="101214"/>
                 </a:solidFill>
               </a:rPr>
-              <a:t>Визуальные результаты сегментации</a:t>
+              <a:t>Визуальные результаты</a:t>
             </a:r>
           </a:p>
         </p:txBody>
@@ -9625,7 +9564,7 @@
           <p:cNvPr id="9" name="">
             <a:extLst xmlns:a="http://schemas.openxmlformats.org/drawingml/2006/main">
               <a:ext uri="{FF2B5EF4-FFF2-40B4-BE49-F238E27FC236}">
-                <a16:creationId xmlns:a16="http://schemas.microsoft.com/office/drawing/2014/main" id="{4A6482EF-F3F6-4FF5-A296-183DCD8879AC}"/>
+                <a16:creationId xmlns:a16="http://schemas.microsoft.com/office/drawing/2014/main" id="{6313E7E9-F23B-4B36-BB76-06123453F2E0}"/>
               </a:ext>
             </a:extLst>
           </p:cNvPr>
@@ -9673,7 +9612,7 @@
                   <a:srgbClr val="30363A"/>
                 </a:solidFill>
               </a:rPr>
-              <a:t>Проект показывает не только метрики, но и реальные примеры: изображение, маска и наложение.</a:t>
+              <a:t>Проект подтверждается не только метриками, но и примерами сегментации.</a:t>
             </a:r>
           </a:p>
         </p:txBody>
@@ -9683,7 +9622,7 @@
           <p:cNvPr id="10" name="">
             <a:extLst xmlns:a="http://schemas.openxmlformats.org/drawingml/2006/main">
               <a:ext uri="{FF2B5EF4-FFF2-40B4-BE49-F238E27FC236}">
-                <a16:creationId xmlns:a16="http://schemas.microsoft.com/office/drawing/2014/main" id="{EF144CB4-3FB5-4C93-8020-B9CE068D6D01}"/>
+                <a16:creationId xmlns:a16="http://schemas.microsoft.com/office/drawing/2014/main" id="{2DC651E5-7E37-45A1-8370-7161CE37A0AB}"/>
               </a:ext>
             </a:extLst>
           </p:cNvPr>
@@ -9720,7 +9659,7 @@
           <p:cNvPr id="11" name="">
             <a:extLst xmlns:a="http://schemas.openxmlformats.org/drawingml/2006/main">
               <a:ext uri="{FF2B5EF4-FFF2-40B4-BE49-F238E27FC236}">
-                <a16:creationId xmlns:a16="http://schemas.microsoft.com/office/drawing/2014/main" id="{58D44D2A-EB6E-4BA8-B5CA-EBE05F006724}"/>
+                <a16:creationId xmlns:a16="http://schemas.microsoft.com/office/drawing/2014/main" id="{70844630-D696-4E66-9A7D-10CE1C544AB3}"/>
               </a:ext>
             </a:extLst>
           </p:cNvPr>
@@ -9755,7 +9694,7 @@
           <p:cNvPr id="12" name="">
             <a:extLst xmlns:a="http://schemas.openxmlformats.org/drawingml/2006/main">
               <a:ext uri="{FF2B5EF4-FFF2-40B4-BE49-F238E27FC236}">
-                <a16:creationId xmlns:a16="http://schemas.microsoft.com/office/drawing/2014/main" id="{015F2B73-93BE-4BA5-9542-80E718041E5E}"/>
+                <a16:creationId xmlns:a16="http://schemas.microsoft.com/office/drawing/2014/main" id="{C99DF76D-817B-4D11-8924-E2CE42E45D1A}"/>
               </a:ext>
             </a:extLst>
           </p:cNvPr>
@@ -9790,7 +9729,7 @@
           <p:cNvPr id="13" name="">
             <a:extLst xmlns:a="http://schemas.openxmlformats.org/drawingml/2006/main">
               <a:ext uri="{FF2B5EF4-FFF2-40B4-BE49-F238E27FC236}">
-                <a16:creationId xmlns:a16="http://schemas.microsoft.com/office/drawing/2014/main" id="{0D77A051-8A35-4B4C-811C-A9A00909CAED}"/>
+                <a16:creationId xmlns:a16="http://schemas.microsoft.com/office/drawing/2014/main" id="{9BFA572D-37D4-4BBE-84EE-794169B83936}"/>
               </a:ext>
             </a:extLst>
           </p:cNvPr>
@@ -9825,7 +9764,7 @@
           <p:cNvPr id="14" name="">
             <a:extLst xmlns:a="http://schemas.openxmlformats.org/drawingml/2006/main">
               <a:ext uri="{FF2B5EF4-FFF2-40B4-BE49-F238E27FC236}">
-                <a16:creationId xmlns:a16="http://schemas.microsoft.com/office/drawing/2014/main" id="{30CF3835-D331-4EE4-90AF-FA895CC957DF}"/>
+                <a16:creationId xmlns:a16="http://schemas.microsoft.com/office/drawing/2014/main" id="{A739E17F-5B6B-4A98-B1F0-B853DF1A274B}"/>
               </a:ext>
             </a:extLst>
           </p:cNvPr>
@@ -9860,7 +9799,7 @@
           <p:cNvPr id="15" name="">
             <a:extLst xmlns:a="http://schemas.openxmlformats.org/drawingml/2006/main">
               <a:ext uri="{FF2B5EF4-FFF2-40B4-BE49-F238E27FC236}">
-                <a16:creationId xmlns:a16="http://schemas.microsoft.com/office/drawing/2014/main" id="{52A1DF26-63C5-4FBE-918F-E422EB197A7F}"/>
+                <a16:creationId xmlns:a16="http://schemas.microsoft.com/office/drawing/2014/main" id="{3BF3C916-52C8-4519-9F81-80D8B693EC0B}"/>
               </a:ext>
             </a:extLst>
           </p:cNvPr>
@@ -9895,7 +9834,7 @@
           <p:cNvPr id="16" name="">
             <a:extLst xmlns:a="http://schemas.openxmlformats.org/drawingml/2006/main">
               <a:ext uri="{FF2B5EF4-FFF2-40B4-BE49-F238E27FC236}">
-                <a16:creationId xmlns:a16="http://schemas.microsoft.com/office/drawing/2014/main" id="{465BD474-736C-4D7F-9E3F-3777221CE964}"/>
+                <a16:creationId xmlns:a16="http://schemas.microsoft.com/office/drawing/2014/main" id="{4F1D14C8-B573-49DC-9718-E329DD967CC8}"/>
               </a:ext>
             </a:extLst>
           </p:cNvPr>
@@ -9943,7 +9882,7 @@
                   <a:srgbClr val="116B49"/>
                 </a:solidFill>
               </a:rPr>
-              <a:t>Лучшие примеры</a:t>
+              <a:t>Лучшие случаи</a:t>
             </a:r>
           </a:p>
         </p:txBody>
@@ -9953,7 +9892,7 @@
           <p:cNvPr id="17" name="">
             <a:extLst xmlns:a="http://schemas.openxmlformats.org/drawingml/2006/main">
               <a:ext uri="{FF2B5EF4-FFF2-40B4-BE49-F238E27FC236}">
-                <a16:creationId xmlns:a16="http://schemas.microsoft.com/office/drawing/2014/main" id="{240F77FE-7789-44B9-8480-3F6E40A5B1F3}"/>
+                <a16:creationId xmlns:a16="http://schemas.microsoft.com/office/drawing/2014/main" id="{77ED8092-FE17-4B9D-8E44-4E8DCC2FFAF7}"/>
               </a:ext>
             </a:extLst>
           </p:cNvPr>
@@ -9989,70 +9928,53 @@
           <a:lstStyle xmlns:a="http://schemas.openxmlformats.org/drawingml/2006/main"/>
           <a:p xmlns:a="http://schemas.openxmlformats.org/drawingml/2006/main">
             <a:pPr algn="l">
-              <a:defRPr sz="1050" b="0">
+              <a:defRPr sz="1275" b="0">
                 <a:solidFill>
                   <a:srgbClr val="101214"/>
                 </a:solidFill>
               </a:defRPr>
             </a:pPr>
             <a:r>
-              <a:rPr sz="1050" b="0">
+              <a:rPr sz="1275" b="0">
                 <a:solidFill>
                   <a:srgbClr val="101214"/>
                 </a:solidFill>
               </a:rPr>
-              <a:t>Визуалы подтверждают, что</a:t>
+              <a:t>Модель уверенно выделяет</a:t>
             </a:r>
           </a:p>
           <a:p xmlns:a="http://schemas.openxmlformats.org/drawingml/2006/main">
             <a:pPr algn="l">
-              <a:defRPr sz="1050" b="0">
+              <a:defRPr sz="1275" b="0">
                 <a:solidFill>
                   <a:srgbClr val="101214"/>
                 </a:solidFill>
               </a:defRPr>
             </a:pPr>
             <a:r>
-              <a:rPr sz="1050" b="0">
+              <a:rPr sz="1275" b="0">
                 <a:solidFill>
                   <a:srgbClr val="101214"/>
                 </a:solidFill>
               </a:rPr>
-              <a:t>модель выделяет область</a:t>
+              <a:t>область дефекта на наглядных</a:t>
             </a:r>
           </a:p>
           <a:p xmlns:a="http://schemas.openxmlformats.org/drawingml/2006/main">
             <a:pPr algn="l">
-              <a:defRPr sz="1050" b="0">
+              <a:defRPr sz="1275" b="0">
                 <a:solidFill>
                   <a:srgbClr val="101214"/>
                 </a:solidFill>
               </a:defRPr>
             </a:pPr>
             <a:r>
-              <a:rPr sz="1050" b="0">
+              <a:rPr sz="1275" b="0">
                 <a:solidFill>
                   <a:srgbClr val="101214"/>
                 </a:solidFill>
               </a:rPr>
-              <a:t>дефекта, а не только даёт</a:t>
-            </a:r>
-          </a:p>
-          <a:p xmlns:a="http://schemas.openxmlformats.org/drawingml/2006/main">
-            <a:pPr algn="l">
-              <a:defRPr sz="1050" b="0">
-                <a:solidFill>
-                  <a:srgbClr val="101214"/>
-                </a:solidFill>
-              </a:defRPr>
-            </a:pPr>
-            <a:r>
-              <a:rPr sz="1050" b="0">
-                <a:solidFill>
-                  <a:srgbClr val="101214"/>
-                </a:solidFill>
-              </a:rPr>
-              <a:t>хорошие числа.</a:t>
+              <a:t>примерах.</a:t>
             </a:r>
           </a:p>
         </p:txBody>
@@ -10062,7 +9984,7 @@
           <p:cNvPr id="18" name="">
             <a:extLst xmlns:a="http://schemas.openxmlformats.org/drawingml/2006/main">
               <a:ext uri="{FF2B5EF4-FFF2-40B4-BE49-F238E27FC236}">
-                <a16:creationId xmlns:a16="http://schemas.microsoft.com/office/drawing/2014/main" id="{90640501-39FE-4A4B-B032-FAE814CA36AD}"/>
+                <a16:creationId xmlns:a16="http://schemas.microsoft.com/office/drawing/2014/main" id="{E2081444-7E39-4A40-90B6-AF46575F475E}"/>
               </a:ext>
             </a:extLst>
           </p:cNvPr>
@@ -10099,7 +10021,7 @@
           <p:cNvPr id="19" name="">
             <a:extLst xmlns:a="http://schemas.openxmlformats.org/drawingml/2006/main">
               <a:ext uri="{FF2B5EF4-FFF2-40B4-BE49-F238E27FC236}">
-                <a16:creationId xmlns:a16="http://schemas.microsoft.com/office/drawing/2014/main" id="{897A3D73-328B-4ED9-BEE1-A9E5812CD171}"/>
+                <a16:creationId xmlns:a16="http://schemas.microsoft.com/office/drawing/2014/main" id="{4EF29110-F841-4094-AB27-D07E8A58348B}"/>
               </a:ext>
             </a:extLst>
           </p:cNvPr>
@@ -10134,7 +10056,7 @@
           <p:cNvPr id="20" name="">
             <a:extLst xmlns:a="http://schemas.openxmlformats.org/drawingml/2006/main">
               <a:ext uri="{FF2B5EF4-FFF2-40B4-BE49-F238E27FC236}">
-                <a16:creationId xmlns:a16="http://schemas.microsoft.com/office/drawing/2014/main" id="{87627A41-E707-40DF-A13F-2132550014AE}"/>
+                <a16:creationId xmlns:a16="http://schemas.microsoft.com/office/drawing/2014/main" id="{E4E252AE-857E-4C8B-8ADC-25E6693F70BE}"/>
               </a:ext>
             </a:extLst>
           </p:cNvPr>
@@ -10169,7 +10091,7 @@
           <p:cNvPr id="21" name="">
             <a:extLst xmlns:a="http://schemas.openxmlformats.org/drawingml/2006/main">
               <a:ext uri="{FF2B5EF4-FFF2-40B4-BE49-F238E27FC236}">
-                <a16:creationId xmlns:a16="http://schemas.microsoft.com/office/drawing/2014/main" id="{E9323123-56FC-4E12-9C21-49595FB4D18B}"/>
+                <a16:creationId xmlns:a16="http://schemas.microsoft.com/office/drawing/2014/main" id="{16BEFA05-8956-4AD6-B194-68707138169A}"/>
               </a:ext>
             </a:extLst>
           </p:cNvPr>
@@ -10202,7 +10124,7 @@
           <p:cNvPr id="22" name="">
             <a:extLst xmlns:a="http://schemas.openxmlformats.org/drawingml/2006/main">
               <a:ext uri="{FF2B5EF4-FFF2-40B4-BE49-F238E27FC236}">
-                <a16:creationId xmlns:a16="http://schemas.microsoft.com/office/drawing/2014/main" id="{689DE01C-CD07-4A1B-B408-C4280783A619}"/>
+                <a16:creationId xmlns:a16="http://schemas.microsoft.com/office/drawing/2014/main" id="{61E304D2-488C-439D-A610-386CA70AF319}"/>
               </a:ext>
             </a:extLst>
           </p:cNvPr>
@@ -10235,7 +10157,7 @@
           <p:cNvPr id="23" name="">
             <a:extLst xmlns:a="http://schemas.openxmlformats.org/drawingml/2006/main">
               <a:ext uri="{FF2B5EF4-FFF2-40B4-BE49-F238E27FC236}">
-                <a16:creationId xmlns:a16="http://schemas.microsoft.com/office/drawing/2014/main" id="{FC868D16-FED3-44EF-9EEE-2ADDCC2CFF6B}"/>
+                <a16:creationId xmlns:a16="http://schemas.microsoft.com/office/drawing/2014/main" id="{72C9CE18-2AD8-40EA-AABA-F872552CA317}"/>
               </a:ext>
             </a:extLst>
           </p:cNvPr>
@@ -10270,7 +10192,7 @@
           <p:cNvPr id="24" name="">
             <a:extLst xmlns:a="http://schemas.openxmlformats.org/drawingml/2006/main">
               <a:ext uri="{FF2B5EF4-FFF2-40B4-BE49-F238E27FC236}">
-                <a16:creationId xmlns:a16="http://schemas.microsoft.com/office/drawing/2014/main" id="{41F92DA8-F59A-44E3-A565-61A43301FCDC}"/>
+                <a16:creationId xmlns:a16="http://schemas.microsoft.com/office/drawing/2014/main" id="{C9B35297-ECD1-45F2-8460-0D426A582E73}"/>
               </a:ext>
             </a:extLst>
           </p:cNvPr>
@@ -10318,7 +10240,7 @@
                   <a:srgbClr val="116B49"/>
                 </a:solidFill>
               </a:rPr>
-              <a:t>Проблемные примеры</a:t>
+              <a:t>Проблемные случаи</a:t>
             </a:r>
           </a:p>
         </p:txBody>
@@ -10328,7 +10250,7 @@
           <p:cNvPr id="25" name="">
             <a:extLst xmlns:a="http://schemas.openxmlformats.org/drawingml/2006/main">
               <a:ext uri="{FF2B5EF4-FFF2-40B4-BE49-F238E27FC236}">
-                <a16:creationId xmlns:a16="http://schemas.microsoft.com/office/drawing/2014/main" id="{5759B7C2-F2A1-4E14-965B-96247AD86C41}"/>
+                <a16:creationId xmlns:a16="http://schemas.microsoft.com/office/drawing/2014/main" id="{85909DB6-3C11-4770-BE9D-25F524DB5030}"/>
               </a:ext>
             </a:extLst>
           </p:cNvPr>
@@ -10364,31 +10286,31 @@
           <a:lstStyle xmlns:a="http://schemas.openxmlformats.org/drawingml/2006/main"/>
           <a:p xmlns:a="http://schemas.openxmlformats.org/drawingml/2006/main">
             <a:pPr algn="l">
-              <a:defRPr sz="1050" b="0">
+              <a:defRPr sz="1275" b="0">
                 <a:solidFill>
                   <a:srgbClr val="101214"/>
                 </a:solidFill>
               </a:defRPr>
             </a:pPr>
             <a:r>
-              <a:rPr sz="1050" b="0">
+              <a:rPr sz="1275" b="0">
                 <a:solidFill>
                   <a:srgbClr val="101214"/>
                 </a:solidFill>
               </a:rPr>
-              <a:t>Сохранены и слабые случаи,</a:t>
+              <a:t>Сохранены и слабые примеры,</a:t>
             </a:r>
           </a:p>
           <a:p xmlns:a="http://schemas.openxmlformats.org/drawingml/2006/main">
             <a:pPr algn="l">
-              <a:defRPr sz="1050" b="0">
+              <a:defRPr sz="1275" b="0">
                 <a:solidFill>
                   <a:srgbClr val="101214"/>
                 </a:solidFill>
               </a:defRPr>
             </a:pPr>
             <a:r>
-              <a:rPr sz="1050" b="0">
+              <a:rPr sz="1275" b="0">
                 <a:solidFill>
                   <a:srgbClr val="101214"/>
                 </a:solidFill>
@@ -10398,14 +10320,14 @@
           </a:p>
           <a:p xmlns:a="http://schemas.openxmlformats.org/drawingml/2006/main">
             <a:pPr algn="l">
-              <a:defRPr sz="1050" b="0">
+              <a:defRPr sz="1275" b="0">
                 <a:solidFill>
                   <a:srgbClr val="101214"/>
                 </a:solidFill>
               </a:defRPr>
             </a:pPr>
             <a:r>
-              <a:rPr sz="1050" b="0">
+              <a:rPr sz="1275" b="0">
                 <a:solidFill>
                   <a:srgbClr val="101214"/>
                 </a:solidFill>
@@ -10420,7 +10342,7 @@
           <p:cNvPr id="26" name="">
             <a:extLst xmlns:a="http://schemas.openxmlformats.org/drawingml/2006/main">
               <a:ext uri="{FF2B5EF4-FFF2-40B4-BE49-F238E27FC236}">
-                <a16:creationId xmlns:a16="http://schemas.microsoft.com/office/drawing/2014/main" id="{C909481A-E3BB-48F0-8F2A-5E10320AB71A}"/>
+                <a16:creationId xmlns:a16="http://schemas.microsoft.com/office/drawing/2014/main" id="{6B638ADA-EFA2-4096-B3D9-F1195521B652}"/>
               </a:ext>
             </a:extLst>
           </p:cNvPr>
@@ -10457,7 +10379,7 @@
           <p:cNvPr id="27" name="">
             <a:extLst xmlns:a="http://schemas.openxmlformats.org/drawingml/2006/main">
               <a:ext uri="{FF2B5EF4-FFF2-40B4-BE49-F238E27FC236}">
-                <a16:creationId xmlns:a16="http://schemas.microsoft.com/office/drawing/2014/main" id="{5E7F0387-02F2-4CEE-8FC5-EEBFBE5B6CF0}"/>
+                <a16:creationId xmlns:a16="http://schemas.microsoft.com/office/drawing/2014/main" id="{44EC6F26-AF58-47C1-9601-CBE5FA009FC0}"/>
               </a:ext>
             </a:extLst>
           </p:cNvPr>
@@ -10492,7 +10414,7 @@
           <p:cNvPr id="28" name="">
             <a:extLst xmlns:a="http://schemas.openxmlformats.org/drawingml/2006/main">
               <a:ext uri="{FF2B5EF4-FFF2-40B4-BE49-F238E27FC236}">
-                <a16:creationId xmlns:a16="http://schemas.microsoft.com/office/drawing/2014/main" id="{C09FF792-3BED-42FB-90B6-4797DD113C44}"/>
+                <a16:creationId xmlns:a16="http://schemas.microsoft.com/office/drawing/2014/main" id="{D53D21ED-03E5-43B7-89B1-461C9430D46A}"/>
               </a:ext>
             </a:extLst>
           </p:cNvPr>
@@ -10527,7 +10449,7 @@
           <p:cNvPr id="29" name="">
             <a:extLst xmlns:a="http://schemas.openxmlformats.org/drawingml/2006/main">
               <a:ext uri="{FF2B5EF4-FFF2-40B4-BE49-F238E27FC236}">
-                <a16:creationId xmlns:a16="http://schemas.microsoft.com/office/drawing/2014/main" id="{9AA41AB5-92C6-410C-A4DE-934D0D0BE8CE}"/>
+                <a16:creationId xmlns:a16="http://schemas.microsoft.com/office/drawing/2014/main" id="{618421DF-E58C-42BF-B489-E85230AE8430}"/>
               </a:ext>
             </a:extLst>
           </p:cNvPr>
@@ -10562,7 +10484,7 @@
           <p:cNvPr id="30" name="">
             <a:extLst xmlns:a="http://schemas.openxmlformats.org/drawingml/2006/main">
               <a:ext uri="{FF2B5EF4-FFF2-40B4-BE49-F238E27FC236}">
-                <a16:creationId xmlns:a16="http://schemas.microsoft.com/office/drawing/2014/main" id="{9873A723-0679-4AE1-A391-A64FAF3BB2B6}"/>
+                <a16:creationId xmlns:a16="http://schemas.microsoft.com/office/drawing/2014/main" id="{0CA43530-6583-47FD-8B15-1242E01B6086}"/>
               </a:ext>
             </a:extLst>
           </p:cNvPr>
@@ -10597,7 +10519,7 @@
           <p:cNvPr id="31" name="">
             <a:extLst xmlns:a="http://schemas.openxmlformats.org/drawingml/2006/main">
               <a:ext uri="{FF2B5EF4-FFF2-40B4-BE49-F238E27FC236}">
-                <a16:creationId xmlns:a16="http://schemas.microsoft.com/office/drawing/2014/main" id="{AD8B6D49-0380-4EF7-BE21-75FC510FDFCA}"/>
+                <a16:creationId xmlns:a16="http://schemas.microsoft.com/office/drawing/2014/main" id="{3BAD9DC4-9396-4EC9-9564-8D80860DBD35}"/>
               </a:ext>
             </a:extLst>
           </p:cNvPr>
@@ -10632,7 +10554,7 @@
           <p:cNvPr id="32" name="">
             <a:extLst xmlns:a="http://schemas.openxmlformats.org/drawingml/2006/main">
               <a:ext uri="{FF2B5EF4-FFF2-40B4-BE49-F238E27FC236}">
-                <a16:creationId xmlns:a16="http://schemas.microsoft.com/office/drawing/2014/main" id="{CA12FC9D-86E1-4D0F-9221-F39C572BAB3A}"/>
+                <a16:creationId xmlns:a16="http://schemas.microsoft.com/office/drawing/2014/main" id="{FDFEB197-1648-4A07-B198-E718F2A8EF91}"/>
               </a:ext>
             </a:extLst>
           </p:cNvPr>
@@ -10690,7 +10612,7 @@
           <p:cNvPr id="33" name="">
             <a:extLst xmlns:a="http://schemas.openxmlformats.org/drawingml/2006/main">
               <a:ext uri="{FF2B5EF4-FFF2-40B4-BE49-F238E27FC236}">
-                <a16:creationId xmlns:a16="http://schemas.microsoft.com/office/drawing/2014/main" id="{E9A83CBE-CEFC-41D6-B323-40FA96C0CA07}"/>
+                <a16:creationId xmlns:a16="http://schemas.microsoft.com/office/drawing/2014/main" id="{528AE1FC-336B-46DC-B277-8F981FD0BDDD}"/>
               </a:ext>
             </a:extLst>
           </p:cNvPr>
@@ -10726,31 +10648,31 @@
           <a:lstStyle xmlns:a="http://schemas.openxmlformats.org/drawingml/2006/main"/>
           <a:p xmlns:a="http://schemas.openxmlformats.org/drawingml/2006/main">
             <a:pPr algn="l">
-              <a:defRPr sz="1050" b="0">
+              <a:defRPr sz="1275" b="0">
                 <a:solidFill>
                   <a:srgbClr val="101214"/>
                 </a:solidFill>
               </a:defRPr>
             </a:pPr>
             <a:r>
-              <a:rPr sz="1050" b="0">
+              <a:rPr sz="1275" b="0">
                 <a:solidFill>
                   <a:srgbClr val="101214"/>
                 </a:solidFill>
               </a:rPr>
-              <a:t>В GitHub и ClearML собраны</a:t>
+              <a:t>В GitHub и ClearML есть</a:t>
             </a:r>
           </a:p>
           <a:p xmlns:a="http://schemas.openxmlformats.org/drawingml/2006/main">
             <a:pPr algn="l">
-              <a:defRPr sz="1050" b="0">
+              <a:defRPr sz="1275" b="0">
                 <a:solidFill>
                   <a:srgbClr val="101214"/>
                 </a:solidFill>
               </a:defRPr>
             </a:pPr>
             <a:r>
-              <a:rPr sz="1050" b="0">
+              <a:rPr sz="1275" b="0">
                 <a:solidFill>
                   <a:srgbClr val="101214"/>
                 </a:solidFill>
@@ -10760,14 +10682,14 @@
           </a:p>
           <a:p xmlns:a="http://schemas.openxmlformats.org/drawingml/2006/main">
             <a:pPr algn="l">
-              <a:defRPr sz="1050" b="0">
+              <a:defRPr sz="1275" b="0">
                 <a:solidFill>
                   <a:srgbClr val="101214"/>
                 </a:solidFill>
               </a:defRPr>
             </a:pPr>
             <a:r>
-              <a:rPr sz="1050" b="0">
+              <a:rPr sz="1275" b="0">
                 <a:solidFill>
                   <a:srgbClr val="101214"/>
                 </a:solidFill>
@@ -10782,7 +10704,7 @@
           <p:cNvPr id="34" name="">
             <a:extLst xmlns:a="http://schemas.openxmlformats.org/drawingml/2006/main">
               <a:ext uri="{FF2B5EF4-FFF2-40B4-BE49-F238E27FC236}">
-                <a16:creationId xmlns:a16="http://schemas.microsoft.com/office/drawing/2014/main" id="{D7DD3091-24FE-46C8-8AF7-EDF834EE5649}"/>
+                <a16:creationId xmlns:a16="http://schemas.microsoft.com/office/drawing/2014/main" id="{8D44B74B-6407-4A6B-A645-0A0F929CE45E}"/>
               </a:ext>
             </a:extLst>
           </p:cNvPr>
@@ -10838,7 +10760,7 @@
     </p:spTree>
     <p:extLst>
       <p:ext uri="{BB962C8B-B14F-4D97-AF65-F5344CB8AC3E}">
-        <p14:creationId xmlns:p14="http://schemas.microsoft.com/office/powerpoint/2010/main" val="1111280267"/>
+        <p14:creationId xmlns:p14="http://schemas.microsoft.com/office/powerpoint/2010/main" val="333791409"/>
       </p:ext>
     </p:extLst>
   </p:cSld>
@@ -10869,7 +10791,7 @@
           <p:cNvPr id="1" name="Slide Number Placeholder 5">
             <a:extLst xmlns:a="http://schemas.openxmlformats.org/drawingml/2006/main">
               <a:ext uri="{FF2B5EF4-FFF2-40B4-BE49-F238E27FC236}">
-                <a16:creationId xmlns:a16="http://schemas.microsoft.com/office/drawing/2014/main" id="{CF8FB0CB-3547-4076-A20A-07C3536CB66E}"/>
+                <a16:creationId xmlns:a16="http://schemas.microsoft.com/office/drawing/2014/main" id="{75C22673-2D44-4F8F-AA03-6970E94CAA50}"/>
               </a:ext>
             </a:extLst>
           </p:cNvPr>
@@ -10905,7 +10827,7 @@
           <p:nvPr/>
         </p:nvPicPr>
         <p:blipFill>
-          <a:blip xmlns:r="http://schemas.openxmlformats.org/officeDocument/2006/relationships" xmlns:a="http://schemas.openxmlformats.org/drawingml/2006/main" r:embed="R01e095b78c5a42c5"/>
+          <a:blip xmlns:r="http://schemas.openxmlformats.org/officeDocument/2006/relationships" xmlns:a="http://schemas.openxmlformats.org/drawingml/2006/main" r:embed="R4dea1d5870604134"/>
           <a:srcRect xmlns:a="http://schemas.openxmlformats.org/drawingml/2006/main" l="0" t="2470" r="0" b="2470"/>
           <a:stretch xmlns:a="http://schemas.openxmlformats.org/drawingml/2006/main">
             <a:fillRect l="0" t="0" r="0" b="0"/>
@@ -10926,7 +10848,7 @@
           <p:cNvPr id="3" name="">
             <a:extLst xmlns:a="http://schemas.openxmlformats.org/drawingml/2006/main">
               <a:ext uri="{FF2B5EF4-FFF2-40B4-BE49-F238E27FC236}">
-                <a16:creationId xmlns:a16="http://schemas.microsoft.com/office/drawing/2014/main" id="{E8DE52E7-C43A-47AB-B358-060276FEFA93}"/>
+                <a16:creationId xmlns:a16="http://schemas.microsoft.com/office/drawing/2014/main" id="{3A5E28E8-CD60-4229-B7FB-DBFC65215DC7}"/>
               </a:ext>
             </a:extLst>
           </p:cNvPr>
@@ -10963,7 +10885,7 @@
           <p:cNvPr id="4" name="">
             <a:extLst xmlns:a="http://schemas.openxmlformats.org/drawingml/2006/main">
               <a:ext uri="{FF2B5EF4-FFF2-40B4-BE49-F238E27FC236}">
-                <a16:creationId xmlns:a16="http://schemas.microsoft.com/office/drawing/2014/main" id="{2CF1AEAC-D45B-47B6-BE02-C4D5EB65D47E}"/>
+                <a16:creationId xmlns:a16="http://schemas.microsoft.com/office/drawing/2014/main" id="{DA435F72-6FF2-4D6F-B3EE-7CAF98D46037}"/>
               </a:ext>
             </a:extLst>
           </p:cNvPr>
@@ -11021,7 +10943,7 @@
           <p:cNvPr id="5" name="">
             <a:extLst xmlns:a="http://schemas.openxmlformats.org/drawingml/2006/main">
               <a:ext uri="{FF2B5EF4-FFF2-40B4-BE49-F238E27FC236}">
-                <a16:creationId xmlns:a16="http://schemas.microsoft.com/office/drawing/2014/main" id="{4D453413-5BC0-4264-BCBA-9605A2E1B07C}"/>
+                <a16:creationId xmlns:a16="http://schemas.microsoft.com/office/drawing/2014/main" id="{AE0EE26D-5B00-4DA3-873D-04073AA908D3}"/>
               </a:ext>
             </a:extLst>
           </p:cNvPr>
@@ -11079,7 +11001,7 @@
           <p:cNvPr id="6" name="">
             <a:extLst xmlns:a="http://schemas.openxmlformats.org/drawingml/2006/main">
               <a:ext uri="{FF2B5EF4-FFF2-40B4-BE49-F238E27FC236}">
-                <a16:creationId xmlns:a16="http://schemas.microsoft.com/office/drawing/2014/main" id="{86BB9C96-24AF-492E-8383-9BE16585C619}"/>
+                <a16:creationId xmlns:a16="http://schemas.microsoft.com/office/drawing/2014/main" id="{CFAAF609-1DB4-417E-AF81-84F938701240}"/>
               </a:ext>
             </a:extLst>
           </p:cNvPr>
@@ -11114,7 +11036,7 @@
           <p:cNvPr id="7" name="">
             <a:extLst xmlns:a="http://schemas.openxmlformats.org/drawingml/2006/main">
               <a:ext uri="{FF2B5EF4-FFF2-40B4-BE49-F238E27FC236}">
-                <a16:creationId xmlns:a16="http://schemas.microsoft.com/office/drawing/2014/main" id="{777A4501-E471-4D56-9B98-8F91FF55D067}"/>
+                <a16:creationId xmlns:a16="http://schemas.microsoft.com/office/drawing/2014/main" id="{509820E0-8860-40EC-89D3-6062BECB658A}"/>
               </a:ext>
             </a:extLst>
           </p:cNvPr>
@@ -11147,7 +11069,7 @@
           <p:cNvPr id="8" name="">
             <a:extLst xmlns:a="http://schemas.openxmlformats.org/drawingml/2006/main">
               <a:ext uri="{FF2B5EF4-FFF2-40B4-BE49-F238E27FC236}">
-                <a16:creationId xmlns:a16="http://schemas.microsoft.com/office/drawing/2014/main" id="{A1920CE3-7D35-4199-A74E-239BAC91704D}"/>
+                <a16:creationId xmlns:a16="http://schemas.microsoft.com/office/drawing/2014/main" id="{AD174225-2751-461E-BA3A-A1D6A3C638B4}"/>
               </a:ext>
             </a:extLst>
           </p:cNvPr>
@@ -11195,7 +11117,7 @@
                   <a:srgbClr val="101214"/>
                 </a:solidFill>
               </a:rPr>
-              <a:t>Что подготовлено к сдаче</a:t>
+              <a:t>Готовность к сдаче</a:t>
             </a:r>
           </a:p>
         </p:txBody>
@@ -11205,7 +11127,7 @@
           <p:cNvPr id="9" name="">
             <a:extLst xmlns:a="http://schemas.openxmlformats.org/drawingml/2006/main">
               <a:ext uri="{FF2B5EF4-FFF2-40B4-BE49-F238E27FC236}">
-                <a16:creationId xmlns:a16="http://schemas.microsoft.com/office/drawing/2014/main" id="{095015F1-CC31-418A-9ECB-DE0648A5432D}"/>
+                <a16:creationId xmlns:a16="http://schemas.microsoft.com/office/drawing/2014/main" id="{76E3DF59-1043-4927-BAB3-45E95965628E}"/>
               </a:ext>
             </a:extLst>
           </p:cNvPr>
@@ -11253,7 +11175,7 @@
                   <a:srgbClr val="30363A"/>
                 </a:solidFill>
               </a:rPr>
-              <a:t>Проект оформлен в репозитории, снабжён отчётом, ClearML-витриной, графиками и презентацией.</a:t>
+              <a:t>Проект собран в GitHub, снабжён материалами в docs и одной итоговой задачей ClearML.</a:t>
             </a:r>
           </a:p>
         </p:txBody>
@@ -11263,7 +11185,7 @@
           <p:cNvPr id="10" name="">
             <a:extLst xmlns:a="http://schemas.openxmlformats.org/drawingml/2006/main">
               <a:ext uri="{FF2B5EF4-FFF2-40B4-BE49-F238E27FC236}">
-                <a16:creationId xmlns:a16="http://schemas.microsoft.com/office/drawing/2014/main" id="{738A2AD1-94A9-41C9-8E3C-192EFF3C60E3}"/>
+                <a16:creationId xmlns:a16="http://schemas.microsoft.com/office/drawing/2014/main" id="{BC0028E7-2ADE-4C14-A00A-E55ED133C91A}"/>
               </a:ext>
             </a:extLst>
           </p:cNvPr>
@@ -11300,7 +11222,7 @@
           <p:cNvPr id="11" name="">
             <a:extLst xmlns:a="http://schemas.openxmlformats.org/drawingml/2006/main">
               <a:ext uri="{FF2B5EF4-FFF2-40B4-BE49-F238E27FC236}">
-                <a16:creationId xmlns:a16="http://schemas.microsoft.com/office/drawing/2014/main" id="{EDB37D0B-7308-4162-887E-BEB5418F4E7F}"/>
+                <a16:creationId xmlns:a16="http://schemas.microsoft.com/office/drawing/2014/main" id="{97BA2CB0-EB3A-49C5-88B7-C3B8B597CF7E}"/>
               </a:ext>
             </a:extLst>
           </p:cNvPr>
@@ -11335,7 +11257,7 @@
           <p:cNvPr id="12" name="">
             <a:extLst xmlns:a="http://schemas.openxmlformats.org/drawingml/2006/main">
               <a:ext uri="{FF2B5EF4-FFF2-40B4-BE49-F238E27FC236}">
-                <a16:creationId xmlns:a16="http://schemas.microsoft.com/office/drawing/2014/main" id="{F9F315B9-A3CB-47D8-A812-8E1C11654CF4}"/>
+                <a16:creationId xmlns:a16="http://schemas.microsoft.com/office/drawing/2014/main" id="{6E88A2B7-6FEF-4005-AC24-AC5E5E48A2D3}"/>
               </a:ext>
             </a:extLst>
           </p:cNvPr>
@@ -11370,7 +11292,7 @@
           <p:cNvPr id="13" name="">
             <a:extLst xmlns:a="http://schemas.openxmlformats.org/drawingml/2006/main">
               <a:ext uri="{FF2B5EF4-FFF2-40B4-BE49-F238E27FC236}">
-                <a16:creationId xmlns:a16="http://schemas.microsoft.com/office/drawing/2014/main" id="{6FA2E141-30AA-4FB2-A676-6F9F32D073C2}"/>
+                <a16:creationId xmlns:a16="http://schemas.microsoft.com/office/drawing/2014/main" id="{B083259F-BF29-4CB9-9B63-DAFA0571BDA0}"/>
               </a:ext>
             </a:extLst>
           </p:cNvPr>
@@ -11405,7 +11327,7 @@
           <p:cNvPr id="14" name="">
             <a:extLst xmlns:a="http://schemas.openxmlformats.org/drawingml/2006/main">
               <a:ext uri="{FF2B5EF4-FFF2-40B4-BE49-F238E27FC236}">
-                <a16:creationId xmlns:a16="http://schemas.microsoft.com/office/drawing/2014/main" id="{18D6F960-1987-4BFE-9996-B47BDF38D3BA}"/>
+                <a16:creationId xmlns:a16="http://schemas.microsoft.com/office/drawing/2014/main" id="{B5132749-8BAF-4FDD-A161-FADD74AC08D7}"/>
               </a:ext>
             </a:extLst>
           </p:cNvPr>
@@ -11440,7 +11362,7 @@
           <p:cNvPr id="15" name="">
             <a:extLst xmlns:a="http://schemas.openxmlformats.org/drawingml/2006/main">
               <a:ext uri="{FF2B5EF4-FFF2-40B4-BE49-F238E27FC236}">
-                <a16:creationId xmlns:a16="http://schemas.microsoft.com/office/drawing/2014/main" id="{E94C45CF-C316-484D-9DEC-23B05801DC8F}"/>
+                <a16:creationId xmlns:a16="http://schemas.microsoft.com/office/drawing/2014/main" id="{E937B04A-47D4-40B0-84A2-752CE585D7C1}"/>
               </a:ext>
             </a:extLst>
           </p:cNvPr>
@@ -11475,7 +11397,7 @@
           <p:cNvPr id="16" name="">
             <a:extLst xmlns:a="http://schemas.openxmlformats.org/drawingml/2006/main">
               <a:ext uri="{FF2B5EF4-FFF2-40B4-BE49-F238E27FC236}">
-                <a16:creationId xmlns:a16="http://schemas.microsoft.com/office/drawing/2014/main" id="{6FF470EC-3E29-4408-A49C-A344D55FA9C0}"/>
+                <a16:creationId xmlns:a16="http://schemas.microsoft.com/office/drawing/2014/main" id="{555F200B-56A8-471D-A435-76A314AB28C3}"/>
               </a:ext>
             </a:extLst>
           </p:cNvPr>
@@ -11533,7 +11455,7 @@
           <p:cNvPr id="17" name="">
             <a:extLst xmlns:a="http://schemas.openxmlformats.org/drawingml/2006/main">
               <a:ext uri="{FF2B5EF4-FFF2-40B4-BE49-F238E27FC236}">
-                <a16:creationId xmlns:a16="http://schemas.microsoft.com/office/drawing/2014/main" id="{81802F89-9582-4ACE-927C-FE4E3371588A}"/>
+                <a16:creationId xmlns:a16="http://schemas.microsoft.com/office/drawing/2014/main" id="{C43A0553-856E-45DE-BD7B-2703B4B55BE3}"/>
               </a:ext>
             </a:extLst>
           </p:cNvPr>
@@ -11569,70 +11491,53 @@
           <a:lstStyle xmlns:a="http://schemas.openxmlformats.org/drawingml/2006/main"/>
           <a:p xmlns:a="http://schemas.openxmlformats.org/drawingml/2006/main">
             <a:pPr algn="l">
-              <a:defRPr sz="1050" b="0">
+              <a:defRPr sz="1275" b="0">
                 <a:solidFill>
                   <a:srgbClr val="101214"/>
                 </a:solidFill>
               </a:defRPr>
             </a:pPr>
             <a:r>
-              <a:rPr sz="1050" b="0">
+              <a:rPr sz="1275" b="0">
                 <a:solidFill>
                   <a:srgbClr val="101214"/>
                 </a:solidFill>
               </a:rPr>
-              <a:t>README содержит задачу,</a:t>
+              <a:t>README, код и материалы для</a:t>
             </a:r>
           </a:p>
           <a:p xmlns:a="http://schemas.openxmlformats.org/drawingml/2006/main">
             <a:pPr algn="l">
-              <a:defRPr sz="1050" b="0">
+              <a:defRPr sz="1275" b="0">
                 <a:solidFill>
                   <a:srgbClr val="101214"/>
                 </a:solidFill>
               </a:defRPr>
             </a:pPr>
             <a:r>
-              <a:rPr sz="1050" b="0">
+              <a:rPr sz="1275" b="0">
                 <a:solidFill>
                   <a:srgbClr val="101214"/>
                 </a:solidFill>
               </a:rPr>
-              <a:t>запуск и результаты, а</a:t>
+              <a:t>сдачи приведены в аккуратный</a:t>
             </a:r>
           </a:p>
           <a:p xmlns:a="http://schemas.openxmlformats.org/drawingml/2006/main">
             <a:pPr algn="l">
-              <a:defRPr sz="1050" b="0">
+              <a:defRPr sz="1275" b="0">
                 <a:solidFill>
                   <a:srgbClr val="101214"/>
                 </a:solidFill>
               </a:defRPr>
             </a:pPr>
             <a:r>
-              <a:rPr sz="1050" b="0">
+              <a:rPr sz="1275" b="0">
                 <a:solidFill>
                   <a:srgbClr val="101214"/>
                 </a:solidFill>
               </a:rPr>
-              <a:t>материалы для сдачи собраны</a:t>
-            </a:r>
-          </a:p>
-          <a:p xmlns:a="http://schemas.openxmlformats.org/drawingml/2006/main">
-            <a:pPr algn="l">
-              <a:defRPr sz="1050" b="0">
-                <a:solidFill>
-                  <a:srgbClr val="101214"/>
-                </a:solidFill>
-              </a:defRPr>
-            </a:pPr>
-            <a:r>
-              <a:rPr sz="1050" b="0">
-                <a:solidFill>
-                  <a:srgbClr val="101214"/>
-                </a:solidFill>
-              </a:rPr>
-              <a:t>в docs.</a:t>
+              <a:t>вид.</a:t>
             </a:r>
           </a:p>
         </p:txBody>
@@ -11642,7 +11547,7 @@
           <p:cNvPr id="18" name="">
             <a:extLst xmlns:a="http://schemas.openxmlformats.org/drawingml/2006/main">
               <a:ext uri="{FF2B5EF4-FFF2-40B4-BE49-F238E27FC236}">
-                <a16:creationId xmlns:a16="http://schemas.microsoft.com/office/drawing/2014/main" id="{39185009-CDEC-4C2C-80EA-231816F7DF73}"/>
+                <a16:creationId xmlns:a16="http://schemas.microsoft.com/office/drawing/2014/main" id="{D38C080F-C91E-4297-84BD-75D2B73CAFBC}"/>
               </a:ext>
             </a:extLst>
           </p:cNvPr>
@@ -11679,7 +11584,7 @@
           <p:cNvPr id="19" name="">
             <a:extLst xmlns:a="http://schemas.openxmlformats.org/drawingml/2006/main">
               <a:ext uri="{FF2B5EF4-FFF2-40B4-BE49-F238E27FC236}">
-                <a16:creationId xmlns:a16="http://schemas.microsoft.com/office/drawing/2014/main" id="{F0FA5577-2ED6-4E87-8152-93C309BD07AF}"/>
+                <a16:creationId xmlns:a16="http://schemas.microsoft.com/office/drawing/2014/main" id="{72E70D79-438A-4B33-AE25-014F144EFA18}"/>
               </a:ext>
             </a:extLst>
           </p:cNvPr>
@@ -11714,7 +11619,7 @@
           <p:cNvPr id="20" name="">
             <a:extLst xmlns:a="http://schemas.openxmlformats.org/drawingml/2006/main">
               <a:ext uri="{FF2B5EF4-FFF2-40B4-BE49-F238E27FC236}">
-                <a16:creationId xmlns:a16="http://schemas.microsoft.com/office/drawing/2014/main" id="{D464494C-C971-461F-8B13-9D75FFE98972}"/>
+                <a16:creationId xmlns:a16="http://schemas.microsoft.com/office/drawing/2014/main" id="{52B4D503-2D72-494D-8DB7-6570BB1325CA}"/>
               </a:ext>
             </a:extLst>
           </p:cNvPr>
@@ -11749,7 +11654,7 @@
           <p:cNvPr id="21" name="">
             <a:extLst xmlns:a="http://schemas.openxmlformats.org/drawingml/2006/main">
               <a:ext uri="{FF2B5EF4-FFF2-40B4-BE49-F238E27FC236}">
-                <a16:creationId xmlns:a16="http://schemas.microsoft.com/office/drawing/2014/main" id="{436E71A2-5BF1-4C99-9724-4B909B881E4B}"/>
+                <a16:creationId xmlns:a16="http://schemas.microsoft.com/office/drawing/2014/main" id="{9A867207-3B7C-438B-8701-0BB1964EAE00}"/>
               </a:ext>
             </a:extLst>
           </p:cNvPr>
@@ -11782,7 +11687,7 @@
           <p:cNvPr id="22" name="">
             <a:extLst xmlns:a="http://schemas.openxmlformats.org/drawingml/2006/main">
               <a:ext uri="{FF2B5EF4-FFF2-40B4-BE49-F238E27FC236}">
-                <a16:creationId xmlns:a16="http://schemas.microsoft.com/office/drawing/2014/main" id="{3B27CCE6-E861-4C63-894A-5C56AC42CF30}"/>
+                <a16:creationId xmlns:a16="http://schemas.microsoft.com/office/drawing/2014/main" id="{A71EB3D3-A3A9-47D9-91E6-6134FA900686}"/>
               </a:ext>
             </a:extLst>
           </p:cNvPr>
@@ -11815,7 +11720,7 @@
           <p:cNvPr id="23" name="">
             <a:extLst xmlns:a="http://schemas.openxmlformats.org/drawingml/2006/main">
               <a:ext uri="{FF2B5EF4-FFF2-40B4-BE49-F238E27FC236}">
-                <a16:creationId xmlns:a16="http://schemas.microsoft.com/office/drawing/2014/main" id="{FDE5D9EB-1C0D-460D-8BE0-0A40BC11E9D6}"/>
+                <a16:creationId xmlns:a16="http://schemas.microsoft.com/office/drawing/2014/main" id="{88922DB0-42E1-4E41-BC7E-6FD283BF3173}"/>
               </a:ext>
             </a:extLst>
           </p:cNvPr>
@@ -11850,7 +11755,7 @@
           <p:cNvPr id="24" name="">
             <a:extLst xmlns:a="http://schemas.openxmlformats.org/drawingml/2006/main">
               <a:ext uri="{FF2B5EF4-FFF2-40B4-BE49-F238E27FC236}">
-                <a16:creationId xmlns:a16="http://schemas.microsoft.com/office/drawing/2014/main" id="{A4AC5552-6C2E-4E5C-B904-321358278C23}"/>
+                <a16:creationId xmlns:a16="http://schemas.microsoft.com/office/drawing/2014/main" id="{39657A6F-FC2C-4795-BD5C-4B5226C93765}"/>
               </a:ext>
             </a:extLst>
           </p:cNvPr>
@@ -11898,7 +11803,7 @@
                   <a:srgbClr val="116B49"/>
                 </a:solidFill>
               </a:rPr>
-              <a:t>ClearML</a:t>
+              <a:t>Docs</a:t>
             </a:r>
           </a:p>
         </p:txBody>
@@ -11908,7 +11813,7 @@
           <p:cNvPr id="25" name="">
             <a:extLst xmlns:a="http://schemas.openxmlformats.org/drawingml/2006/main">
               <a:ext uri="{FF2B5EF4-FFF2-40B4-BE49-F238E27FC236}">
-                <a16:creationId xmlns:a16="http://schemas.microsoft.com/office/drawing/2014/main" id="{0B5C9961-B034-428B-9318-A14A8476077D}"/>
+                <a16:creationId xmlns:a16="http://schemas.microsoft.com/office/drawing/2014/main" id="{49AC1912-B80A-410B-A0A9-9B0C44307AB1}"/>
               </a:ext>
             </a:extLst>
           </p:cNvPr>
@@ -11944,70 +11849,53 @@
           <a:lstStyle xmlns:a="http://schemas.openxmlformats.org/drawingml/2006/main"/>
           <a:p xmlns:a="http://schemas.openxmlformats.org/drawingml/2006/main">
             <a:pPr algn="l">
-              <a:defRPr sz="1050" b="0">
+              <a:defRPr sz="1275" b="0">
                 <a:solidFill>
                   <a:srgbClr val="101214"/>
                 </a:solidFill>
               </a:defRPr>
             </a:pPr>
             <a:r>
-              <a:rPr sz="1050" b="0">
+              <a:rPr sz="1275" b="0">
                 <a:solidFill>
                   <a:srgbClr val="101214"/>
                 </a:solidFill>
               </a:rPr>
-              <a:t>Оставлена одна</a:t>
+              <a:t>Сформированы report.pdf,</a:t>
             </a:r>
           </a:p>
           <a:p xmlns:a="http://schemas.openxmlformats.org/drawingml/2006/main">
             <a:pPr algn="l">
-              <a:defRPr sz="1050" b="0">
+              <a:defRPr sz="1275" b="0">
                 <a:solidFill>
                   <a:srgbClr val="101214"/>
                 </a:solidFill>
               </a:defRPr>
             </a:pPr>
             <a:r>
-              <a:rPr sz="1050" b="0">
+              <a:rPr sz="1275" b="0">
                 <a:solidFill>
                   <a:srgbClr val="101214"/>
                 </a:solidFill>
               </a:rPr>
-              <a:t>showcase-задача с таблицами,</a:t>
+              <a:t>журнал задач, outline отчёта</a:t>
             </a:r>
           </a:p>
           <a:p xmlns:a="http://schemas.openxmlformats.org/drawingml/2006/main">
             <a:pPr algn="l">
-              <a:defRPr sz="1050" b="0">
+              <a:defRPr sz="1275" b="0">
                 <a:solidFill>
                   <a:srgbClr val="101214"/>
                 </a:solidFill>
               </a:defRPr>
             </a:pPr>
             <a:r>
-              <a:rPr sz="1050" b="0">
+              <a:rPr sz="1275" b="0">
                 <a:solidFill>
                   <a:srgbClr val="101214"/>
                 </a:solidFill>
               </a:rPr>
-              <a:t>графиками, визуалами и</a:t>
-            </a:r>
-          </a:p>
-          <a:p xmlns:a="http://schemas.openxmlformats.org/drawingml/2006/main">
-            <a:pPr algn="l">
-              <a:defRPr sz="1050" b="0">
-                <a:solidFill>
-                  <a:srgbClr val="101214"/>
-                </a:solidFill>
-              </a:defRPr>
-            </a:pPr>
-            <a:r>
-              <a:rPr sz="1050" b="0">
-                <a:solidFill>
-                  <a:srgbClr val="101214"/>
-                </a:solidFill>
-              </a:rPr>
-              <a:t>ссылкой на репозиторий.</a:t>
+              <a:t>и презентация.</a:t>
             </a:r>
           </a:p>
         </p:txBody>
@@ -12017,7 +11905,7 @@
           <p:cNvPr id="26" name="">
             <a:extLst xmlns:a="http://schemas.openxmlformats.org/drawingml/2006/main">
               <a:ext uri="{FF2B5EF4-FFF2-40B4-BE49-F238E27FC236}">
-                <a16:creationId xmlns:a16="http://schemas.microsoft.com/office/drawing/2014/main" id="{8CE188E3-5909-45BA-AB5D-89319A0647E2}"/>
+                <a16:creationId xmlns:a16="http://schemas.microsoft.com/office/drawing/2014/main" id="{7994579B-4DFB-4A17-82B1-9CCDBDE73A56}"/>
               </a:ext>
             </a:extLst>
           </p:cNvPr>
@@ -12054,7 +11942,7 @@
           <p:cNvPr id="27" name="">
             <a:extLst xmlns:a="http://schemas.openxmlformats.org/drawingml/2006/main">
               <a:ext uri="{FF2B5EF4-FFF2-40B4-BE49-F238E27FC236}">
-                <a16:creationId xmlns:a16="http://schemas.microsoft.com/office/drawing/2014/main" id="{FCA41CF9-5052-4C89-A9D0-44BAE7EE1CFD}"/>
+                <a16:creationId xmlns:a16="http://schemas.microsoft.com/office/drawing/2014/main" id="{83A30BBE-A630-4D61-9DC2-197D43EC5B36}"/>
               </a:ext>
             </a:extLst>
           </p:cNvPr>
@@ -12089,7 +11977,7 @@
           <p:cNvPr id="28" name="">
             <a:extLst xmlns:a="http://schemas.openxmlformats.org/drawingml/2006/main">
               <a:ext uri="{FF2B5EF4-FFF2-40B4-BE49-F238E27FC236}">
-                <a16:creationId xmlns:a16="http://schemas.microsoft.com/office/drawing/2014/main" id="{BE4170BD-6906-4090-A963-10FFCAD949BD}"/>
+                <a16:creationId xmlns:a16="http://schemas.microsoft.com/office/drawing/2014/main" id="{12732292-4E0A-4F08-B07C-67EFF0937EC0}"/>
               </a:ext>
             </a:extLst>
           </p:cNvPr>
@@ -12124,7 +12012,7 @@
           <p:cNvPr id="29" name="">
             <a:extLst xmlns:a="http://schemas.openxmlformats.org/drawingml/2006/main">
               <a:ext uri="{FF2B5EF4-FFF2-40B4-BE49-F238E27FC236}">
-                <a16:creationId xmlns:a16="http://schemas.microsoft.com/office/drawing/2014/main" id="{77A3EB33-A309-498E-A358-607DC20E0574}"/>
+                <a16:creationId xmlns:a16="http://schemas.microsoft.com/office/drawing/2014/main" id="{B7E4AC58-F47D-40CE-A2A8-572C1AB4A557}"/>
               </a:ext>
             </a:extLst>
           </p:cNvPr>
@@ -12159,7 +12047,7 @@
           <p:cNvPr id="30" name="">
             <a:extLst xmlns:a="http://schemas.openxmlformats.org/drawingml/2006/main">
               <a:ext uri="{FF2B5EF4-FFF2-40B4-BE49-F238E27FC236}">
-                <a16:creationId xmlns:a16="http://schemas.microsoft.com/office/drawing/2014/main" id="{B04C366D-75EE-4FB1-8460-E28DC110143F}"/>
+                <a16:creationId xmlns:a16="http://schemas.microsoft.com/office/drawing/2014/main" id="{7188B560-17AF-4330-846B-DB55C5C8A1DB}"/>
               </a:ext>
             </a:extLst>
           </p:cNvPr>
@@ -12194,7 +12082,7 @@
           <p:cNvPr id="31" name="">
             <a:extLst xmlns:a="http://schemas.openxmlformats.org/drawingml/2006/main">
               <a:ext uri="{FF2B5EF4-FFF2-40B4-BE49-F238E27FC236}">
-                <a16:creationId xmlns:a16="http://schemas.microsoft.com/office/drawing/2014/main" id="{2477CD6E-A51E-4E5D-A8C2-6023AE7D41FE}"/>
+                <a16:creationId xmlns:a16="http://schemas.microsoft.com/office/drawing/2014/main" id="{703DB2DF-6D3D-4D27-9374-5651B51ACAEE}"/>
               </a:ext>
             </a:extLst>
           </p:cNvPr>
@@ -12229,7 +12117,7 @@
           <p:cNvPr id="32" name="">
             <a:extLst xmlns:a="http://schemas.openxmlformats.org/drawingml/2006/main">
               <a:ext uri="{FF2B5EF4-FFF2-40B4-BE49-F238E27FC236}">
-                <a16:creationId xmlns:a16="http://schemas.microsoft.com/office/drawing/2014/main" id="{8B053123-A5D3-4D83-ADFC-5EDA1B0B92E8}"/>
+                <a16:creationId xmlns:a16="http://schemas.microsoft.com/office/drawing/2014/main" id="{33EB1682-454C-49EC-840E-3927AEDF2BB4}"/>
               </a:ext>
             </a:extLst>
           </p:cNvPr>
@@ -12277,7 +12165,7 @@
                   <a:srgbClr val="116B49"/>
                 </a:solidFill>
               </a:rPr>
-              <a:t>Docs</a:t>
+              <a:t>ClearML</a:t>
             </a:r>
           </a:p>
         </p:txBody>
@@ -12287,7 +12175,7 @@
           <p:cNvPr id="33" name="">
             <a:extLst xmlns:a="http://schemas.openxmlformats.org/drawingml/2006/main">
               <a:ext uri="{FF2B5EF4-FFF2-40B4-BE49-F238E27FC236}">
-                <a16:creationId xmlns:a16="http://schemas.microsoft.com/office/drawing/2014/main" id="{1FFA4134-1852-4AA4-8973-5F52F1D891EE}"/>
+                <a16:creationId xmlns:a16="http://schemas.microsoft.com/office/drawing/2014/main" id="{620B6A18-C2B1-4381-97D8-11E8F2806BA3}"/>
               </a:ext>
             </a:extLst>
           </p:cNvPr>
@@ -12323,53 +12211,53 @@
           <a:lstStyle xmlns:a="http://schemas.openxmlformats.org/drawingml/2006/main"/>
           <a:p xmlns:a="http://schemas.openxmlformats.org/drawingml/2006/main">
             <a:pPr algn="l">
-              <a:defRPr sz="1050" b="0">
+              <a:defRPr sz="1275" b="0">
                 <a:solidFill>
                   <a:srgbClr val="101214"/>
                 </a:solidFill>
               </a:defRPr>
             </a:pPr>
             <a:r>
-              <a:rPr sz="1050" b="0">
+              <a:rPr sz="1275" b="0">
                 <a:solidFill>
                   <a:srgbClr val="101214"/>
                 </a:solidFill>
               </a:rPr>
-              <a:t>Сформированы report.pdf,</a:t>
+              <a:t>Оставлена одна</a:t>
             </a:r>
           </a:p>
           <a:p xmlns:a="http://schemas.openxmlformats.org/drawingml/2006/main">
             <a:pPr algn="l">
-              <a:defRPr sz="1050" b="0">
+              <a:defRPr sz="1275" b="0">
                 <a:solidFill>
                   <a:srgbClr val="101214"/>
                 </a:solidFill>
               </a:defRPr>
             </a:pPr>
             <a:r>
-              <a:rPr sz="1050" b="0">
+              <a:rPr sz="1275" b="0">
                 <a:solidFill>
                   <a:srgbClr val="101214"/>
                 </a:solidFill>
               </a:rPr>
-              <a:t>журнал задач и готовая</a:t>
+              <a:t>showcase-задача для показа</a:t>
             </a:r>
           </a:p>
           <a:p xmlns:a="http://schemas.openxmlformats.org/drawingml/2006/main">
             <a:pPr algn="l">
-              <a:defRPr sz="1050" b="0">
+              <a:defRPr sz="1275" b="0">
                 <a:solidFill>
                   <a:srgbClr val="101214"/>
                 </a:solidFill>
               </a:defRPr>
             </a:pPr>
             <a:r>
-              <a:rPr sz="1050" b="0">
+              <a:rPr sz="1275" b="0">
                 <a:solidFill>
                   <a:srgbClr val="101214"/>
                 </a:solidFill>
               </a:rPr>
-              <a:t>презентация.</a:t>
+              <a:t>всего проекта.</a:t>
             </a:r>
           </a:p>
         </p:txBody>
@@ -12379,7 +12267,7 @@
           <p:cNvPr id="34" name="">
             <a:extLst xmlns:a="http://schemas.openxmlformats.org/drawingml/2006/main">
               <a:ext uri="{FF2B5EF4-FFF2-40B4-BE49-F238E27FC236}">
-                <a16:creationId xmlns:a16="http://schemas.microsoft.com/office/drawing/2014/main" id="{85DBDDD7-C697-4802-BF1F-D19836A6766A}"/>
+                <a16:creationId xmlns:a16="http://schemas.microsoft.com/office/drawing/2014/main" id="{27BDD6AB-C897-44FF-9619-2DC2E5701B91}"/>
               </a:ext>
             </a:extLst>
           </p:cNvPr>
@@ -12435,7 +12323,7 @@
     </p:spTree>
     <p:extLst>
       <p:ext uri="{BB962C8B-B14F-4D97-AF65-F5344CB8AC3E}">
-        <p14:creationId xmlns:p14="http://schemas.microsoft.com/office/powerpoint/2010/main" val="289745914"/>
+        <p14:creationId xmlns:p14="http://schemas.microsoft.com/office/powerpoint/2010/main" val="19925694"/>
       </p:ext>
     </p:extLst>
   </p:cSld>
